--- a/docs/Health_Assistant_Evaluation.pptx
+++ b/docs/Health_Assistant_Evaluation.pptx
@@ -20,6 +20,9 @@
     <p:sldId id="268" r:id="rId20"/>
     <p:sldId id="269" r:id="rId21"/>
     <p:sldId id="270" r:id="rId22"/>
+    <p:sldId id="271" r:id="rId23"/>
+    <p:sldId id="272" r:id="rId24"/>
+    <p:sldId id="273" r:id="rId25"/>
   </p:sldIdLst>
   <p:sldSz cx="12191695" cy="6858000" type="screen4x3"/>
   <p:notesSz cx="6858000" cy="9144000"/>
@@ -521,12 +524,12 @@
           </a:p>
           <a:p>
             <a:r>
-              <a:t>Good morning evaluators. Today I am presenting our Grounded AI Health Assistant.</a:t>
-            </a:r>
-          </a:p>
-          <a:p>
-            <a:r>
-              <a:t>While general AI models like ChatGPT are fluent, fluent fabrication in medicine can be fatal. Our system is designed around auditable medical provenance (WHO, NHS, NIH, CDC), strict negative constraints, and sub-millisecond emergency short-circuiting.</a:t>
+              <a:t>Good morning evaluators. Today I am presenting our Design Document Preparation and Feasibility Analysis for the Grounded AI Health Assistant &amp; Emergency Triage system.</a:t>
+            </a:r>
+          </a:p>
+          <a:p>
+            <a:r>
+              <a:t>This project addresses UN SDG 3 (Good Health and Well-being) by solving the dangerous issue of fluent medical hallucinations through auditable provenance, strict negative constraints, and deterministic emergency triage.</a:t>
             </a:r>
           </a:p>
         </p:txBody>
@@ -601,7 +604,12 @@
           </a:p>
           <a:p>
             <a:r>
-              <a:t>Highlight that the application is fully functional end-to-end today. Mention the 282 passing unit tests. Most student projects have zero automated tests; having 282 tests passing in 4.4 seconds demonstrates production-grade engineering.</a:t>
+              <a:t>Evaluators often ask: 'Why only 42-50 documents? Why not index Wikipedia or the entire web?'</a:t>
+            </a:r>
+          </a:p>
+          <a:p>
+            <a:r>
+              <a:t>Answer: Breadth was traded for legal and clinical provenance. You cannot verify 10,000 scraped blog posts. Every document here is from WHO, NHS, NIH, or CDC, with legally tracked licenses.</a:t>
             </a:r>
           </a:p>
         </p:txBody>
@@ -676,12 +684,7 @@
           </a:p>
           <a:p>
             <a:r>
-              <a:t>Explain the numbers on this slide.</a:t>
-            </a:r>
-          </a:p>
-          <a:p>
-            <a:r>
-              <a:t>The most critical statistic is 'False-Hit Rate on Out-of-Corpus: 0%'. When tested with questions outside the corpus, not a single one cleared the 0.65 threshold. This proves that the system never invents facts when it doesn't know the answer.</a:t>
+              <a:t>Highlight the 20 ms vs 2500 ms speedup. Evaluators will appreciate that emergency triage is deterministic regex, not an LLM guess. Mention the cost asymmetry: we deliberately escalate chest pain even when the user suspects reflux.</a:t>
             </a:r>
           </a:p>
         </p:txBody>
@@ -756,17 +759,7 @@
           </a:p>
           <a:p>
             <a:r>
-              <a:t>Transition to the live demo here.</a:t>
-            </a:r>
-          </a:p>
-          <a:p>
-            <a:r>
-              <a:t>Say: 'I will now demonstrate these four beats live in our running application.'</a:t>
-            </a:r>
-          </a:p>
-          <a:p>
-            <a:r>
-              <a:t>Remember: If demoing on Render, wake the backend 5 minutes beforehand by hitting /health.</a:t>
+              <a:t>Explain why resilience matters. Free tier APIs have strict rate limits. Our system handles API exhaustion gracefully by switching providers on the fly, and uses atomic Redis Lua scripts so rate limits can't be circumvented by concurrent requests.</a:t>
             </a:r>
           </a:p>
         </p:txBody>
@@ -841,12 +834,7 @@
           </a:p>
           <a:p>
             <a:r>
-              <a:t>This slide directly answers the faculty's #1 question: 'Why not just use ChatGPT?'</a:t>
-            </a:r>
-          </a:p>
-          <a:p>
-            <a:r>
-              <a:t>Deliver the punchline: 'Raw intelligence without architectural constraints is dangerous in medicine. Our system is not an unconstrained conversational chatbot; it is a safety-engineered, legally auditable clinical information system.'</a:t>
+              <a:t>Highlight that the application is fully functional end-to-end today. Mention the 282 passing unit tests. Most student projects have zero automated tests; having 282 tests passing in 4.4 seconds demonstrates production-grade engineering.</a:t>
             </a:r>
           </a:p>
         </p:txBody>
@@ -921,7 +909,12 @@
           </a:p>
           <a:p>
             <a:r>
-              <a:t>Evaluators appreciate candidates who honestly know their system's boundaries. State clearly that the corpus is frozen on purpose, and outline practical next steps like Indian regional language support and ICMR integration.</a:t>
+              <a:t>Explain the numbers on this slide.</a:t>
+            </a:r>
+          </a:p>
+          <a:p>
+            <a:r>
+              <a:t>The most critical statistic is 'False-Hit Rate on Out-of-Corpus: 0%'. When tested with questions outside the corpus, not a single one cleared the 0.65 threshold. This proves that the system never invents facts when it doesn't know the answer.</a:t>
             </a:r>
           </a:p>
         </p:txBody>
@@ -996,6 +989,246 @@
           </a:p>
           <a:p>
             <a:r>
+              <a:t>Transition to the live demo here.</a:t>
+            </a:r>
+          </a:p>
+          <a:p>
+            <a:r>
+              <a:t>Say: 'I will now demonstrate these four beats live in our running application.'</a:t>
+            </a:r>
+          </a:p>
+          <a:p>
+            <a:r>
+              <a:t>Remember: If demoing on Render, wake the backend 5 minutes beforehand by hitting /health.</a:t>
+            </a:r>
+          </a:p>
+        </p:txBody>
+      </p:sp>
+      <p:sp>
+        <p:nvSpPr>
+          <p:cNvPr id="4" name="Slide Number Placeholder 3"/>
+          <p:cNvSpPr>
+            <a:spLocks noGrp="1"/>
+          </p:cNvSpPr>
+          <p:nvPr>
+            <p:ph type="sldNum" idx="5" sz="quarter"/>
+          </p:nvPr>
+        </p:nvSpPr>
+        <p:spPr/>
+      </p:sp>
+    </p:spTree>
+  </p:cSld>
+  <p:clrMapOvr>
+    <a:masterClrMapping/>
+  </p:clrMapOvr>
+</p:notes>
+</file>
+
+<file path=ppt/notesSlides/notesSlide16.xml><?xml version="1.0" encoding="utf-8"?>
+<p:notes xmlns:a="http://schemas.openxmlformats.org/drawingml/2006/main" xmlns:p="http://schemas.openxmlformats.org/presentationml/2006/main" xmlns:r="http://schemas.openxmlformats.org/officeDocument/2006/relationships">
+  <p:cSld>
+    <p:spTree>
+      <p:nvGrpSpPr>
+        <p:cNvPr id="1" name=""/>
+        <p:cNvGrpSpPr/>
+        <p:nvPr/>
+      </p:nvGrpSpPr>
+      <p:grpSpPr>
+        <a:xfrm>
+          <a:off x="0" y="0"/>
+          <a:ext cx="0" cy="0"/>
+          <a:chOff x="0" y="0"/>
+          <a:chExt cx="0" cy="0"/>
+        </a:xfrm>
+      </p:grpSpPr>
+      <p:sp>
+        <p:nvSpPr>
+          <p:cNvPr id="2" name="Slide Image Placeholder 1"/>
+          <p:cNvSpPr>
+            <a:spLocks noGrp="1"/>
+          </p:cNvSpPr>
+          <p:nvPr>
+            <p:ph type="sldImg" idx="2"/>
+          </p:nvPr>
+        </p:nvSpPr>
+        <p:spPr/>
+      </p:sp>
+      <p:sp>
+        <p:nvSpPr>
+          <p:cNvPr id="3" name="Notes Placeholder 2"/>
+          <p:cNvSpPr>
+            <a:spLocks noGrp="1"/>
+          </p:cNvSpPr>
+          <p:nvPr>
+            <p:ph type="body" idx="3" sz="quarter"/>
+          </p:nvPr>
+        </p:nvSpPr>
+        <p:spPr/>
+        <p:txBody>
+          <a:bodyPr/>
+          <a:lstStyle/>
+          <a:p>
+            <a:r>
+              <a:t>SPEAKER NOTES:</a:t>
+            </a:r>
+          </a:p>
+          <a:p>
+            <a:r>
+              <a:t>This slide directly answers the faculty's #1 question: 'Why not just use ChatGPT?'</a:t>
+            </a:r>
+          </a:p>
+          <a:p>
+            <a:r>
+              <a:t>Deliver the punchline: 'Raw intelligence without architectural constraints is dangerous in medicine. Our system is not an unconstrained conversational chatbot; it is a safety-engineered, legally auditable clinical information system.'</a:t>
+            </a:r>
+          </a:p>
+        </p:txBody>
+      </p:sp>
+      <p:sp>
+        <p:nvSpPr>
+          <p:cNvPr id="4" name="Slide Number Placeholder 3"/>
+          <p:cNvSpPr>
+            <a:spLocks noGrp="1"/>
+          </p:cNvSpPr>
+          <p:nvPr>
+            <p:ph type="sldNum" idx="5" sz="quarter"/>
+          </p:nvPr>
+        </p:nvSpPr>
+        <p:spPr/>
+      </p:sp>
+    </p:spTree>
+  </p:cSld>
+  <p:clrMapOvr>
+    <a:masterClrMapping/>
+  </p:clrMapOvr>
+</p:notes>
+</file>
+
+<file path=ppt/notesSlides/notesSlide17.xml><?xml version="1.0" encoding="utf-8"?>
+<p:notes xmlns:a="http://schemas.openxmlformats.org/drawingml/2006/main" xmlns:p="http://schemas.openxmlformats.org/presentationml/2006/main" xmlns:r="http://schemas.openxmlformats.org/officeDocument/2006/relationships">
+  <p:cSld>
+    <p:spTree>
+      <p:nvGrpSpPr>
+        <p:cNvPr id="1" name=""/>
+        <p:cNvGrpSpPr/>
+        <p:nvPr/>
+      </p:nvGrpSpPr>
+      <p:grpSpPr>
+        <a:xfrm>
+          <a:off x="0" y="0"/>
+          <a:ext cx="0" cy="0"/>
+          <a:chOff x="0" y="0"/>
+          <a:chExt cx="0" cy="0"/>
+        </a:xfrm>
+      </p:grpSpPr>
+      <p:sp>
+        <p:nvSpPr>
+          <p:cNvPr id="2" name="Slide Image Placeholder 1"/>
+          <p:cNvSpPr>
+            <a:spLocks noGrp="1"/>
+          </p:cNvSpPr>
+          <p:nvPr>
+            <p:ph type="sldImg" idx="2"/>
+          </p:nvPr>
+        </p:nvSpPr>
+        <p:spPr/>
+      </p:sp>
+      <p:sp>
+        <p:nvSpPr>
+          <p:cNvPr id="3" name="Notes Placeholder 2"/>
+          <p:cNvSpPr>
+            <a:spLocks noGrp="1"/>
+          </p:cNvSpPr>
+          <p:nvPr>
+            <p:ph type="body" idx="3" sz="quarter"/>
+          </p:nvPr>
+        </p:nvSpPr>
+        <p:spPr/>
+        <p:txBody>
+          <a:bodyPr/>
+          <a:lstStyle/>
+          <a:p>
+            <a:r>
+              <a:t>SPEAKER NOTES:</a:t>
+            </a:r>
+          </a:p>
+          <a:p>
+            <a:r>
+              <a:t>Evaluators appreciate candidates who honestly know their system's boundaries. State clearly that the corpus is frozen on purpose, and outline practical next steps like Indian regional language support and ICMR integration.</a:t>
+            </a:r>
+          </a:p>
+        </p:txBody>
+      </p:sp>
+      <p:sp>
+        <p:nvSpPr>
+          <p:cNvPr id="4" name="Slide Number Placeholder 3"/>
+          <p:cNvSpPr>
+            <a:spLocks noGrp="1"/>
+          </p:cNvSpPr>
+          <p:nvPr>
+            <p:ph type="sldNum" idx="5" sz="quarter"/>
+          </p:nvPr>
+        </p:nvSpPr>
+        <p:spPr/>
+      </p:sp>
+    </p:spTree>
+  </p:cSld>
+  <p:clrMapOvr>
+    <a:masterClrMapping/>
+  </p:clrMapOvr>
+</p:notes>
+</file>
+
+<file path=ppt/notesSlides/notesSlide18.xml><?xml version="1.0" encoding="utf-8"?>
+<p:notes xmlns:a="http://schemas.openxmlformats.org/drawingml/2006/main" xmlns:p="http://schemas.openxmlformats.org/presentationml/2006/main" xmlns:r="http://schemas.openxmlformats.org/officeDocument/2006/relationships">
+  <p:cSld>
+    <p:spTree>
+      <p:nvGrpSpPr>
+        <p:cNvPr id="1" name=""/>
+        <p:cNvGrpSpPr/>
+        <p:nvPr/>
+      </p:nvGrpSpPr>
+      <p:grpSpPr>
+        <a:xfrm>
+          <a:off x="0" y="0"/>
+          <a:ext cx="0" cy="0"/>
+          <a:chOff x="0" y="0"/>
+          <a:chExt cx="0" cy="0"/>
+        </a:xfrm>
+      </p:grpSpPr>
+      <p:sp>
+        <p:nvSpPr>
+          <p:cNvPr id="2" name="Slide Image Placeholder 1"/>
+          <p:cNvSpPr>
+            <a:spLocks noGrp="1"/>
+          </p:cNvSpPr>
+          <p:nvPr>
+            <p:ph type="sldImg" idx="2"/>
+          </p:nvPr>
+        </p:nvSpPr>
+        <p:spPr/>
+      </p:sp>
+      <p:sp>
+        <p:nvSpPr>
+          <p:cNvPr id="3" name="Notes Placeholder 2"/>
+          <p:cNvSpPr>
+            <a:spLocks noGrp="1"/>
+          </p:cNvSpPr>
+          <p:nvPr>
+            <p:ph type="body" idx="3" sz="quarter"/>
+          </p:nvPr>
+        </p:nvSpPr>
+        <p:spPr/>
+        <p:txBody>
+          <a:bodyPr/>
+          <a:lstStyle/>
+          <a:p>
+            <a:r>
+              <a:t>SPEAKER NOTES:</a:t>
+            </a:r>
+          </a:p>
+          <a:p>
+            <a:r>
               <a:t>Conclude with confidence: 'Thank you. Our codebase is fully tested with 282 unit tests, and deployed live. I am now open to any questions.'</a:t>
             </a:r>
           </a:p>
@@ -1071,7 +1304,7 @@
           </a:p>
           <a:p>
             <a:r>
-              <a:t>Evaluators often ask why we don't just use standard chatbots. The answer is cost asymmetry. In code, a 95% accurate model gives a compiler error. In medicine, a 5% hallucination rate or a 3-second delay in acute cardiac arrest is catastrophic. General chatbots lack provenance and fail to prioritize urgent triage.</a:t>
+              <a:t>Explain cost asymmetry: in programming, a 95% accurate model gives a compiler error. In medicine, a 5% hallucination rate or a 3-second delay in acute cardiac arrest can be fatal. General chatbots lack provenance, invite hallucination, and fail to prioritize urgent triage.</a:t>
             </a:r>
           </a:p>
         </p:txBody>
@@ -1146,17 +1379,12 @@
           </a:p>
           <a:p>
             <a:r>
-              <a:t>Point out Guardrail 3 and 4 in detail.</a:t>
-            </a:r>
-          </a:p>
-          <a:p>
-            <a:r>
-              <a:t>Guardrail 3 is the negative constraint: if someone asks 'what is the capital of France', it refuses because no medical chunk matches. That proves grounding.</a:t>
-            </a:r>
-          </a:p>
-          <a:p>
-            <a:r>
-              <a:t>Guardrail 4 guarantees deterministic response time for life-threatening emergencies.</a:t>
+              <a:t>Highlight the negative constraint (Guardrail 3) and safety short-circuit (Guardrail 4).</a:t>
+            </a:r>
+          </a:p>
+          <a:p>
+            <a:r>
+              <a:t>The system is built so it structurally cannot fabricate information when no clinical source is present.</a:t>
             </a:r>
           </a:p>
         </p:txBody>
@@ -1231,12 +1459,17 @@
           </a:p>
           <a:p>
             <a:r>
-              <a:t>Walk through the 5 steps left to right.</a:t>
-            </a:r>
-          </a:p>
-          <a:p>
-            <a:r>
-              <a:t>Emphasize the pipeline ordering: Red-flag check happens before embedding. Why? Because embedding takes 700 ms, whereas regex takes 0.1 ms. We do not waste 700 ms when someone is having a heart attack.</a:t>
+              <a:t>Here is the formal Software Requirements Specification (SRS):</a:t>
+            </a:r>
+          </a:p>
+          <a:p>
+            <a:r>
+              <a:t>Functional Requirements cover identity, grounded retrieval, citations, emergency escalation, and session management.</a:t>
+            </a:r>
+          </a:p>
+          <a:p>
+            <a:r>
+              <a:t>Non-Functional Requirements establish rigorous performance benchmarks: &lt; 20 ms emergency triage, &lt; 2500 ms median response, 0% hallucination on out-of-corpus queries, and dual-provider fault tolerance.</a:t>
             </a:r>
           </a:p>
         </p:txBody>
@@ -1311,27 +1544,17 @@
           </a:p>
           <a:p>
             <a:r>
-              <a:t>Explain the database design:</a:t>
-            </a:r>
-          </a:p>
-          <a:p>
-            <a:r>
-              <a:t>1. We run PostgreSQL 16 with the pgvector extension.</a:t>
-            </a:r>
-          </a:p>
-          <a:p>
-            <a:r>
-              <a:t>2. The chunks table contains 768-dimensional embeddings indexed using HNSW (Hierarchical Navigable Small World) with vector_cosine_ops for ultra-fast nearest-neighbor search.</a:t>
-            </a:r>
-          </a:p>
-          <a:p>
-            <a:r>
-              <a:t>3. The messages table maintains full auditability by storing an array of retrieved_chunk_ids, provider name, and latency_ms for every generated message.</a:t>
-            </a:r>
-          </a:p>
-          <a:p>
-            <a:r>
-              <a:t>4. Documents use SHA-256 content hashing to ensure idempotent ingestion.</a:t>
+              <a:t>Present the first half of the TELOS Feasibility Study:</a:t>
+            </a:r>
+          </a:p>
+          <a:p>
+            <a:r>
+              <a:t>1. Technical Feasibility: Evaluates whether the technologies exist and perform. Our HNSW index, Groq LPUs, and 282 passing unit tests prove 100% technical viability.</a:t>
+            </a:r>
+          </a:p>
+          <a:p>
+            <a:r>
+              <a:t>2. Economic Feasibility: Proves the system is cost-effective. We built the full stack on a $0 development budget, and at production scale it costs 95% less than commercial OpenAI RAG systems.</a:t>
             </a:r>
           </a:p>
         </p:txBody>
@@ -1406,22 +1629,22 @@
           </a:p>
           <a:p>
             <a:r>
-              <a:t>Walk through the API design:</a:t>
-            </a:r>
-          </a:p>
-          <a:p>
-            <a:r>
-              <a:t>1. Highlight POST /api/chat/stream: It uses Server-Sent Events over HTTP POST with fetch ReadableStream. Native EventSource cannot send Authorization headers, so we used a custom fetch streaming reader in React.</a:t>
-            </a:r>
-          </a:p>
-          <a:p>
-            <a:r>
-              <a:t>2. Point out GET /health: It verifies PostgreSQL connection, pgvector extension, and Redis in one call.</a:t>
-            </a:r>
-          </a:p>
-          <a:p>
-            <a:r>
-              <a:t>3. All endpoints enforce Clerk JWKS RS256 token verification.</a:t>
+              <a:t>Present the second half of the TELOS Feasibility Study:</a:t>
+            </a:r>
+          </a:p>
+          <a:p>
+            <a:r>
+              <a:t>1. Legal Feasibility: Explains why we are legally safe under CDSCO/FDA regulations (informational, not diagnostic) and India's DPDP Act 2023 (no PHI stored).</a:t>
+            </a:r>
+          </a:p>
+          <a:p>
+            <a:r>
+              <a:t>2. Operational Feasibility: Validates adoption by real users without medical training.</a:t>
+            </a:r>
+          </a:p>
+          <a:p>
+            <a:r>
+              <a:t>3. Schedule Feasibility: Shows our exact project milestone timeline from today's Design Doc (Sep 26) to prototype (Oct 31) and final defense (Dec 1).</a:t>
             </a:r>
           </a:p>
         </p:txBody>
@@ -1496,12 +1719,12 @@
           </a:p>
           <a:p>
             <a:r>
-              <a:t>Evaluators often ask: 'Why only 42-50 documents? Why not index Wikipedia or the entire web?'</a:t>
-            </a:r>
-          </a:p>
-          <a:p>
-            <a:r>
-              <a:t>Answer: Breadth was traded for legal and clinical provenance. You cannot verify 10,000 scraped blog posts. Every document here is from WHO, NHS, NIH, or CDC, with legally tracked licenses.</a:t>
+              <a:t>Walk through the 5 steps left to right.</a:t>
+            </a:r>
+          </a:p>
+          <a:p>
+            <a:r>
+              <a:t>Emphasize the pipeline ordering: Red-flag check happens before embedding. Why? Because embedding takes 700 ms, whereas regex takes 0.1 ms. We do not waste 700 ms when someone is having a heart attack.</a:t>
             </a:r>
           </a:p>
         </p:txBody>
@@ -1576,7 +1799,27 @@
           </a:p>
           <a:p>
             <a:r>
-              <a:t>Highlight the 20 ms vs 2500 ms speedup. Evaluators will appreciate that emergency triage is deterministic regex, not an LLM guess. Mention the cost asymmetry: we deliberately escalate chest pain even when the user suspects reflux.</a:t>
+              <a:t>Explain the database design:</a:t>
+            </a:r>
+          </a:p>
+          <a:p>
+            <a:r>
+              <a:t>1. We run PostgreSQL 16 with the pgvector extension.</a:t>
+            </a:r>
+          </a:p>
+          <a:p>
+            <a:r>
+              <a:t>2. The chunks table contains 768-dimensional embeddings indexed using HNSW (Hierarchical Navigable Small World) with vector_cosine_ops for ultra-fast nearest-neighbor search.</a:t>
+            </a:r>
+          </a:p>
+          <a:p>
+            <a:r>
+              <a:t>3. The messages table maintains full auditability by storing an array of retrieved_chunk_ids, provider name, and latency_ms for every generated message.</a:t>
+            </a:r>
+          </a:p>
+          <a:p>
+            <a:r>
+              <a:t>4. Documents use SHA-256 content hashing to ensure idempotent ingestion.</a:t>
             </a:r>
           </a:p>
         </p:txBody>
@@ -1651,7 +1894,22 @@
           </a:p>
           <a:p>
             <a:r>
-              <a:t>Explain why resilience matters. Free tier APIs have strict rate limits. Our system handles API exhaustion gracefully by switching providers on the fly, and uses atomic Redis Lua scripts so rate limits can't be circumvented by concurrent requests.</a:t>
+              <a:t>Walk through the API design:</a:t>
+            </a:r>
+          </a:p>
+          <a:p>
+            <a:r>
+              <a:t>1. Highlight POST /api/chat/stream: It uses Server-Sent Events over HTTP POST with fetch ReadableStream.</a:t>
+            </a:r>
+          </a:p>
+          <a:p>
+            <a:r>
+              <a:t>2. Point out GET /health: It verifies PostgreSQL connection, pgvector extension, and Redis in one call.</a:t>
+            </a:r>
+          </a:p>
+          <a:p>
+            <a:r>
+              <a:t>3. All endpoints enforce Clerk JWKS RS256 token verification.</a:t>
             </a:r>
           </a:p>
         </p:txBody>
@@ -4790,7 +5048,7 @@
               </a:defRPr>
             </a:pPr>
             <a:r>
-              <a:t>An Auditable Retrieval-Augmented Assistant with Rule-Based Emergency Escalation</a:t>
+              <a:t>Design Document Preparation &amp; Comprehensive Feasibility Analysis (SDG 3)</a:t>
             </a:r>
           </a:p>
         </p:txBody>
@@ -4889,7 +5147,7 @@
             </a:r>
             <a:br/>
             <a:r>
-              <a:t>Target 3.8: Access to safe, verified health information without medical misinformation.</a:t>
+              <a:t>Target 3.8: Access to verified, safe clinical information with zero medical misinformation.</a:t>
             </a:r>
           </a:p>
         </p:txBody>
@@ -4969,7 +5227,7 @@
               </a:defRPr>
             </a:pPr>
             <a:r>
-              <a:t>CORE PARADIGM</a:t>
+              <a:t>EVALUATION SCOPE</a:t>
             </a:r>
           </a:p>
           <a:p>
@@ -4984,11 +5242,11 @@
               </a:defRPr>
             </a:pPr>
             <a:r>
-              <a:t>Strict Negative Constraints</a:t>
+              <a:t>Phase 1: Design Document &amp; Feasibility</a:t>
             </a:r>
             <a:br/>
             <a:r>
-              <a:t>Refuses to guess without verified sources. Bypasses AI in medical emergencies (&lt; 20 ms short-circuit).</a:t>
+              <a:t>Covers: TELOS Feasibility, SRS (FRs/NFRs), System Architecture, Schema &amp; APIs.</a:t>
             </a:r>
           </a:p>
         </p:txBody>
@@ -5068,7 +5326,7 @@
               </a:defRPr>
             </a:pPr>
             <a:r>
-              <a:t>PROJECT EVALUATION</a:t>
+              <a:t>CURRENT IMPLEMENTATION</a:t>
             </a:r>
           </a:p>
           <a:p>
@@ -5091,7 +5349,7 @@
             </a:r>
             <a:br/>
             <a:r>
-              <a:t>Tech: FastAPI · PostgreSQL (pgvector) · React · Clerk</a:t>
+              <a:t>Tech: FastAPI · pgvector · React · Clerk</a:t>
             </a:r>
           </a:p>
         </p:txBody>
@@ -5189,7 +5447,7 @@
               </a:defRPr>
             </a:pPr>
             <a:r>
-              <a:t>HEALTH ASSISTANT · PROJECT EVALUATION</a:t>
+              <a:t>HEALTH ASSISTANT · DESIGN DOC &amp; FEASIBILITY</a:t>
             </a:r>
           </a:p>
         </p:txBody>
@@ -5224,7 +5482,7 @@
               </a:defRPr>
             </a:pPr>
             <a:r>
-              <a:t>Current Implementation Status: Production Ready</a:t>
+              <a:t>The Medical Reference Corpus: Quality Over Unvetted Breadth</a:t>
             </a:r>
           </a:p>
         </p:txBody>
@@ -5238,7 +5496,7 @@
         <p:spPr>
           <a:xfrm>
             <a:off x="731520" y="1463040"/>
-            <a:ext cx="3383280" cy="2743200"/>
+            <a:ext cx="5120640" cy="4572000"/>
           </a:xfrm>
           <a:prstGeom prst="roundRect">
             <a:avLst/>
@@ -5283,7 +5541,7 @@
         <p:spPr>
           <a:xfrm>
             <a:off x="914400" y="1645920"/>
-            <a:ext cx="3017520" cy="2377440"/>
+            <a:ext cx="4754880" cy="4114800"/>
           </a:xfrm>
           <a:prstGeom prst="rect">
             <a:avLst/>
@@ -5297,20 +5555,20 @@
           <a:lstStyle/>
           <a:p>
             <a:pPr>
-              <a:defRPr sz="1500" b="1">
+              <a:defRPr sz="1600" b="1">
                 <a:solidFill>
                   <a:srgbClr val="0284C7"/>
                 </a:solidFill>
               </a:defRPr>
             </a:pPr>
             <a:r>
-              <a:t>Backend &amp; Database</a:t>
+              <a:t>Curated &amp; License-Checked Repository</a:t>
             </a:r>
           </a:p>
           <a:p>
             <a:pPr>
               <a:spcBef>
-                <a:spcPts val="800"/>
+                <a:spcPts val="1000"/>
               </a:spcBef>
               <a:defRPr sz="1200">
                 <a:solidFill>
@@ -5319,23 +5577,64 @@
               </a:defRPr>
             </a:pPr>
             <a:r>
-              <a:t>FastAPI (Python 3.11, async)</a:t>
+              <a:t>• 42+ Vetted Source Documents: Covering infectious diseases (dengue, malaria, TB), chronic conditions (diabetes, hypertension, asthma), everyday symptoms, and prevention.</a:t>
+            </a:r>
+          </a:p>
+          <a:p>
+            <a:pPr>
+              <a:spcBef>
+                <a:spcPts val="1000"/>
+              </a:spcBef>
+              <a:defRPr sz="1200">
+                <a:solidFill>
+                  <a:srgbClr val="1E293B"/>
+                </a:solidFill>
+              </a:defRPr>
+            </a:pPr>
+            <a:r>
+              <a:t>• Strict Licensing Compliance: Every source explicitly mapped in corpus_manifest.json:</a:t>
             </a:r>
             <a:br/>
             <a:r>
-              <a:t>SQLAlchemy 2.0 + asyncpg</a:t>
+              <a:t>  • WHO: CC BY-NC-SA 3.0 IGO</a:t>
             </a:r>
             <a:br/>
             <a:r>
-              <a:t>PostgreSQL 16 + pgvector (HNSW)</a:t>
+              <a:t>  • UK NHS: Open Government Licence (OGL v3.0)</a:t>
             </a:r>
             <a:br/>
             <a:r>
-              <a:t>Redis 7 Ephemeral Cache</a:t>
-            </a:r>
-            <a:br/>
-            <a:r>
-              <a:t>Alembic Database Migrations</a:t>
+              <a:t>  • US NIH / CDC: US Federal Public Domain</a:t>
+            </a:r>
+          </a:p>
+          <a:p>
+            <a:pPr>
+              <a:spcBef>
+                <a:spcPts val="1000"/>
+              </a:spcBef>
+              <a:defRPr sz="1200">
+                <a:solidFill>
+                  <a:srgbClr val="1E293B"/>
+                </a:solidFill>
+              </a:defRPr>
+            </a:pPr>
+            <a:r>
+              <a:t>• Deterministic Extraction: Handled via PyMuPDF and Trafilatura, stripping boilerplate, headers, and footers.</a:t>
+            </a:r>
+          </a:p>
+          <a:p>
+            <a:pPr>
+              <a:spcBef>
+                <a:spcPts val="1000"/>
+              </a:spcBef>
+              <a:defRPr sz="1200">
+                <a:solidFill>
+                  <a:srgbClr val="1E293B"/>
+                </a:solidFill>
+              </a:defRPr>
+            </a:pPr>
+            <a:r>
+              <a:t>• Semantic Chunking: 153 chunks bounded between ~300 to ~650 tokens to ensure clinical coherence.</a:t>
             </a:r>
           </a:p>
         </p:txBody>
@@ -5348,8 +5647,8 @@
         </p:nvSpPr>
         <p:spPr>
           <a:xfrm>
-            <a:off x="4389120" y="1463040"/>
-            <a:ext cx="3383280" cy="2743200"/>
+            <a:off x="6217920" y="1463040"/>
+            <a:ext cx="5212080" cy="4572000"/>
           </a:xfrm>
           <a:prstGeom prst="roundRect">
             <a:avLst/>
@@ -5393,8 +5692,8 @@
         </p:nvSpPr>
         <p:spPr>
           <a:xfrm>
-            <a:off x="4572000" y="1645920"/>
-            <a:ext cx="3017520" cy="2377440"/>
+            <a:off x="6400800" y="1645920"/>
+            <a:ext cx="4846320" cy="4114800"/>
           </a:xfrm>
           <a:prstGeom prst="rect">
             <a:avLst/>
@@ -5408,20 +5707,20 @@
           <a:lstStyle/>
           <a:p>
             <a:pPr>
-              <a:defRPr sz="1500" b="1">
-                <a:solidFill>
-                  <a:srgbClr val="0284C7"/>
-                </a:solidFill>
-              </a:defRPr>
-            </a:pPr>
-            <a:r>
-              <a:t>Frontend &amp; UX</a:t>
+              <a:defRPr sz="1600" b="1">
+                <a:solidFill>
+                  <a:srgbClr val="0E7490"/>
+                </a:solidFill>
+              </a:defRPr>
+            </a:pPr>
+            <a:r>
+              <a:t>High Priority for Indian Healthcare</a:t>
             </a:r>
           </a:p>
           <a:p>
             <a:pPr>
               <a:spcBef>
-                <a:spcPts val="800"/>
+                <a:spcPts val="1000"/>
               </a:spcBef>
               <a:defRPr sz="1200">
                 <a:solidFill>
@@ -5430,109 +5729,13 @@
               </a:defRPr>
             </a:pPr>
             <a:r>
-              <a:t>React 18 + TypeScript + Vite</a:t>
-            </a:r>
-            <a:br/>
-            <a:r>
-              <a:t>Tailwind CSS modern styling</a:t>
-            </a:r>
-            <a:br/>
-            <a:r>
-              <a:t>Server-Sent Events (SSE) Reader</a:t>
-            </a:r>
-            <a:br/>
-            <a:r>
-              <a:t>Interactive Citation Inspector</a:t>
-            </a:r>
-            <a:br/>
-            <a:r>
-              <a:t>Emergency Visual Escalation</a:t>
-            </a:r>
-          </a:p>
-        </p:txBody>
-      </p:sp>
-      <p:sp>
-        <p:nvSpPr>
-          <p:cNvPr id="9" name="Rounded Rectangle 8"/>
-          <p:cNvSpPr/>
-          <p:nvPr/>
-        </p:nvSpPr>
-        <p:spPr>
-          <a:xfrm>
-            <a:off x="8046720" y="1463040"/>
-            <a:ext cx="3383280" cy="2743200"/>
-          </a:xfrm>
-          <a:prstGeom prst="roundRect">
-            <a:avLst/>
-          </a:prstGeom>
-          <a:solidFill>
-            <a:srgbClr val="FFFFFF"/>
-          </a:solidFill>
-          <a:ln w="19050">
-            <a:solidFill>
-              <a:srgbClr val="E2E8F0"/>
-            </a:solidFill>
-          </a:ln>
-        </p:spPr>
-        <p:style>
-          <a:lnRef idx="1">
-            <a:schemeClr val="accent1"/>
-          </a:lnRef>
-          <a:fillRef idx="3">
-            <a:schemeClr val="accent1"/>
-          </a:fillRef>
-          <a:effectRef idx="2">
-            <a:schemeClr val="accent1"/>
-          </a:effectRef>
-          <a:fontRef idx="minor">
-            <a:schemeClr val="lt1"/>
-          </a:fontRef>
-        </p:style>
-        <p:txBody>
-          <a:bodyPr rtlCol="0" anchor="ctr"/>
-          <a:lstStyle/>
-          <a:p>
-            <a:pPr algn="ctr"/>
-          </a:p>
-        </p:txBody>
-      </p:sp>
-      <p:sp>
-        <p:nvSpPr>
-          <p:cNvPr id="10" name="TextBox 9"/>
-          <p:cNvSpPr txBox="1"/>
-          <p:nvPr/>
-        </p:nvSpPr>
-        <p:spPr>
-          <a:xfrm>
-            <a:off x="8229600" y="1645920"/>
-            <a:ext cx="3017520" cy="2377440"/>
-          </a:xfrm>
-          <a:prstGeom prst="rect">
-            <a:avLst/>
-          </a:prstGeom>
-          <a:noFill/>
-        </p:spPr>
-        <p:txBody>
-          <a:bodyPr wrap="square">
-            <a:spAutoFit/>
-          </a:bodyPr>
-          <a:lstStyle/>
-          <a:p>
-            <a:pPr>
-              <a:defRPr sz="1500" b="1">
-                <a:solidFill>
-                  <a:srgbClr val="0284C7"/>
-                </a:solidFill>
-              </a:defRPr>
-            </a:pPr>
-            <a:r>
-              <a:t>Security &amp; Auth</a:t>
+              <a:t>• High-Relevance Infectious Disease Focus: Extensive coverage for Dengue, Malaria, Tuberculosis, Typhoid, and Diarrhoeal diseases.</a:t>
             </a:r>
           </a:p>
           <a:p>
             <a:pPr>
               <a:spcBef>
-                <a:spcPts val="800"/>
+                <a:spcPts val="1000"/>
               </a:spcBef>
               <a:defRPr sz="1200">
                 <a:solidFill>
@@ -5541,126 +5744,37 @@
               </a:defRPr>
             </a:pPr>
             <a:r>
-              <a:t>Clerk Authentication</a:t>
-            </a:r>
-            <a:br/>
-            <a:r>
-              <a:t>JWKS Cryptographic Verification</a:t>
-            </a:r>
-            <a:br/>
-            <a:r>
-              <a:t>RS256 JWT validation on all API calls</a:t>
-            </a:r>
-            <a:br/>
-            <a:r>
-              <a:t>No browser-side credential trust</a:t>
-            </a:r>
-            <a:br/>
-            <a:r>
-              <a:t>Strict CORS &amp; rate limit headers</a:t>
-            </a:r>
-          </a:p>
-        </p:txBody>
-      </p:sp>
-      <p:sp>
-        <p:nvSpPr>
-          <p:cNvPr id="11" name="Rounded Rectangle 10"/>
-          <p:cNvSpPr/>
-          <p:nvPr/>
-        </p:nvSpPr>
-        <p:spPr>
-          <a:xfrm>
-            <a:off x="731520" y="4480560"/>
-            <a:ext cx="10698480" cy="1645920"/>
-          </a:xfrm>
-          <a:prstGeom prst="roundRect">
-            <a:avLst/>
-          </a:prstGeom>
-          <a:solidFill>
-            <a:srgbClr val="F0FDF4"/>
-          </a:solidFill>
-          <a:ln w="19050">
-            <a:solidFill>
-              <a:srgbClr val="10B981"/>
-            </a:solidFill>
-          </a:ln>
-        </p:spPr>
-        <p:style>
-          <a:lnRef idx="1">
-            <a:schemeClr val="accent1"/>
-          </a:lnRef>
-          <a:fillRef idx="3">
-            <a:schemeClr val="accent1"/>
-          </a:fillRef>
-          <a:effectRef idx="2">
-            <a:schemeClr val="accent1"/>
-          </a:effectRef>
-          <a:fontRef idx="minor">
-            <a:schemeClr val="lt1"/>
-          </a:fontRef>
-        </p:style>
-        <p:txBody>
-          <a:bodyPr rtlCol="0" anchor="ctr"/>
-          <a:lstStyle/>
-          <a:p>
-            <a:pPr algn="ctr"/>
-          </a:p>
-        </p:txBody>
-      </p:sp>
-      <p:sp>
-        <p:nvSpPr>
-          <p:cNvPr id="12" name="TextBox 11"/>
-          <p:cNvSpPr txBox="1"/>
-          <p:nvPr/>
-        </p:nvSpPr>
-        <p:spPr>
-          <a:xfrm>
-            <a:off x="914400" y="4572000"/>
-            <a:ext cx="10332720" cy="1371600"/>
-          </a:xfrm>
-          <a:prstGeom prst="rect">
-            <a:avLst/>
-          </a:prstGeom>
-          <a:noFill/>
-        </p:spPr>
-        <p:txBody>
-          <a:bodyPr wrap="square">
-            <a:spAutoFit/>
-          </a:bodyPr>
-          <a:lstStyle/>
-          <a:p>
-            <a:pPr>
-              <a:defRPr sz="1300" b="1">
-                <a:solidFill>
-                  <a:srgbClr val="10B981"/>
-                </a:solidFill>
-              </a:defRPr>
-            </a:pPr>
-            <a:r>
-              <a:t>RIGOROUS AUTOMATED TEST SUITE: 282 UNIT TESTS (100% PASSING)</a:t>
+              <a:t>• Everyday Family Symptoms: High fever in adults &amp; children, cough, dehydration, vomiting, paediatric skin rashes.</a:t>
             </a:r>
           </a:p>
           <a:p>
             <a:pPr>
               <a:spcBef>
-                <a:spcPts val="400"/>
+                <a:spcPts val="1000"/>
               </a:spcBef>
-              <a:defRPr sz="1100">
+              <a:defRPr sz="1200">
                 <a:solidFill>
                   <a:srgbClr val="1E293B"/>
                 </a:solidFill>
               </a:defRPr>
             </a:pPr>
             <a:r>
-              <a:t>Comprehensive test coverage executed in 4.46 seconds:</a:t>
-            </a:r>
-            <a:br/>
-            <a:r>
-              <a:t>• 98 tests for red-flag emergency detection &amp; phrasing variants    • 38 tests for vector retriever &amp; floor filtering</a:t>
-            </a:r>
-            <a:br/>
-            <a:r>
-              <a:t>• 31 tests for document extraction &amp; chunking bounds             • 21 tests for authentication &amp; rate limiting</a:t>
+              <a:t>• Deliberate Frozen Corpus: Frozen snapshot prevents silent data corruption or unvetted web drift. If a condition isn't verified, it safely refuses.</a:t>
+            </a:r>
+          </a:p>
+          <a:p>
+            <a:pPr>
+              <a:spcBef>
+                <a:spcPts val="1000"/>
+              </a:spcBef>
+              <a:defRPr sz="1200">
+                <a:solidFill>
+                  <a:srgbClr val="1E293B"/>
+                </a:solidFill>
+              </a:defRPr>
+            </a:pPr>
+            <a:r>
+              <a:t>• Auditable Citations: Every answer references the exact source document title, URL, and medical authority.</a:t>
             </a:r>
           </a:p>
         </p:txBody>
@@ -5758,7 +5872,7 @@
               </a:defRPr>
             </a:pPr>
             <a:r>
-              <a:t>HEALTH ASSISTANT · PROJECT EVALUATION</a:t>
+              <a:t>CRITICAL SAFETY ARCHITECTURE</a:t>
             </a:r>
           </a:p>
         </p:txBody>
@@ -5793,7 +5907,7 @@
               </a:defRPr>
             </a:pPr>
             <a:r>
-              <a:t>Empirical Benchmark Results: Grounding &amp; Latency</a:t>
+              <a:t>Safety Engineering: Deterministic Emergency Short-Circuit</a:t>
             </a:r>
           </a:p>
         </p:txBody>
@@ -5807,7 +5921,117 @@
         <p:spPr>
           <a:xfrm>
             <a:off x="731520" y="1463040"/>
-            <a:ext cx="5120640" cy="4572000"/>
+            <a:ext cx="10698480" cy="1463040"/>
+          </a:xfrm>
+          <a:prstGeom prst="roundRect">
+            <a:avLst/>
+          </a:prstGeom>
+          <a:solidFill>
+            <a:srgbClr val="FFF1F2"/>
+          </a:solidFill>
+          <a:ln w="19050">
+            <a:solidFill>
+              <a:srgbClr val="E11D48"/>
+            </a:solidFill>
+          </a:ln>
+        </p:spPr>
+        <p:style>
+          <a:lnRef idx="1">
+            <a:schemeClr val="accent1"/>
+          </a:lnRef>
+          <a:fillRef idx="3">
+            <a:schemeClr val="accent1"/>
+          </a:fillRef>
+          <a:effectRef idx="2">
+            <a:schemeClr val="accent1"/>
+          </a:effectRef>
+          <a:fontRef idx="minor">
+            <a:schemeClr val="lt1"/>
+          </a:fontRef>
+        </p:style>
+        <p:txBody>
+          <a:bodyPr rtlCol="0" anchor="ctr"/>
+          <a:lstStyle/>
+          <a:p>
+            <a:pPr algn="ctr"/>
+          </a:p>
+        </p:txBody>
+      </p:sp>
+      <p:sp>
+        <p:nvSpPr>
+          <p:cNvPr id="6" name="TextBox 5"/>
+          <p:cNvSpPr txBox="1"/>
+          <p:nvPr/>
+        </p:nvSpPr>
+        <p:spPr>
+          <a:xfrm>
+            <a:off x="914400" y="1554480"/>
+            <a:ext cx="10332720" cy="1280160"/>
+          </a:xfrm>
+          <a:prstGeom prst="rect">
+            <a:avLst/>
+          </a:prstGeom>
+          <a:noFill/>
+        </p:spPr>
+        <p:txBody>
+          <a:bodyPr wrap="square">
+            <a:spAutoFit/>
+          </a:bodyPr>
+          <a:lstStyle/>
+          <a:p>
+            <a:pPr>
+              <a:defRPr sz="1200" b="1">
+                <a:solidFill>
+                  <a:srgbClr val="E11D48"/>
+                </a:solidFill>
+              </a:defRPr>
+            </a:pPr>
+            <a:r>
+              <a:t>PERFORMANCE ASYMMETRY: EMERGENCY TRIAGE vs GENERATION</a:t>
+            </a:r>
+          </a:p>
+          <a:p>
+            <a:pPr>
+              <a:spcBef>
+                <a:spcPts val="400"/>
+              </a:spcBef>
+              <a:defRPr sz="2000" b="1">
+                <a:solidFill>
+                  <a:srgbClr val="1E293B"/>
+                </a:solidFill>
+              </a:defRPr>
+            </a:pPr>
+            <a:r>
+              <a:t>Red-Flag Matcher: &lt; 1 ms in-process (~20 ms HTTP)   vs   LLM Generation: ~2,512 ms</a:t>
+            </a:r>
+          </a:p>
+          <a:p>
+            <a:pPr>
+              <a:spcBef>
+                <a:spcPts val="400"/>
+              </a:spcBef>
+              <a:defRPr sz="1200">
+                <a:solidFill>
+                  <a:srgbClr val="64748B"/>
+                </a:solidFill>
+              </a:defRPr>
+            </a:pPr>
+            <a:r>
+              <a:t>Short-circuits immediately before embedding, retrieval, and LLM generation. Eliminates latency and non-deterministic risks.</a:t>
+            </a:r>
+          </a:p>
+        </p:txBody>
+      </p:sp>
+      <p:sp>
+        <p:nvSpPr>
+          <p:cNvPr id="7" name="Rounded Rectangle 6"/>
+          <p:cNvSpPr/>
+          <p:nvPr/>
+        </p:nvSpPr>
+        <p:spPr>
+          <a:xfrm>
+            <a:off x="731520" y="3200400"/>
+            <a:ext cx="5120640" cy="2926080"/>
           </a:xfrm>
           <a:prstGeom prst="roundRect">
             <a:avLst/>
@@ -5845,14 +6069,14 @@
       </p:sp>
       <p:sp>
         <p:nvSpPr>
-          <p:cNvPr id="6" name="TextBox 5"/>
+          <p:cNvPr id="8" name="TextBox 7"/>
           <p:cNvSpPr txBox="1"/>
           <p:nvPr/>
         </p:nvSpPr>
         <p:spPr>
           <a:xfrm>
-            <a:off x="914400" y="1645920"/>
-            <a:ext cx="4754880" cy="4114800"/>
+            <a:off x="914400" y="3291840"/>
+            <a:ext cx="4754880" cy="2743200"/>
           </a:xfrm>
           <a:prstGeom prst="rect">
             <a:avLst/>
@@ -5866,103 +6090,75 @@
           <a:lstStyle/>
           <a:p>
             <a:pPr>
-              <a:defRPr sz="1600" b="1">
-                <a:solidFill>
-                  <a:srgbClr val="0284C7"/>
-                </a:solidFill>
-              </a:defRPr>
-            </a:pPr>
-            <a:r>
-              <a:t>Retrieval &amp; Grounding Precision</a:t>
+              <a:defRPr sz="1500" b="1">
+                <a:solidFill>
+                  <a:srgbClr val="1E293B"/>
+                </a:solidFill>
+              </a:defRPr>
+            </a:pPr>
+            <a:r>
+              <a:t>9 Critical Emergency Categories</a:t>
             </a:r>
           </a:p>
           <a:p>
             <a:pPr>
               <a:spcBef>
-                <a:spcPts val="800"/>
+                <a:spcPts val="600"/>
               </a:spcBef>
-              <a:defRPr sz="1200">
+              <a:defRPr sz="1100">
                 <a:solidFill>
                   <a:srgbClr val="1E293B"/>
                 </a:solidFill>
               </a:defRPr>
             </a:pPr>
             <a:r>
-              <a:t>• In-Corpus Retrieval Hit Rate: 90% (27/30 in-corpus medical queries retrieved relevant passages).</a:t>
-            </a:r>
-          </a:p>
-          <a:p>
-            <a:pPr>
-              <a:spcBef>
-                <a:spcPts val="800"/>
-              </a:spcBef>
-              <a:defRPr sz="1200">
-                <a:solidFill>
-                  <a:srgbClr val="1E293B"/>
-                </a:solidFill>
-              </a:defRPr>
-            </a:pPr>
-            <a:r>
-              <a:t>• Out-of-Corpus False Hit Rate: 0.0% (0/8 non-medical or off-topic queries cleared the 0.65 threshold).</a:t>
-            </a:r>
-          </a:p>
-          <a:p>
-            <a:pPr>
-              <a:spcBef>
-                <a:spcPts val="800"/>
-              </a:spcBef>
-              <a:defRPr sz="1200">
-                <a:solidFill>
-                  <a:srgbClr val="1E293B"/>
-                </a:solidFill>
-              </a:defRPr>
-            </a:pPr>
-            <a:r>
-              <a:t>• Top Similarity Separation: In-corpus median: 0.727 vs Out-of-corpus max: 0.555 (Wide 0.172 margin).</a:t>
-            </a:r>
-          </a:p>
-          <a:p>
-            <a:pPr>
-              <a:spcBef>
-                <a:spcPts val="800"/>
-              </a:spcBef>
-              <a:defRPr sz="1200">
-                <a:solidFill>
-                  <a:srgbClr val="1E293B"/>
-                </a:solidFill>
-              </a:defRPr>
-            </a:pPr>
-            <a:r>
-              <a:t>• Citation Validity: 100% (129 of 129 generated citations mechanically verified to match retrieved source text).</a:t>
-            </a:r>
-          </a:p>
-          <a:p>
-            <a:pPr>
-              <a:spcBef>
-                <a:spcPts val="800"/>
-              </a:spcBef>
-              <a:defRPr sz="1200">
-                <a:solidFill>
-                  <a:srgbClr val="1E293B"/>
-                </a:solidFill>
-              </a:defRPr>
-            </a:pPr>
-            <a:r>
-              <a:t>• Mean Citations: 4.8 verified sources cited per response.</a:t>
-            </a:r>
-          </a:p>
-        </p:txBody>
-      </p:sp>
-      <p:sp>
-        <p:nvSpPr>
-          <p:cNvPr id="7" name="Rounded Rectangle 6"/>
+              <a:t>1. Cardiac (crushing chest pain, arm radiation)</a:t>
+            </a:r>
+            <a:br/>
+            <a:r>
+              <a:t>2. Breathing Distress (choking, severe asthma)</a:t>
+            </a:r>
+            <a:br/>
+            <a:r>
+              <a:t>3. Stroke Signs (BE-FAST: facial droop, arm weakness)</a:t>
+            </a:r>
+            <a:br/>
+            <a:r>
+              <a:t>4. Uncontrolled Severe Bleeding</a:t>
+            </a:r>
+            <a:br/>
+            <a:r>
+              <a:t>5. Acute Head Injury with altered mental state</a:t>
+            </a:r>
+            <a:br/>
+            <a:r>
+              <a:t>6. Loss of Consciousness / Unresponsiveness</a:t>
+            </a:r>
+            <a:br/>
+            <a:r>
+              <a:t>7. Anaphylaxis (throat swelling, severe allergy)</a:t>
+            </a:r>
+            <a:br/>
+            <a:r>
+              <a:t>8. Seizures / Convulsions</a:t>
+            </a:r>
+            <a:br/>
+            <a:r>
+              <a:t>9. Mental Health Crisis / Self-Harm</a:t>
+            </a:r>
+          </a:p>
+        </p:txBody>
+      </p:sp>
+      <p:sp>
+        <p:nvSpPr>
+          <p:cNvPr id="9" name="Rounded Rectangle 8"/>
           <p:cNvSpPr/>
           <p:nvPr/>
         </p:nvSpPr>
         <p:spPr>
           <a:xfrm>
-            <a:off x="6217920" y="1463040"/>
-            <a:ext cx="5212080" cy="4572000"/>
+            <a:off x="6217920" y="3200400"/>
+            <a:ext cx="5212080" cy="2926080"/>
           </a:xfrm>
           <a:prstGeom prst="roundRect">
             <a:avLst/>
@@ -6000,14 +6196,14 @@
       </p:sp>
       <p:sp>
         <p:nvSpPr>
-          <p:cNvPr id="8" name="TextBox 7"/>
+          <p:cNvPr id="10" name="TextBox 9"/>
           <p:cNvSpPr txBox="1"/>
           <p:nvPr/>
         </p:nvSpPr>
         <p:spPr>
           <a:xfrm>
-            <a:off x="6400800" y="1645920"/>
-            <a:ext cx="4846320" cy="4114800"/>
+            <a:off x="6400800" y="3291840"/>
+            <a:ext cx="4846320" cy="2743200"/>
           </a:xfrm>
           <a:prstGeom prst="rect">
             <a:avLst/>
@@ -6021,104 +6217,50 @@
           <a:lstStyle/>
           <a:p>
             <a:pPr>
-              <a:defRPr sz="1600" b="1">
-                <a:solidFill>
-                  <a:srgbClr val="0E7490"/>
-                </a:solidFill>
-              </a:defRPr>
-            </a:pPr>
-            <a:r>
-              <a:t>System Latency Profile</a:t>
+              <a:defRPr sz="1500" b="1">
+                <a:solidFill>
+                  <a:srgbClr val="E11D48"/>
+                </a:solidFill>
+              </a:defRPr>
+            </a:pPr>
+            <a:r>
+              <a:t>Emergency Helplines &amp; Asymmetric Cost</a:t>
             </a:r>
           </a:p>
           <a:p>
             <a:pPr>
               <a:spcBef>
-                <a:spcPts val="800"/>
+                <a:spcPts val="600"/>
               </a:spcBef>
-              <a:defRPr sz="1200">
+              <a:defRPr sz="1100">
                 <a:solidFill>
                   <a:srgbClr val="1E293B"/>
                 </a:solidFill>
               </a:defRPr>
             </a:pPr>
             <a:r>
-              <a:t>• Red-Flag Escalation: ~0.1 ms in-process matcher (HTTP round-trip ~20 ms).</a:t>
-            </a:r>
-          </a:p>
-          <a:p>
-            <a:pPr>
-              <a:spcBef>
-                <a:spcPts val="800"/>
-              </a:spcBef>
-              <a:defRPr sz="1200">
-                <a:solidFill>
-                  <a:srgbClr val="1E293B"/>
-                </a:solidFill>
-              </a:defRPr>
-            </a:pPr>
-            <a:r>
-              <a:t>• Query Embedding (Gemini): Median 714 ms (p95: 950 ms).</a:t>
-            </a:r>
-          </a:p>
-          <a:p>
-            <a:pPr>
-              <a:spcBef>
-                <a:spcPts val="800"/>
-              </a:spcBef>
-              <a:defRPr sz="1200">
-                <a:solidFill>
-                  <a:srgbClr val="1E293B"/>
-                </a:solidFill>
-              </a:defRPr>
-            </a:pPr>
-            <a:r>
-              <a:t>• Vector Retrieval (pgvector HNSW): Median 46 ms (p95: 48 ms).</a:t>
-            </a:r>
-          </a:p>
-          <a:p>
-            <a:pPr>
-              <a:spcBef>
-                <a:spcPts val="800"/>
-              </a:spcBef>
-              <a:defRPr sz="1200">
-                <a:solidFill>
-                  <a:srgbClr val="1E293B"/>
-                </a:solidFill>
-              </a:defRPr>
-            </a:pPr>
-            <a:r>
-              <a:t>• Time to First Token (TTFT): Median 1,129 ms.</a:t>
-            </a:r>
-          </a:p>
-          <a:p>
-            <a:pPr>
-              <a:spcBef>
-                <a:spcPts val="800"/>
-              </a:spcBef>
-              <a:defRPr sz="1200">
-                <a:solidFill>
-                  <a:srgbClr val="1E293B"/>
-                </a:solidFill>
-              </a:defRPr>
-            </a:pPr>
-            <a:r>
-              <a:t>• Total End-to-End Generation: Median 2,512 ms (Groq p50: 1,843 ms, Gemini fallback p50: 3,605 ms).</a:t>
-            </a:r>
-          </a:p>
-          <a:p>
-            <a:pPr>
-              <a:spcBef>
-                <a:spcPts val="800"/>
-              </a:spcBef>
-              <a:defRPr sz="1200">
-                <a:solidFill>
-                  <a:srgbClr val="1E293B"/>
-                </a:solidFill>
-              </a:defRPr>
-            </a:pPr>
-            <a:r>
-              <a:t>• Safety Short-Circuit: 100% of red-flag queries prevented from reaching the LLM.</a:t>
+              <a:t>Integrated Indian Emergency Services:</a:t>
+            </a:r>
+            <a:br/>
+            <a:r>
+              <a:t>  • 112: All-in-One National Emergency Helpline</a:t>
+            </a:r>
+            <a:br/>
+            <a:r>
+              <a:t>  • 108: Emergency Ambulance Response</a:t>
+            </a:r>
+            <a:br/>
+            <a:r>
+              <a:t>  • 14416: Tele-MANAS (Mental Health Helpline)</a:t>
+            </a:r>
+            <a:br/>
+            <a:br/>
+            <a:r>
+              <a:t>The 'Cost Asymmetry' Rule:</a:t>
+            </a:r>
+            <a:br/>
+            <a:r>
+              <a:t>If a user says 'I know it's just acid reflux, but my chest feels tight', the system still escalates. An unnecessary emergency checkup is an annoyance; a missed heart attack is fatal.</a:t>
             </a:r>
           </a:p>
         </p:txBody>
@@ -6216,7 +6358,7 @@
               </a:defRPr>
             </a:pPr>
             <a:r>
-              <a:t>HEALTH ASSISTANT · PROJECT EVALUATION</a:t>
+              <a:t>HEALTH ASSISTANT · DESIGN DOC &amp; FEASIBILITY</a:t>
             </a:r>
           </a:p>
         </p:txBody>
@@ -6251,7 +6393,7 @@
               </a:defRPr>
             </a:pPr>
             <a:r>
-              <a:t>Live Demonstration: Four Key Evaluation Beats</a:t>
+              <a:t>High Availability &amp; Operational Resilience</a:t>
             </a:r>
           </a:p>
         </p:txBody>
@@ -6264,8 +6406,8 @@
         </p:nvSpPr>
         <p:spPr>
           <a:xfrm>
-            <a:off x="731520" y="1645920"/>
-            <a:ext cx="2468880" cy="4389120"/>
+            <a:off x="731520" y="1463040"/>
+            <a:ext cx="5120640" cy="4572000"/>
           </a:xfrm>
           <a:prstGeom prst="roundRect">
             <a:avLst/>
@@ -6275,7 +6417,7 @@
           </a:solidFill>
           <a:ln w="19050">
             <a:solidFill>
-              <a:srgbClr val="0284C7"/>
+              <a:srgbClr val="E2E8F0"/>
             </a:solidFill>
           </a:ln>
         </p:spPr>
@@ -6309,8 +6451,8 @@
         </p:nvSpPr>
         <p:spPr>
           <a:xfrm>
-            <a:off x="868680" y="1828800"/>
-            <a:ext cx="2194560" cy="3931920"/>
+            <a:off x="914400" y="1645920"/>
+            <a:ext cx="4754880" cy="4114800"/>
           </a:xfrm>
           <a:prstGeom prst="rect">
             <a:avLst/>
@@ -6324,20 +6466,20 @@
           <a:lstStyle/>
           <a:p>
             <a:pPr>
-              <a:defRPr sz="1400" b="1">
+              <a:defRPr sz="1600" b="1">
                 <a:solidFill>
                   <a:srgbClr val="0284C7"/>
                 </a:solidFill>
               </a:defRPr>
             </a:pPr>
             <a:r>
-              <a:t>Beat 1: Grounded Answer</a:t>
+              <a:t>Dual-Provider Automatic LLM Fallback</a:t>
             </a:r>
           </a:p>
           <a:p>
             <a:pPr>
               <a:spcBef>
-                <a:spcPts val="1200"/>
+                <a:spcPts val="1000"/>
               </a:spcBef>
               <a:defRPr sz="1200">
                 <a:solidFill>
@@ -6346,12 +6488,52 @@
               </a:defRPr>
             </a:pPr>
             <a:r>
-              <a:t>Query: 'What causes iron deficiency anaemia?'</a:t>
-            </a:r>
-            <a:br/>
-            <a:br/>
-            <a:r>
-              <a:t>Shows: Real-time SSE streaming, inline citation chips, and source inspector panel displaying NHS/WHO origin.</a:t>
+              <a:t>• Primary Provider: Groq (Llama / GPT-OSS 120B) for ultra-fast token streaming (~1,800 ms median latency).</a:t>
+            </a:r>
+          </a:p>
+          <a:p>
+            <a:pPr>
+              <a:spcBef>
+                <a:spcPts val="1000"/>
+              </a:spcBef>
+              <a:defRPr sz="1200">
+                <a:solidFill>
+                  <a:srgbClr val="1E293B"/>
+                </a:solidFill>
+              </a:defRPr>
+            </a:pPr>
+            <a:r>
+              <a:t>• Automatic Fallback: Gemini 2.5 Flash triggers automatically if Groq hits rate limits (TPM), connection timeouts (8s limit), or auth outages.</a:t>
+            </a:r>
+          </a:p>
+          <a:p>
+            <a:pPr>
+              <a:spcBef>
+                <a:spcPts val="1000"/>
+              </a:spcBef>
+              <a:defRPr sz="1200">
+                <a:solidFill>
+                  <a:srgbClr val="1E293B"/>
+                </a:solidFill>
+              </a:defRPr>
+            </a:pPr>
+            <a:r>
+              <a:t>• Clean Stream Recovery: If the primary fails mid-generation, the client cleanly discards the partial buffer and resumes from the fallback. No broken hybrid text.</a:t>
+            </a:r>
+          </a:p>
+          <a:p>
+            <a:pPr>
+              <a:spcBef>
+                <a:spcPts val="1000"/>
+              </a:spcBef>
+              <a:defRPr sz="1200">
+                <a:solidFill>
+                  <a:srgbClr val="1E293B"/>
+                </a:solidFill>
+              </a:defRPr>
+            </a:pPr>
+            <a:r>
+              <a:t>• Empirically Verified: We validated that invalidating Groq's key immediately triggers Gemini with zero client crashes.</a:t>
             </a:r>
           </a:p>
         </p:txBody>
@@ -6364,8 +6546,8 @@
         </p:nvSpPr>
         <p:spPr>
           <a:xfrm>
-            <a:off x="3474720" y="1645920"/>
-            <a:ext cx="2468880" cy="4389120"/>
+            <a:off x="6217920" y="1463040"/>
+            <a:ext cx="5212080" cy="4572000"/>
           </a:xfrm>
           <a:prstGeom prst="roundRect">
             <a:avLst/>
@@ -6375,7 +6557,7 @@
           </a:solidFill>
           <a:ln w="19050">
             <a:solidFill>
-              <a:srgbClr val="0284C7"/>
+              <a:srgbClr val="E2E8F0"/>
             </a:solidFill>
           </a:ln>
         </p:spPr>
@@ -6409,8 +6591,8 @@
         </p:nvSpPr>
         <p:spPr>
           <a:xfrm>
-            <a:off x="3611880" y="1828800"/>
-            <a:ext cx="2194560" cy="3931920"/>
+            <a:off x="6400800" y="1645920"/>
+            <a:ext cx="4846320" cy="4114800"/>
           </a:xfrm>
           <a:prstGeom prst="rect">
             <a:avLst/>
@@ -6424,20 +6606,20 @@
           <a:lstStyle/>
           <a:p>
             <a:pPr>
-              <a:defRPr sz="1400" b="1">
-                <a:solidFill>
-                  <a:srgbClr val="0284C7"/>
-                </a:solidFill>
-              </a:defRPr>
-            </a:pPr>
-            <a:r>
-              <a:t>Beat 2: Grounding Proof</a:t>
+              <a:defRPr sz="1600" b="1">
+                <a:solidFill>
+                  <a:srgbClr val="0E7490"/>
+                </a:solidFill>
+              </a:defRPr>
+            </a:pPr>
+            <a:r>
+              <a:t>Redis Sliding-Window Rate Limiting</a:t>
             </a:r>
           </a:p>
           <a:p>
             <a:pPr>
               <a:spcBef>
-                <a:spcPts val="1200"/>
+                <a:spcPts val="1000"/>
               </a:spcBef>
               <a:defRPr sz="1200">
                 <a:solidFill>
@@ -6446,98 +6628,13 @@
               </a:defRPr>
             </a:pPr>
             <a:r>
-              <a:t>Query: 'What is the capital of France?'</a:t>
-            </a:r>
-            <a:br/>
-            <a:br/>
-            <a:r>
-              <a:t>Shows: Immediate refusal. Proves the model is structurally blocked without verified medical context.</a:t>
-            </a:r>
-          </a:p>
-        </p:txBody>
-      </p:sp>
-      <p:sp>
-        <p:nvSpPr>
-          <p:cNvPr id="9" name="Rounded Rectangle 8"/>
-          <p:cNvSpPr/>
-          <p:nvPr/>
-        </p:nvSpPr>
-        <p:spPr>
-          <a:xfrm>
-            <a:off x="6217920" y="1645920"/>
-            <a:ext cx="2468880" cy="4389120"/>
-          </a:xfrm>
-          <a:prstGeom prst="roundRect">
-            <a:avLst/>
-          </a:prstGeom>
-          <a:solidFill>
-            <a:srgbClr val="FFFFFF"/>
-          </a:solidFill>
-          <a:ln w="19050">
-            <a:solidFill>
-              <a:srgbClr val="0284C7"/>
-            </a:solidFill>
-          </a:ln>
-        </p:spPr>
-        <p:style>
-          <a:lnRef idx="1">
-            <a:schemeClr val="accent1"/>
-          </a:lnRef>
-          <a:fillRef idx="3">
-            <a:schemeClr val="accent1"/>
-          </a:fillRef>
-          <a:effectRef idx="2">
-            <a:schemeClr val="accent1"/>
-          </a:effectRef>
-          <a:fontRef idx="minor">
-            <a:schemeClr val="lt1"/>
-          </a:fontRef>
-        </p:style>
-        <p:txBody>
-          <a:bodyPr rtlCol="0" anchor="ctr"/>
-          <a:lstStyle/>
-          <a:p>
-            <a:pPr algn="ctr"/>
-          </a:p>
-        </p:txBody>
-      </p:sp>
-      <p:sp>
-        <p:nvSpPr>
-          <p:cNvPr id="10" name="TextBox 9"/>
-          <p:cNvSpPr txBox="1"/>
-          <p:nvPr/>
-        </p:nvSpPr>
-        <p:spPr>
-          <a:xfrm>
-            <a:off x="6355080" y="1828800"/>
-            <a:ext cx="2194560" cy="3931920"/>
-          </a:xfrm>
-          <a:prstGeom prst="rect">
-            <a:avLst/>
-          </a:prstGeom>
-          <a:noFill/>
-        </p:spPr>
-        <p:txBody>
-          <a:bodyPr wrap="square">
-            <a:spAutoFit/>
-          </a:bodyPr>
-          <a:lstStyle/>
-          <a:p>
-            <a:pPr>
-              <a:defRPr sz="1400" b="1">
-                <a:solidFill>
-                  <a:srgbClr val="0284C7"/>
-                </a:solidFill>
-              </a:defRPr>
-            </a:pPr>
-            <a:r>
-              <a:t>Beat 3: Emergency Short-Circuit</a:t>
+              <a:t>• Per-User Sliding Window: 10 requests per minute enforced per authenticated Clerk User ID.</a:t>
             </a:r>
           </a:p>
           <a:p>
             <a:pPr>
               <a:spcBef>
-                <a:spcPts val="1200"/>
+                <a:spcPts val="1000"/>
               </a:spcBef>
               <a:defRPr sz="1200">
                 <a:solidFill>
@@ -6546,98 +6643,13 @@
               </a:defRPr>
             </a:pPr>
             <a:r>
-              <a:t>Query: 'Crushing chest pain radiating to arm'</a:t>
-            </a:r>
-            <a:br/>
-            <a:br/>
-            <a:r>
-              <a:t>Shows: Instant red emergency banner (~20 ms). Directs to 112/108 without waiting for LLM tokens.</a:t>
-            </a:r>
-          </a:p>
-        </p:txBody>
-      </p:sp>
-      <p:sp>
-        <p:nvSpPr>
-          <p:cNvPr id="11" name="Rounded Rectangle 10"/>
-          <p:cNvSpPr/>
-          <p:nvPr/>
-        </p:nvSpPr>
-        <p:spPr>
-          <a:xfrm>
-            <a:off x="8961120" y="1645920"/>
-            <a:ext cx="2468880" cy="4389120"/>
-          </a:xfrm>
-          <a:prstGeom prst="roundRect">
-            <a:avLst/>
-          </a:prstGeom>
-          <a:solidFill>
-            <a:srgbClr val="FFFFFF"/>
-          </a:solidFill>
-          <a:ln w="19050">
-            <a:solidFill>
-              <a:srgbClr val="0284C7"/>
-            </a:solidFill>
-          </a:ln>
-        </p:spPr>
-        <p:style>
-          <a:lnRef idx="1">
-            <a:schemeClr val="accent1"/>
-          </a:lnRef>
-          <a:fillRef idx="3">
-            <a:schemeClr val="accent1"/>
-          </a:fillRef>
-          <a:effectRef idx="2">
-            <a:schemeClr val="accent1"/>
-          </a:effectRef>
-          <a:fontRef idx="minor">
-            <a:schemeClr val="lt1"/>
-          </a:fontRef>
-        </p:style>
-        <p:txBody>
-          <a:bodyPr rtlCol="0" anchor="ctr"/>
-          <a:lstStyle/>
-          <a:p>
-            <a:pPr algn="ctr"/>
-          </a:p>
-        </p:txBody>
-      </p:sp>
-      <p:sp>
-        <p:nvSpPr>
-          <p:cNvPr id="12" name="TextBox 11"/>
-          <p:cNvSpPr txBox="1"/>
-          <p:nvPr/>
-        </p:nvSpPr>
-        <p:spPr>
-          <a:xfrm>
-            <a:off x="9098280" y="1828800"/>
-            <a:ext cx="2194560" cy="3931920"/>
-          </a:xfrm>
-          <a:prstGeom prst="rect">
-            <a:avLst/>
-          </a:prstGeom>
-          <a:noFill/>
-        </p:spPr>
-        <p:txBody>
-          <a:bodyPr wrap="square">
-            <a:spAutoFit/>
-          </a:bodyPr>
-          <a:lstStyle/>
-          <a:p>
-            <a:pPr>
-              <a:defRPr sz="1400" b="1">
-                <a:solidFill>
-                  <a:srgbClr val="0284C7"/>
-                </a:solidFill>
-              </a:defRPr>
-            </a:pPr>
-            <a:r>
-              <a:t>Beat 4: Cost Asymmetry</a:t>
+              <a:t>• Atomic Lua Script: Trims old timestamps, counts active requests, records timestamp, and sets TTL in a single atomic Redis round-trip.</a:t>
             </a:r>
           </a:p>
           <a:p>
             <a:pPr>
               <a:spcBef>
-                <a:spcPts val="1200"/>
+                <a:spcPts val="1000"/>
               </a:spcBef>
               <a:defRPr sz="1200">
                 <a:solidFill>
@@ -6646,12 +6658,22 @@
               </a:defRPr>
             </a:pPr>
             <a:r>
-              <a:t>Query: 'I think it's acid reflux but chest hurts'</a:t>
-            </a:r>
-            <a:br/>
-            <a:br/>
-            <a:r>
-              <a:t>Shows: Still escalates. Proves safety priority: false alarms are minor; missed heart attacks are fatal.</a:t>
+              <a:t>• Eliminates Race Conditions: Traditional read-then-write approaches permit concurrent limit bypass. Atomic execution prevents this.</a:t>
+            </a:r>
+          </a:p>
+          <a:p>
+            <a:pPr>
+              <a:spcBef>
+                <a:spcPts val="1000"/>
+              </a:spcBef>
+              <a:defRPr sz="1200">
+                <a:solidFill>
+                  <a:srgbClr val="1E293B"/>
+                </a:solidFill>
+              </a:defRPr>
+            </a:pPr>
+            <a:r>
+              <a:t>• Fail-Open Resiliency: If Redis is unavailable, rate limiting is bypassed. A rate-limiter failure never takes down critical health access.</a:t>
             </a:r>
           </a:p>
         </p:txBody>
@@ -6749,7 +6771,7 @@
               </a:defRPr>
             </a:pPr>
             <a:r>
-              <a:t>HEALTH ASSISTANT · PROJECT EVALUATION</a:t>
+              <a:t>HEALTH ASSISTANT · DESIGN DOC &amp; FEASIBILITY</a:t>
             </a:r>
           </a:p>
         </p:txBody>
@@ -6784,7 +6806,7 @@
               </a:defRPr>
             </a:pPr>
             <a:r>
-              <a:t>Defense: Why Use This Over Frontier AI Models (ChatGPT/Gemini)?</a:t>
+              <a:t>Current Implementation Status: Production Ready</a:t>
             </a:r>
           </a:p>
         </p:txBody>
@@ -6798,7 +6820,7 @@
         <p:spPr>
           <a:xfrm>
             <a:off x="731520" y="1463040"/>
-            <a:ext cx="5120640" cy="4572000"/>
+            <a:ext cx="3383280" cy="2743200"/>
           </a:xfrm>
           <a:prstGeom prst="roundRect">
             <a:avLst/>
@@ -6808,7 +6830,7 @@
           </a:solidFill>
           <a:ln w="19050">
             <a:solidFill>
-              <a:srgbClr val="E11D48"/>
+              <a:srgbClr val="E2E8F0"/>
             </a:solidFill>
           </a:ln>
         </p:spPr>
@@ -6843,7 +6865,7 @@
         <p:spPr>
           <a:xfrm>
             <a:off x="914400" y="1645920"/>
-            <a:ext cx="4754880" cy="4114800"/>
+            <a:ext cx="3017520" cy="2377440"/>
           </a:xfrm>
           <a:prstGeom prst="rect">
             <a:avLst/>
@@ -6857,20 +6879,20 @@
           <a:lstStyle/>
           <a:p>
             <a:pPr>
-              <a:defRPr sz="1600" b="1">
-                <a:solidFill>
-                  <a:srgbClr val="E11D48"/>
-                </a:solidFill>
-              </a:defRPr>
-            </a:pPr>
-            <a:r>
-              <a:t>Frontier AI Models (ChatGPT, Claude)</a:t>
+              <a:defRPr sz="1500" b="1">
+                <a:solidFill>
+                  <a:srgbClr val="0284C7"/>
+                </a:solidFill>
+              </a:defRPr>
+            </a:pPr>
+            <a:r>
+              <a:t>Backend &amp; Database</a:t>
             </a:r>
           </a:p>
           <a:p>
             <a:pPr>
               <a:spcBef>
-                <a:spcPts val="1000"/>
+                <a:spcPts val="800"/>
               </a:spcBef>
               <a:defRPr sz="1200">
                 <a:solidFill>
@@ -6879,13 +6901,109 @@
               </a:defRPr>
             </a:pPr>
             <a:r>
-              <a:t>• Unconstrained Intelligence: Trained to be helpful and conversational. They will speculate on symptoms and suggest unverified home remedies.</a:t>
+              <a:t>FastAPI (Python 3.11, async)</a:t>
+            </a:r>
+            <a:br/>
+            <a:r>
+              <a:t>SQLAlchemy 2.0 + asyncpg</a:t>
+            </a:r>
+            <a:br/>
+            <a:r>
+              <a:t>PostgreSQL 16 + pgvector (HNSW)</a:t>
+            </a:r>
+            <a:br/>
+            <a:r>
+              <a:t>Redis 7 Ephemeral Cache</a:t>
+            </a:r>
+            <a:br/>
+            <a:r>
+              <a:t>Alembic Database Migrations</a:t>
+            </a:r>
+          </a:p>
+        </p:txBody>
+      </p:sp>
+      <p:sp>
+        <p:nvSpPr>
+          <p:cNvPr id="7" name="Rounded Rectangle 6"/>
+          <p:cNvSpPr/>
+          <p:nvPr/>
+        </p:nvSpPr>
+        <p:spPr>
+          <a:xfrm>
+            <a:off x="4389120" y="1463040"/>
+            <a:ext cx="3383280" cy="2743200"/>
+          </a:xfrm>
+          <a:prstGeom prst="roundRect">
+            <a:avLst/>
+          </a:prstGeom>
+          <a:solidFill>
+            <a:srgbClr val="FFFFFF"/>
+          </a:solidFill>
+          <a:ln w="19050">
+            <a:solidFill>
+              <a:srgbClr val="E2E8F0"/>
+            </a:solidFill>
+          </a:ln>
+        </p:spPr>
+        <p:style>
+          <a:lnRef idx="1">
+            <a:schemeClr val="accent1"/>
+          </a:lnRef>
+          <a:fillRef idx="3">
+            <a:schemeClr val="accent1"/>
+          </a:fillRef>
+          <a:effectRef idx="2">
+            <a:schemeClr val="accent1"/>
+          </a:effectRef>
+          <a:fontRef idx="minor">
+            <a:schemeClr val="lt1"/>
+          </a:fontRef>
+        </p:style>
+        <p:txBody>
+          <a:bodyPr rtlCol="0" anchor="ctr"/>
+          <a:lstStyle/>
+          <a:p>
+            <a:pPr algn="ctr"/>
+          </a:p>
+        </p:txBody>
+      </p:sp>
+      <p:sp>
+        <p:nvSpPr>
+          <p:cNvPr id="8" name="TextBox 7"/>
+          <p:cNvSpPr txBox="1"/>
+          <p:nvPr/>
+        </p:nvSpPr>
+        <p:spPr>
+          <a:xfrm>
+            <a:off x="4572000" y="1645920"/>
+            <a:ext cx="3017520" cy="2377440"/>
+          </a:xfrm>
+          <a:prstGeom prst="rect">
+            <a:avLst/>
+          </a:prstGeom>
+          <a:noFill/>
+        </p:spPr>
+        <p:txBody>
+          <a:bodyPr wrap="square">
+            <a:spAutoFit/>
+          </a:bodyPr>
+          <a:lstStyle/>
+          <a:p>
+            <a:pPr>
+              <a:defRPr sz="1500" b="1">
+                <a:solidFill>
+                  <a:srgbClr val="0284C7"/>
+                </a:solidFill>
+              </a:defRPr>
+            </a:pPr>
+            <a:r>
+              <a:t>Frontend &amp; UX</a:t>
             </a:r>
           </a:p>
           <a:p>
             <a:pPr>
               <a:spcBef>
-                <a:spcPts val="1000"/>
+                <a:spcPts val="800"/>
               </a:spcBef>
               <a:defRPr sz="1200">
                 <a:solidFill>
@@ -6894,13 +7012,109 @@
               </a:defRPr>
             </a:pPr>
             <a:r>
-              <a:t>• Opaque Sourcing: Synthesize text from internet scrapings (Reddit, forums, blogs). Zero legal traceability or document-level citations.</a:t>
+              <a:t>React 18 + TypeScript + Vite</a:t>
+            </a:r>
+            <a:br/>
+            <a:r>
+              <a:t>Tailwind CSS modern styling</a:t>
+            </a:r>
+            <a:br/>
+            <a:r>
+              <a:t>Server-Sent Events (SSE) Reader</a:t>
+            </a:r>
+            <a:br/>
+            <a:r>
+              <a:t>Interactive Citation Inspector</a:t>
+            </a:r>
+            <a:br/>
+            <a:r>
+              <a:t>Emergency Visual Escalation</a:t>
+            </a:r>
+          </a:p>
+        </p:txBody>
+      </p:sp>
+      <p:sp>
+        <p:nvSpPr>
+          <p:cNvPr id="9" name="Rounded Rectangle 8"/>
+          <p:cNvSpPr/>
+          <p:nvPr/>
+        </p:nvSpPr>
+        <p:spPr>
+          <a:xfrm>
+            <a:off x="8046720" y="1463040"/>
+            <a:ext cx="3383280" cy="2743200"/>
+          </a:xfrm>
+          <a:prstGeom prst="roundRect">
+            <a:avLst/>
+          </a:prstGeom>
+          <a:solidFill>
+            <a:srgbClr val="FFFFFF"/>
+          </a:solidFill>
+          <a:ln w="19050">
+            <a:solidFill>
+              <a:srgbClr val="E2E8F0"/>
+            </a:solidFill>
+          </a:ln>
+        </p:spPr>
+        <p:style>
+          <a:lnRef idx="1">
+            <a:schemeClr val="accent1"/>
+          </a:lnRef>
+          <a:fillRef idx="3">
+            <a:schemeClr val="accent1"/>
+          </a:fillRef>
+          <a:effectRef idx="2">
+            <a:schemeClr val="accent1"/>
+          </a:effectRef>
+          <a:fontRef idx="minor">
+            <a:schemeClr val="lt1"/>
+          </a:fontRef>
+        </p:style>
+        <p:txBody>
+          <a:bodyPr rtlCol="0" anchor="ctr"/>
+          <a:lstStyle/>
+          <a:p>
+            <a:pPr algn="ctr"/>
+          </a:p>
+        </p:txBody>
+      </p:sp>
+      <p:sp>
+        <p:nvSpPr>
+          <p:cNvPr id="10" name="TextBox 9"/>
+          <p:cNvSpPr txBox="1"/>
+          <p:nvPr/>
+        </p:nvSpPr>
+        <p:spPr>
+          <a:xfrm>
+            <a:off x="8229600" y="1645920"/>
+            <a:ext cx="3017520" cy="2377440"/>
+          </a:xfrm>
+          <a:prstGeom prst="rect">
+            <a:avLst/>
+          </a:prstGeom>
+          <a:noFill/>
+        </p:spPr>
+        <p:txBody>
+          <a:bodyPr wrap="square">
+            <a:spAutoFit/>
+          </a:bodyPr>
+          <a:lstStyle/>
+          <a:p>
+            <a:pPr>
+              <a:defRPr sz="1500" b="1">
+                <a:solidFill>
+                  <a:srgbClr val="0284C7"/>
+                </a:solidFill>
+              </a:defRPr>
+            </a:pPr>
+            <a:r>
+              <a:t>Security &amp; Auth</a:t>
             </a:r>
           </a:p>
           <a:p>
             <a:pPr>
               <a:spcBef>
-                <a:spcPts val="1000"/>
+                <a:spcPts val="800"/>
               </a:spcBef>
               <a:defRPr sz="1200">
                 <a:solidFill>
@@ -6909,42 +7123,43 @@
               </a:defRPr>
             </a:pPr>
             <a:r>
-              <a:t>• Dangerous Latency in Crises: Take 2-5 seconds over HTTP to chat conversationally when a user is experiencing cardiac arrest or stroke.</a:t>
-            </a:r>
-          </a:p>
-          <a:p>
-            <a:pPr>
-              <a:spcBef>
-                <a:spcPts val="1000"/>
-              </a:spcBef>
-              <a:defRPr sz="1200">
-                <a:solidFill>
-                  <a:srgbClr val="1E293B"/>
-                </a:solidFill>
-              </a:defRPr>
-            </a:pPr>
-            <a:r>
-              <a:t>• Prompt Drift &amp; Jailbreaks: System prompts ('Act like a doctor') can be bypassed or ignored by creative user queries.</a:t>
-            </a:r>
-          </a:p>
-        </p:txBody>
-      </p:sp>
-      <p:sp>
-        <p:nvSpPr>
-          <p:cNvPr id="7" name="Rounded Rectangle 6"/>
+              <a:t>Clerk Authentication</a:t>
+            </a:r>
+            <a:br/>
+            <a:r>
+              <a:t>JWKS Cryptographic Verification</a:t>
+            </a:r>
+            <a:br/>
+            <a:r>
+              <a:t>RS256 JWT validation on all API calls</a:t>
+            </a:r>
+            <a:br/>
+            <a:r>
+              <a:t>No browser-side credential trust</a:t>
+            </a:r>
+            <a:br/>
+            <a:r>
+              <a:t>Strict CORS &amp; rate limit headers</a:t>
+            </a:r>
+          </a:p>
+        </p:txBody>
+      </p:sp>
+      <p:sp>
+        <p:nvSpPr>
+          <p:cNvPr id="11" name="Rounded Rectangle 10"/>
           <p:cNvSpPr/>
           <p:nvPr/>
         </p:nvSpPr>
         <p:spPr>
           <a:xfrm>
-            <a:off x="6217920" y="1463040"/>
-            <a:ext cx="5212080" cy="4572000"/>
+            <a:off x="731520" y="4480560"/>
+            <a:ext cx="10698480" cy="1645920"/>
           </a:xfrm>
           <a:prstGeom prst="roundRect">
             <a:avLst/>
           </a:prstGeom>
           <a:solidFill>
-            <a:srgbClr val="FFFFFF"/>
+            <a:srgbClr val="F0FDF4"/>
           </a:solidFill>
           <a:ln w="19050">
             <a:solidFill>
@@ -6976,14 +7191,14 @@
       </p:sp>
       <p:sp>
         <p:nvSpPr>
-          <p:cNvPr id="8" name="TextBox 7"/>
+          <p:cNvPr id="12" name="TextBox 11"/>
           <p:cNvSpPr txBox="1"/>
           <p:nvPr/>
         </p:nvSpPr>
         <p:spPr>
           <a:xfrm>
-            <a:off x="6400800" y="1645920"/>
-            <a:ext cx="4846320" cy="4114800"/>
+            <a:off x="914400" y="4572000"/>
+            <a:ext cx="10332720" cy="1371600"/>
           </a:xfrm>
           <a:prstGeom prst="rect">
             <a:avLst/>
@@ -6997,74 +7212,37 @@
           <a:lstStyle/>
           <a:p>
             <a:pPr>
-              <a:defRPr sz="1600" b="1">
+              <a:defRPr sz="1300" b="1">
                 <a:solidFill>
                   <a:srgbClr val="10B981"/>
                 </a:solidFill>
               </a:defRPr>
             </a:pPr>
             <a:r>
-              <a:t>Our Grounded Assistant Architecture</a:t>
+              <a:t>RIGOROUS AUTOMATED TEST SUITE: 282 UNIT TESTS (100% PASSING)</a:t>
             </a:r>
           </a:p>
           <a:p>
             <a:pPr>
               <a:spcBef>
-                <a:spcPts val="1000"/>
+                <a:spcPts val="400"/>
               </a:spcBef>
-              <a:defRPr sz="1200">
+              <a:defRPr sz="1100">
                 <a:solidFill>
                   <a:srgbClr val="1E293B"/>
                 </a:solidFill>
               </a:defRPr>
             </a:pPr>
             <a:r>
-              <a:t>• Enforced Negative Constraints: Architecturally incapable of hallucinating without verified medical context (0.65 similarity floor).</a:t>
-            </a:r>
-          </a:p>
-          <a:p>
-            <a:pPr>
-              <a:spcBef>
-                <a:spcPts val="1000"/>
-              </a:spcBef>
-              <a:defRPr sz="1200">
-                <a:solidFill>
-                  <a:srgbClr val="1E293B"/>
-                </a:solidFill>
-              </a:defRPr>
-            </a:pPr>
-            <a:r>
-              <a:t>• 100% Chain-of-Custody: Every claim links to an exact legal document chunk from WHO, NHS, NIH, or CDC.</a:t>
-            </a:r>
-          </a:p>
-          <a:p>
-            <a:pPr>
-              <a:spcBef>
-                <a:spcPts val="1000"/>
-              </a:spcBef>
-              <a:defRPr sz="1200">
-                <a:solidFill>
-                  <a:srgbClr val="1E293B"/>
-                </a:solidFill>
-              </a:defRPr>
-            </a:pPr>
-            <a:r>
-              <a:t>• Deterministic Emergency Speed: Rule-based regex evaluates raw message in &lt; 1 ms (~20 ms HTTP) and routes to 112/108 immediately.</a:t>
-            </a:r>
-          </a:p>
-          <a:p>
-            <a:pPr>
-              <a:spcBef>
-                <a:spcPts val="1000"/>
-              </a:spcBef>
-              <a:defRPr sz="1200">
-                <a:solidFill>
-                  <a:srgbClr val="1E293B"/>
-                </a:solidFill>
-              </a:defRPr>
-            </a:pPr>
-            <a:r>
-              <a:t>• Zero Diagnosis Liability: Strictly explains literature; cannot prescribe medication or suggest dosages by design.</a:t>
+              <a:t>Comprehensive test coverage executed in 4.46 seconds:</a:t>
+            </a:r>
+            <a:br/>
+            <a:r>
+              <a:t>• 98 tests for red-flag emergency detection &amp; phrasing variants    • 38 tests for vector retriever &amp; floor filtering</a:t>
+            </a:r>
+            <a:br/>
+            <a:r>
+              <a:t>• 31 tests for document extraction &amp; chunking bounds             • 21 tests for authentication &amp; rate limiting</a:t>
             </a:r>
           </a:p>
         </p:txBody>
@@ -7162,7 +7340,7 @@
               </a:defRPr>
             </a:pPr>
             <a:r>
-              <a:t>HEALTH ASSISTANT · PROJECT EVALUATION</a:t>
+              <a:t>HEALTH ASSISTANT · DESIGN DOC &amp; FEASIBILITY</a:t>
             </a:r>
           </a:p>
         </p:txBody>
@@ -7197,7 +7375,7 @@
               </a:defRPr>
             </a:pPr>
             <a:r>
-              <a:t>Engineering Boundaries &amp; Future Roadmap</a:t>
+              <a:t>Empirical Benchmark Results: Grounding &amp; Latency</a:t>
             </a:r>
           </a:p>
         </p:txBody>
@@ -7272,18 +7450,18 @@
             <a:pPr>
               <a:defRPr sz="1600" b="1">
                 <a:solidFill>
-                  <a:srgbClr val="0E7490"/>
-                </a:solidFill>
-              </a:defRPr>
-            </a:pPr>
-            <a:r>
-              <a:t>Current Engineering Boundaries</a:t>
+                  <a:srgbClr val="0284C7"/>
+                </a:solidFill>
+              </a:defRPr>
+            </a:pPr>
+            <a:r>
+              <a:t>Retrieval &amp; Grounding Precision</a:t>
             </a:r>
           </a:p>
           <a:p>
             <a:pPr>
               <a:spcBef>
-                <a:spcPts val="1000"/>
+                <a:spcPts val="800"/>
               </a:spcBef>
               <a:defRPr sz="1200">
                 <a:solidFill>
@@ -7292,13 +7470,13 @@
               </a:defRPr>
             </a:pPr>
             <a:r>
-              <a:t>• Curated Frozen Corpus: Limited to 42-50 vetted documents. Questions outside this scope (e.g. rare diseases, COVID-19) are refused.</a:t>
+              <a:t>• In-Corpus Retrieval Hit Rate: 90% (27/30 in-corpus medical queries retrieved relevant passages).</a:t>
             </a:r>
           </a:p>
           <a:p>
             <a:pPr>
               <a:spcBef>
-                <a:spcPts val="1000"/>
+                <a:spcPts val="800"/>
               </a:spcBef>
               <a:defRPr sz="1200">
                 <a:solidFill>
@@ -7307,13 +7485,13 @@
               </a:defRPr>
             </a:pPr>
             <a:r>
-              <a:t>• Informational Only: Built strictly as an informational tool. Cannot replace physical medical exams, diagnostics, or clinical triage.</a:t>
+              <a:t>• Out-of-Corpus False Hit Rate: 0.0% (0/8 non-medical or off-topic queries cleared the 0.65 threshold).</a:t>
             </a:r>
           </a:p>
           <a:p>
             <a:pPr>
               <a:spcBef>
-                <a:spcPts val="1000"/>
+                <a:spcPts val="800"/>
               </a:spcBef>
               <a:defRPr sz="1200">
                 <a:solidFill>
@@ -7322,13 +7500,13 @@
               </a:defRPr>
             </a:pPr>
             <a:r>
-              <a:t>• English Language: Currently trained and indexed for English medical literature.</a:t>
+              <a:t>• Top Similarity Separation: In-corpus median: 0.727 vs Out-of-corpus max: 0.555 (Wide 0.172 margin).</a:t>
             </a:r>
           </a:p>
           <a:p>
             <a:pPr>
               <a:spcBef>
-                <a:spcPts val="1000"/>
+                <a:spcPts val="800"/>
               </a:spcBef>
               <a:defRPr sz="1200">
                 <a:solidFill>
@@ -7337,7 +7515,22 @@
               </a:defRPr>
             </a:pPr>
             <a:r>
-              <a:t>• Manual Page Extraction for Bot-Protected Sites: 8 CDC articles require manual saving due to strict anti-scraping Cloudflare blocks.</a:t>
+              <a:t>• Citation Validity: 100% (129 of 129 generated citations mechanically verified to match retrieved source text).</a:t>
+            </a:r>
+          </a:p>
+          <a:p>
+            <a:pPr>
+              <a:spcBef>
+                <a:spcPts val="800"/>
+              </a:spcBef>
+              <a:defRPr sz="1200">
+                <a:solidFill>
+                  <a:srgbClr val="1E293B"/>
+                </a:solidFill>
+              </a:defRPr>
+            </a:pPr>
+            <a:r>
+              <a:t>• Mean Citations: 4.8 verified sources cited per response.</a:t>
             </a:r>
           </a:p>
         </p:txBody>
@@ -7412,18 +7605,18 @@
             <a:pPr>
               <a:defRPr sz="1600" b="1">
                 <a:solidFill>
-                  <a:srgbClr val="0284C7"/>
-                </a:solidFill>
-              </a:defRPr>
-            </a:pPr>
-            <a:r>
-              <a:t>Future Technical Roadmap</a:t>
+                  <a:srgbClr val="0E7490"/>
+                </a:solidFill>
+              </a:defRPr>
+            </a:pPr>
+            <a:r>
+              <a:t>System Latency Profile</a:t>
             </a:r>
           </a:p>
           <a:p>
             <a:pPr>
               <a:spcBef>
-                <a:spcPts val="1000"/>
+                <a:spcPts val="800"/>
               </a:spcBef>
               <a:defRPr sz="1200">
                 <a:solidFill>
@@ -7432,13 +7625,13 @@
               </a:defRPr>
             </a:pPr>
             <a:r>
-              <a:t>• Automated LLM-as-a-Judge Verification: Adding real-time claim-to-passage entailment verification (NLI) before streaming.</a:t>
+              <a:t>• Red-Flag Escalation: ~0.1 ms in-process matcher (HTTP round-trip ~20 ms).</a:t>
             </a:r>
           </a:p>
           <a:p>
             <a:pPr>
               <a:spcBef>
-                <a:spcPts val="1000"/>
+                <a:spcPts val="800"/>
               </a:spcBef>
               <a:defRPr sz="1200">
                 <a:solidFill>
@@ -7447,13 +7640,13 @@
               </a:defRPr>
             </a:pPr>
             <a:r>
-              <a:t>• Indian Regional Language Support: Expanding ingestion and queries to Hindi, Tamil, Telugu, and Bengali.</a:t>
+              <a:t>• Query Embedding (Gemini): Median 714 ms (p95: 950 ms).</a:t>
             </a:r>
           </a:p>
           <a:p>
             <a:pPr>
               <a:spcBef>
-                <a:spcPts val="1000"/>
+                <a:spcPts val="800"/>
               </a:spcBef>
               <a:defRPr sz="1200">
                 <a:solidFill>
@@ -7462,13 +7655,13 @@
               </a:defRPr>
             </a:pPr>
             <a:r>
-              <a:t>• National Health Authority Ingestion: Expanding corpus to include official publications from ICMR (Indian Council of Medical Research) and AIIMS.</a:t>
+              <a:t>• Vector Retrieval (pgvector HNSW): Median 46 ms (p95: 48 ms).</a:t>
             </a:r>
           </a:p>
           <a:p>
             <a:pPr>
               <a:spcBef>
-                <a:spcPts val="1000"/>
+                <a:spcPts val="800"/>
               </a:spcBef>
               <a:defRPr sz="1200">
                 <a:solidFill>
@@ -7477,7 +7670,37 @@
               </a:defRPr>
             </a:pPr>
             <a:r>
-              <a:t>• Offline Edge Deployment: Exploring quantized on-device embeddings and small language models for remote rural health clinics.</a:t>
+              <a:t>• Time to First Token (TTFT): Median 1,129 ms.</a:t>
+            </a:r>
+          </a:p>
+          <a:p>
+            <a:pPr>
+              <a:spcBef>
+                <a:spcPts val="800"/>
+              </a:spcBef>
+              <a:defRPr sz="1200">
+                <a:solidFill>
+                  <a:srgbClr val="1E293B"/>
+                </a:solidFill>
+              </a:defRPr>
+            </a:pPr>
+            <a:r>
+              <a:t>• Total End-to-End Generation: Median 2,512 ms (Groq p50: 1,843 ms, Gemini fallback p50: 3,605 ms).</a:t>
+            </a:r>
+          </a:p>
+          <a:p>
+            <a:pPr>
+              <a:spcBef>
+                <a:spcPts val="800"/>
+              </a:spcBef>
+              <a:defRPr sz="1200">
+                <a:solidFill>
+                  <a:srgbClr val="1E293B"/>
+                </a:solidFill>
+              </a:defRPr>
+            </a:pPr>
+            <a:r>
+              <a:t>• Safety Short-Circuit: 100% of red-flag queries prevented from reaching the LLM.</a:t>
             </a:r>
           </a:p>
         </p:txBody>
@@ -7515,6 +7738,1365 @@
             <a:avLst/>
           </a:prstGeom>
           <a:solidFill>
+            <a:srgbClr val="F8FAFC"/>
+          </a:solidFill>
+          <a:ln>
+            <a:solidFill>
+              <a:srgbClr val="F8FAFC"/>
+            </a:solidFill>
+          </a:ln>
+        </p:spPr>
+        <p:style>
+          <a:lnRef idx="1">
+            <a:schemeClr val="accent1"/>
+          </a:lnRef>
+          <a:fillRef idx="3">
+            <a:schemeClr val="accent1"/>
+          </a:fillRef>
+          <a:effectRef idx="2">
+            <a:schemeClr val="accent1"/>
+          </a:effectRef>
+          <a:fontRef idx="minor">
+            <a:schemeClr val="lt1"/>
+          </a:fontRef>
+        </p:style>
+        <p:txBody>
+          <a:bodyPr rtlCol="0" anchor="ctr"/>
+          <a:lstStyle/>
+          <a:p>
+            <a:pPr algn="ctr"/>
+          </a:p>
+        </p:txBody>
+      </p:sp>
+      <p:sp>
+        <p:nvSpPr>
+          <p:cNvPr id="3" name="TextBox 2"/>
+          <p:cNvSpPr txBox="1"/>
+          <p:nvPr/>
+        </p:nvSpPr>
+        <p:spPr>
+          <a:xfrm>
+            <a:off x="731520" y="365760"/>
+            <a:ext cx="10698480" cy="320040"/>
+          </a:xfrm>
+          <a:prstGeom prst="rect">
+            <a:avLst/>
+          </a:prstGeom>
+          <a:noFill/>
+        </p:spPr>
+        <p:txBody>
+          <a:bodyPr wrap="square">
+            <a:spAutoFit/>
+          </a:bodyPr>
+          <a:lstStyle/>
+          <a:p>
+            <a:pPr>
+              <a:defRPr sz="1000" b="1">
+                <a:solidFill>
+                  <a:srgbClr val="0284C7"/>
+                </a:solidFill>
+              </a:defRPr>
+            </a:pPr>
+            <a:r>
+              <a:t>HEALTH ASSISTANT · DESIGN DOC &amp; FEASIBILITY</a:t>
+            </a:r>
+          </a:p>
+        </p:txBody>
+      </p:sp>
+      <p:sp>
+        <p:nvSpPr>
+          <p:cNvPr id="4" name="TextBox 3"/>
+          <p:cNvSpPr txBox="1"/>
+          <p:nvPr/>
+        </p:nvSpPr>
+        <p:spPr>
+          <a:xfrm>
+            <a:off x="731520" y="640080"/>
+            <a:ext cx="10698480" cy="640080"/>
+          </a:xfrm>
+          <a:prstGeom prst="rect">
+            <a:avLst/>
+          </a:prstGeom>
+          <a:noFill/>
+        </p:spPr>
+        <p:txBody>
+          <a:bodyPr wrap="square">
+            <a:spAutoFit/>
+          </a:bodyPr>
+          <a:lstStyle/>
+          <a:p>
+            <a:pPr>
+              <a:defRPr sz="2200" b="1">
+                <a:solidFill>
+                  <a:srgbClr val="1E293B"/>
+                </a:solidFill>
+              </a:defRPr>
+            </a:pPr>
+            <a:r>
+              <a:t>Live Demonstration: Four Key Evaluation Beats</a:t>
+            </a:r>
+          </a:p>
+        </p:txBody>
+      </p:sp>
+      <p:sp>
+        <p:nvSpPr>
+          <p:cNvPr id="5" name="Rounded Rectangle 4"/>
+          <p:cNvSpPr/>
+          <p:nvPr/>
+        </p:nvSpPr>
+        <p:spPr>
+          <a:xfrm>
+            <a:off x="731520" y="1645920"/>
+            <a:ext cx="2468880" cy="4389120"/>
+          </a:xfrm>
+          <a:prstGeom prst="roundRect">
+            <a:avLst/>
+          </a:prstGeom>
+          <a:solidFill>
+            <a:srgbClr val="FFFFFF"/>
+          </a:solidFill>
+          <a:ln w="19050">
+            <a:solidFill>
+              <a:srgbClr val="0284C7"/>
+            </a:solidFill>
+          </a:ln>
+        </p:spPr>
+        <p:style>
+          <a:lnRef idx="1">
+            <a:schemeClr val="accent1"/>
+          </a:lnRef>
+          <a:fillRef idx="3">
+            <a:schemeClr val="accent1"/>
+          </a:fillRef>
+          <a:effectRef idx="2">
+            <a:schemeClr val="accent1"/>
+          </a:effectRef>
+          <a:fontRef idx="minor">
+            <a:schemeClr val="lt1"/>
+          </a:fontRef>
+        </p:style>
+        <p:txBody>
+          <a:bodyPr rtlCol="0" anchor="ctr"/>
+          <a:lstStyle/>
+          <a:p>
+            <a:pPr algn="ctr"/>
+          </a:p>
+        </p:txBody>
+      </p:sp>
+      <p:sp>
+        <p:nvSpPr>
+          <p:cNvPr id="6" name="TextBox 5"/>
+          <p:cNvSpPr txBox="1"/>
+          <p:nvPr/>
+        </p:nvSpPr>
+        <p:spPr>
+          <a:xfrm>
+            <a:off x="868680" y="1828800"/>
+            <a:ext cx="2194560" cy="3931920"/>
+          </a:xfrm>
+          <a:prstGeom prst="rect">
+            <a:avLst/>
+          </a:prstGeom>
+          <a:noFill/>
+        </p:spPr>
+        <p:txBody>
+          <a:bodyPr wrap="square">
+            <a:spAutoFit/>
+          </a:bodyPr>
+          <a:lstStyle/>
+          <a:p>
+            <a:pPr>
+              <a:defRPr sz="1400" b="1">
+                <a:solidFill>
+                  <a:srgbClr val="0284C7"/>
+                </a:solidFill>
+              </a:defRPr>
+            </a:pPr>
+            <a:r>
+              <a:t>Beat 1: Grounded Answer</a:t>
+            </a:r>
+          </a:p>
+          <a:p>
+            <a:pPr>
+              <a:spcBef>
+                <a:spcPts val="1200"/>
+              </a:spcBef>
+              <a:defRPr sz="1200">
+                <a:solidFill>
+                  <a:srgbClr val="1E293B"/>
+                </a:solidFill>
+              </a:defRPr>
+            </a:pPr>
+            <a:r>
+              <a:t>Query: 'What causes iron deficiency anaemia?'</a:t>
+            </a:r>
+            <a:br/>
+            <a:br/>
+            <a:r>
+              <a:t>Shows: Real-time SSE streaming, inline citation chips, and source inspector panel displaying NHS/WHO origin.</a:t>
+            </a:r>
+          </a:p>
+        </p:txBody>
+      </p:sp>
+      <p:sp>
+        <p:nvSpPr>
+          <p:cNvPr id="7" name="Rounded Rectangle 6"/>
+          <p:cNvSpPr/>
+          <p:nvPr/>
+        </p:nvSpPr>
+        <p:spPr>
+          <a:xfrm>
+            <a:off x="3474720" y="1645920"/>
+            <a:ext cx="2468880" cy="4389120"/>
+          </a:xfrm>
+          <a:prstGeom prst="roundRect">
+            <a:avLst/>
+          </a:prstGeom>
+          <a:solidFill>
+            <a:srgbClr val="FFFFFF"/>
+          </a:solidFill>
+          <a:ln w="19050">
+            <a:solidFill>
+              <a:srgbClr val="0284C7"/>
+            </a:solidFill>
+          </a:ln>
+        </p:spPr>
+        <p:style>
+          <a:lnRef idx="1">
+            <a:schemeClr val="accent1"/>
+          </a:lnRef>
+          <a:fillRef idx="3">
+            <a:schemeClr val="accent1"/>
+          </a:fillRef>
+          <a:effectRef idx="2">
+            <a:schemeClr val="accent1"/>
+          </a:effectRef>
+          <a:fontRef idx="minor">
+            <a:schemeClr val="lt1"/>
+          </a:fontRef>
+        </p:style>
+        <p:txBody>
+          <a:bodyPr rtlCol="0" anchor="ctr"/>
+          <a:lstStyle/>
+          <a:p>
+            <a:pPr algn="ctr"/>
+          </a:p>
+        </p:txBody>
+      </p:sp>
+      <p:sp>
+        <p:nvSpPr>
+          <p:cNvPr id="8" name="TextBox 7"/>
+          <p:cNvSpPr txBox="1"/>
+          <p:nvPr/>
+        </p:nvSpPr>
+        <p:spPr>
+          <a:xfrm>
+            <a:off x="3611880" y="1828800"/>
+            <a:ext cx="2194560" cy="3931920"/>
+          </a:xfrm>
+          <a:prstGeom prst="rect">
+            <a:avLst/>
+          </a:prstGeom>
+          <a:noFill/>
+        </p:spPr>
+        <p:txBody>
+          <a:bodyPr wrap="square">
+            <a:spAutoFit/>
+          </a:bodyPr>
+          <a:lstStyle/>
+          <a:p>
+            <a:pPr>
+              <a:defRPr sz="1400" b="1">
+                <a:solidFill>
+                  <a:srgbClr val="0284C7"/>
+                </a:solidFill>
+              </a:defRPr>
+            </a:pPr>
+            <a:r>
+              <a:t>Beat 2: Grounding Proof</a:t>
+            </a:r>
+          </a:p>
+          <a:p>
+            <a:pPr>
+              <a:spcBef>
+                <a:spcPts val="1200"/>
+              </a:spcBef>
+              <a:defRPr sz="1200">
+                <a:solidFill>
+                  <a:srgbClr val="1E293B"/>
+                </a:solidFill>
+              </a:defRPr>
+            </a:pPr>
+            <a:r>
+              <a:t>Query: 'What is the capital of France?'</a:t>
+            </a:r>
+            <a:br/>
+            <a:br/>
+            <a:r>
+              <a:t>Shows: Immediate refusal. Proves the model is structurally blocked without verified medical context.</a:t>
+            </a:r>
+          </a:p>
+        </p:txBody>
+      </p:sp>
+      <p:sp>
+        <p:nvSpPr>
+          <p:cNvPr id="9" name="Rounded Rectangle 8"/>
+          <p:cNvSpPr/>
+          <p:nvPr/>
+        </p:nvSpPr>
+        <p:spPr>
+          <a:xfrm>
+            <a:off x="6217920" y="1645920"/>
+            <a:ext cx="2468880" cy="4389120"/>
+          </a:xfrm>
+          <a:prstGeom prst="roundRect">
+            <a:avLst/>
+          </a:prstGeom>
+          <a:solidFill>
+            <a:srgbClr val="FFFFFF"/>
+          </a:solidFill>
+          <a:ln w="19050">
+            <a:solidFill>
+              <a:srgbClr val="0284C7"/>
+            </a:solidFill>
+          </a:ln>
+        </p:spPr>
+        <p:style>
+          <a:lnRef idx="1">
+            <a:schemeClr val="accent1"/>
+          </a:lnRef>
+          <a:fillRef idx="3">
+            <a:schemeClr val="accent1"/>
+          </a:fillRef>
+          <a:effectRef idx="2">
+            <a:schemeClr val="accent1"/>
+          </a:effectRef>
+          <a:fontRef idx="minor">
+            <a:schemeClr val="lt1"/>
+          </a:fontRef>
+        </p:style>
+        <p:txBody>
+          <a:bodyPr rtlCol="0" anchor="ctr"/>
+          <a:lstStyle/>
+          <a:p>
+            <a:pPr algn="ctr"/>
+          </a:p>
+        </p:txBody>
+      </p:sp>
+      <p:sp>
+        <p:nvSpPr>
+          <p:cNvPr id="10" name="TextBox 9"/>
+          <p:cNvSpPr txBox="1"/>
+          <p:nvPr/>
+        </p:nvSpPr>
+        <p:spPr>
+          <a:xfrm>
+            <a:off x="6355080" y="1828800"/>
+            <a:ext cx="2194560" cy="3931920"/>
+          </a:xfrm>
+          <a:prstGeom prst="rect">
+            <a:avLst/>
+          </a:prstGeom>
+          <a:noFill/>
+        </p:spPr>
+        <p:txBody>
+          <a:bodyPr wrap="square">
+            <a:spAutoFit/>
+          </a:bodyPr>
+          <a:lstStyle/>
+          <a:p>
+            <a:pPr>
+              <a:defRPr sz="1400" b="1">
+                <a:solidFill>
+                  <a:srgbClr val="0284C7"/>
+                </a:solidFill>
+              </a:defRPr>
+            </a:pPr>
+            <a:r>
+              <a:t>Beat 3: Emergency Short-Circuit</a:t>
+            </a:r>
+          </a:p>
+          <a:p>
+            <a:pPr>
+              <a:spcBef>
+                <a:spcPts val="1200"/>
+              </a:spcBef>
+              <a:defRPr sz="1200">
+                <a:solidFill>
+                  <a:srgbClr val="1E293B"/>
+                </a:solidFill>
+              </a:defRPr>
+            </a:pPr>
+            <a:r>
+              <a:t>Query: 'Crushing chest pain radiating to arm'</a:t>
+            </a:r>
+            <a:br/>
+            <a:br/>
+            <a:r>
+              <a:t>Shows: Instant red emergency banner (~20 ms). Directs to 112/108 without waiting for LLM tokens.</a:t>
+            </a:r>
+          </a:p>
+        </p:txBody>
+      </p:sp>
+      <p:sp>
+        <p:nvSpPr>
+          <p:cNvPr id="11" name="Rounded Rectangle 10"/>
+          <p:cNvSpPr/>
+          <p:nvPr/>
+        </p:nvSpPr>
+        <p:spPr>
+          <a:xfrm>
+            <a:off x="8961120" y="1645920"/>
+            <a:ext cx="2468880" cy="4389120"/>
+          </a:xfrm>
+          <a:prstGeom prst="roundRect">
+            <a:avLst/>
+          </a:prstGeom>
+          <a:solidFill>
+            <a:srgbClr val="FFFFFF"/>
+          </a:solidFill>
+          <a:ln w="19050">
+            <a:solidFill>
+              <a:srgbClr val="0284C7"/>
+            </a:solidFill>
+          </a:ln>
+        </p:spPr>
+        <p:style>
+          <a:lnRef idx="1">
+            <a:schemeClr val="accent1"/>
+          </a:lnRef>
+          <a:fillRef idx="3">
+            <a:schemeClr val="accent1"/>
+          </a:fillRef>
+          <a:effectRef idx="2">
+            <a:schemeClr val="accent1"/>
+          </a:effectRef>
+          <a:fontRef idx="minor">
+            <a:schemeClr val="lt1"/>
+          </a:fontRef>
+        </p:style>
+        <p:txBody>
+          <a:bodyPr rtlCol="0" anchor="ctr"/>
+          <a:lstStyle/>
+          <a:p>
+            <a:pPr algn="ctr"/>
+          </a:p>
+        </p:txBody>
+      </p:sp>
+      <p:sp>
+        <p:nvSpPr>
+          <p:cNvPr id="12" name="TextBox 11"/>
+          <p:cNvSpPr txBox="1"/>
+          <p:nvPr/>
+        </p:nvSpPr>
+        <p:spPr>
+          <a:xfrm>
+            <a:off x="9098280" y="1828800"/>
+            <a:ext cx="2194560" cy="3931920"/>
+          </a:xfrm>
+          <a:prstGeom prst="rect">
+            <a:avLst/>
+          </a:prstGeom>
+          <a:noFill/>
+        </p:spPr>
+        <p:txBody>
+          <a:bodyPr wrap="square">
+            <a:spAutoFit/>
+          </a:bodyPr>
+          <a:lstStyle/>
+          <a:p>
+            <a:pPr>
+              <a:defRPr sz="1400" b="1">
+                <a:solidFill>
+                  <a:srgbClr val="0284C7"/>
+                </a:solidFill>
+              </a:defRPr>
+            </a:pPr>
+            <a:r>
+              <a:t>Beat 4: Cost Asymmetry</a:t>
+            </a:r>
+          </a:p>
+          <a:p>
+            <a:pPr>
+              <a:spcBef>
+                <a:spcPts val="1200"/>
+              </a:spcBef>
+              <a:defRPr sz="1200">
+                <a:solidFill>
+                  <a:srgbClr val="1E293B"/>
+                </a:solidFill>
+              </a:defRPr>
+            </a:pPr>
+            <a:r>
+              <a:t>Query: 'I think it's acid reflux but chest hurts'</a:t>
+            </a:r>
+            <a:br/>
+            <a:br/>
+            <a:r>
+              <a:t>Shows: Still escalates. Proves safety priority: false alarms are minor; missed heart attacks are fatal.</a:t>
+            </a:r>
+          </a:p>
+        </p:txBody>
+      </p:sp>
+    </p:spTree>
+  </p:cSld>
+  <p:clrMapOvr>
+    <a:masterClrMapping/>
+  </p:clrMapOvr>
+</p:sld>
+</file>
+
+<file path=ppt/slides/slide16.xml><?xml version="1.0" encoding="utf-8"?>
+<p:sld xmlns:a="http://schemas.openxmlformats.org/drawingml/2006/main" xmlns:p="http://schemas.openxmlformats.org/presentationml/2006/main" xmlns:r="http://schemas.openxmlformats.org/officeDocument/2006/relationships">
+  <p:cSld>
+    <p:spTree>
+      <p:nvGrpSpPr>
+        <p:cNvPr id="1" name=""/>
+        <p:cNvGrpSpPr/>
+        <p:nvPr/>
+      </p:nvGrpSpPr>
+      <p:grpSpPr/>
+      <p:sp>
+        <p:nvSpPr>
+          <p:cNvPr id="2" name="Rectangle 1"/>
+          <p:cNvSpPr/>
+          <p:nvPr/>
+        </p:nvSpPr>
+        <p:spPr>
+          <a:xfrm>
+            <a:off x="0" y="0"/>
+            <a:ext cx="12191695" cy="6858000"/>
+          </a:xfrm>
+          <a:prstGeom prst="rect">
+            <a:avLst/>
+          </a:prstGeom>
+          <a:solidFill>
+            <a:srgbClr val="F8FAFC"/>
+          </a:solidFill>
+          <a:ln>
+            <a:solidFill>
+              <a:srgbClr val="F8FAFC"/>
+            </a:solidFill>
+          </a:ln>
+        </p:spPr>
+        <p:style>
+          <a:lnRef idx="1">
+            <a:schemeClr val="accent1"/>
+          </a:lnRef>
+          <a:fillRef idx="3">
+            <a:schemeClr val="accent1"/>
+          </a:fillRef>
+          <a:effectRef idx="2">
+            <a:schemeClr val="accent1"/>
+          </a:effectRef>
+          <a:fontRef idx="minor">
+            <a:schemeClr val="lt1"/>
+          </a:fontRef>
+        </p:style>
+        <p:txBody>
+          <a:bodyPr rtlCol="0" anchor="ctr"/>
+          <a:lstStyle/>
+          <a:p>
+            <a:pPr algn="ctr"/>
+          </a:p>
+        </p:txBody>
+      </p:sp>
+      <p:sp>
+        <p:nvSpPr>
+          <p:cNvPr id="3" name="TextBox 2"/>
+          <p:cNvSpPr txBox="1"/>
+          <p:nvPr/>
+        </p:nvSpPr>
+        <p:spPr>
+          <a:xfrm>
+            <a:off x="731520" y="365760"/>
+            <a:ext cx="10698480" cy="320040"/>
+          </a:xfrm>
+          <a:prstGeom prst="rect">
+            <a:avLst/>
+          </a:prstGeom>
+          <a:noFill/>
+        </p:spPr>
+        <p:txBody>
+          <a:bodyPr wrap="square">
+            <a:spAutoFit/>
+          </a:bodyPr>
+          <a:lstStyle/>
+          <a:p>
+            <a:pPr>
+              <a:defRPr sz="1000" b="1">
+                <a:solidFill>
+                  <a:srgbClr val="0284C7"/>
+                </a:solidFill>
+              </a:defRPr>
+            </a:pPr>
+            <a:r>
+              <a:t>HEALTH ASSISTANT · DESIGN DOC &amp; FEASIBILITY</a:t>
+            </a:r>
+          </a:p>
+        </p:txBody>
+      </p:sp>
+      <p:sp>
+        <p:nvSpPr>
+          <p:cNvPr id="4" name="TextBox 3"/>
+          <p:cNvSpPr txBox="1"/>
+          <p:nvPr/>
+        </p:nvSpPr>
+        <p:spPr>
+          <a:xfrm>
+            <a:off x="731520" y="640080"/>
+            <a:ext cx="10698480" cy="640080"/>
+          </a:xfrm>
+          <a:prstGeom prst="rect">
+            <a:avLst/>
+          </a:prstGeom>
+          <a:noFill/>
+        </p:spPr>
+        <p:txBody>
+          <a:bodyPr wrap="square">
+            <a:spAutoFit/>
+          </a:bodyPr>
+          <a:lstStyle/>
+          <a:p>
+            <a:pPr>
+              <a:defRPr sz="2200" b="1">
+                <a:solidFill>
+                  <a:srgbClr val="1E293B"/>
+                </a:solidFill>
+              </a:defRPr>
+            </a:pPr>
+            <a:r>
+              <a:t>Defense: Why Use This Over Frontier AI Models (ChatGPT/Gemini)?</a:t>
+            </a:r>
+          </a:p>
+        </p:txBody>
+      </p:sp>
+      <p:sp>
+        <p:nvSpPr>
+          <p:cNvPr id="5" name="Rounded Rectangle 4"/>
+          <p:cNvSpPr/>
+          <p:nvPr/>
+        </p:nvSpPr>
+        <p:spPr>
+          <a:xfrm>
+            <a:off x="731520" y="1463040"/>
+            <a:ext cx="5120640" cy="4572000"/>
+          </a:xfrm>
+          <a:prstGeom prst="roundRect">
+            <a:avLst/>
+          </a:prstGeom>
+          <a:solidFill>
+            <a:srgbClr val="FFFFFF"/>
+          </a:solidFill>
+          <a:ln w="19050">
+            <a:solidFill>
+              <a:srgbClr val="E11D48"/>
+            </a:solidFill>
+          </a:ln>
+        </p:spPr>
+        <p:style>
+          <a:lnRef idx="1">
+            <a:schemeClr val="accent1"/>
+          </a:lnRef>
+          <a:fillRef idx="3">
+            <a:schemeClr val="accent1"/>
+          </a:fillRef>
+          <a:effectRef idx="2">
+            <a:schemeClr val="accent1"/>
+          </a:effectRef>
+          <a:fontRef idx="minor">
+            <a:schemeClr val="lt1"/>
+          </a:fontRef>
+        </p:style>
+        <p:txBody>
+          <a:bodyPr rtlCol="0" anchor="ctr"/>
+          <a:lstStyle/>
+          <a:p>
+            <a:pPr algn="ctr"/>
+          </a:p>
+        </p:txBody>
+      </p:sp>
+      <p:sp>
+        <p:nvSpPr>
+          <p:cNvPr id="6" name="TextBox 5"/>
+          <p:cNvSpPr txBox="1"/>
+          <p:nvPr/>
+        </p:nvSpPr>
+        <p:spPr>
+          <a:xfrm>
+            <a:off x="914400" y="1645920"/>
+            <a:ext cx="4754880" cy="4114800"/>
+          </a:xfrm>
+          <a:prstGeom prst="rect">
+            <a:avLst/>
+          </a:prstGeom>
+          <a:noFill/>
+        </p:spPr>
+        <p:txBody>
+          <a:bodyPr wrap="square">
+            <a:spAutoFit/>
+          </a:bodyPr>
+          <a:lstStyle/>
+          <a:p>
+            <a:pPr>
+              <a:defRPr sz="1600" b="1">
+                <a:solidFill>
+                  <a:srgbClr val="E11D48"/>
+                </a:solidFill>
+              </a:defRPr>
+            </a:pPr>
+            <a:r>
+              <a:t>Frontier AI Models (ChatGPT, Claude)</a:t>
+            </a:r>
+          </a:p>
+          <a:p>
+            <a:pPr>
+              <a:spcBef>
+                <a:spcPts val="1000"/>
+              </a:spcBef>
+              <a:defRPr sz="1200">
+                <a:solidFill>
+                  <a:srgbClr val="1E293B"/>
+                </a:solidFill>
+              </a:defRPr>
+            </a:pPr>
+            <a:r>
+              <a:t>• Unconstrained Intelligence: Trained to be helpful and conversational. They will speculate on symptoms and suggest unverified home remedies.</a:t>
+            </a:r>
+          </a:p>
+          <a:p>
+            <a:pPr>
+              <a:spcBef>
+                <a:spcPts val="1000"/>
+              </a:spcBef>
+              <a:defRPr sz="1200">
+                <a:solidFill>
+                  <a:srgbClr val="1E293B"/>
+                </a:solidFill>
+              </a:defRPr>
+            </a:pPr>
+            <a:r>
+              <a:t>• Opaque Sourcing: Synthesize text from internet scrapings (Reddit, forums, blogs). Zero legal traceability or document-level citations.</a:t>
+            </a:r>
+          </a:p>
+          <a:p>
+            <a:pPr>
+              <a:spcBef>
+                <a:spcPts val="1000"/>
+              </a:spcBef>
+              <a:defRPr sz="1200">
+                <a:solidFill>
+                  <a:srgbClr val="1E293B"/>
+                </a:solidFill>
+              </a:defRPr>
+            </a:pPr>
+            <a:r>
+              <a:t>• Dangerous Latency in Crises: Take 2-5 seconds over HTTP to chat conversationally when a user is experiencing cardiac arrest or stroke.</a:t>
+            </a:r>
+          </a:p>
+          <a:p>
+            <a:pPr>
+              <a:spcBef>
+                <a:spcPts val="1000"/>
+              </a:spcBef>
+              <a:defRPr sz="1200">
+                <a:solidFill>
+                  <a:srgbClr val="1E293B"/>
+                </a:solidFill>
+              </a:defRPr>
+            </a:pPr>
+            <a:r>
+              <a:t>• Prompt Drift &amp; Jailbreaks: System prompts ('Act like a doctor') can be bypassed or ignored by creative user queries.</a:t>
+            </a:r>
+          </a:p>
+        </p:txBody>
+      </p:sp>
+      <p:sp>
+        <p:nvSpPr>
+          <p:cNvPr id="7" name="Rounded Rectangle 6"/>
+          <p:cNvSpPr/>
+          <p:nvPr/>
+        </p:nvSpPr>
+        <p:spPr>
+          <a:xfrm>
+            <a:off x="6217920" y="1463040"/>
+            <a:ext cx="5212080" cy="4572000"/>
+          </a:xfrm>
+          <a:prstGeom prst="roundRect">
+            <a:avLst/>
+          </a:prstGeom>
+          <a:solidFill>
+            <a:srgbClr val="FFFFFF"/>
+          </a:solidFill>
+          <a:ln w="19050">
+            <a:solidFill>
+              <a:srgbClr val="10B981"/>
+            </a:solidFill>
+          </a:ln>
+        </p:spPr>
+        <p:style>
+          <a:lnRef idx="1">
+            <a:schemeClr val="accent1"/>
+          </a:lnRef>
+          <a:fillRef idx="3">
+            <a:schemeClr val="accent1"/>
+          </a:fillRef>
+          <a:effectRef idx="2">
+            <a:schemeClr val="accent1"/>
+          </a:effectRef>
+          <a:fontRef idx="minor">
+            <a:schemeClr val="lt1"/>
+          </a:fontRef>
+        </p:style>
+        <p:txBody>
+          <a:bodyPr rtlCol="0" anchor="ctr"/>
+          <a:lstStyle/>
+          <a:p>
+            <a:pPr algn="ctr"/>
+          </a:p>
+        </p:txBody>
+      </p:sp>
+      <p:sp>
+        <p:nvSpPr>
+          <p:cNvPr id="8" name="TextBox 7"/>
+          <p:cNvSpPr txBox="1"/>
+          <p:nvPr/>
+        </p:nvSpPr>
+        <p:spPr>
+          <a:xfrm>
+            <a:off x="6400800" y="1645920"/>
+            <a:ext cx="4846320" cy="4114800"/>
+          </a:xfrm>
+          <a:prstGeom prst="rect">
+            <a:avLst/>
+          </a:prstGeom>
+          <a:noFill/>
+        </p:spPr>
+        <p:txBody>
+          <a:bodyPr wrap="square">
+            <a:spAutoFit/>
+          </a:bodyPr>
+          <a:lstStyle/>
+          <a:p>
+            <a:pPr>
+              <a:defRPr sz="1600" b="1">
+                <a:solidFill>
+                  <a:srgbClr val="10B981"/>
+                </a:solidFill>
+              </a:defRPr>
+            </a:pPr>
+            <a:r>
+              <a:t>Our Grounded Assistant Architecture</a:t>
+            </a:r>
+          </a:p>
+          <a:p>
+            <a:pPr>
+              <a:spcBef>
+                <a:spcPts val="1000"/>
+              </a:spcBef>
+              <a:defRPr sz="1200">
+                <a:solidFill>
+                  <a:srgbClr val="1E293B"/>
+                </a:solidFill>
+              </a:defRPr>
+            </a:pPr>
+            <a:r>
+              <a:t>• Enforced Negative Constraints: Architecturally incapable of hallucinating without verified medical context (0.65 similarity floor).</a:t>
+            </a:r>
+          </a:p>
+          <a:p>
+            <a:pPr>
+              <a:spcBef>
+                <a:spcPts val="1000"/>
+              </a:spcBef>
+              <a:defRPr sz="1200">
+                <a:solidFill>
+                  <a:srgbClr val="1E293B"/>
+                </a:solidFill>
+              </a:defRPr>
+            </a:pPr>
+            <a:r>
+              <a:t>• 100% Chain-of-Custody: Every claim links to an exact legal document chunk from WHO, NHS, NIH, or CDC.</a:t>
+            </a:r>
+          </a:p>
+          <a:p>
+            <a:pPr>
+              <a:spcBef>
+                <a:spcPts val="1000"/>
+              </a:spcBef>
+              <a:defRPr sz="1200">
+                <a:solidFill>
+                  <a:srgbClr val="1E293B"/>
+                </a:solidFill>
+              </a:defRPr>
+            </a:pPr>
+            <a:r>
+              <a:t>• Deterministic Emergency Speed: Rule-based regex evaluates raw message in &lt; 1 ms (~20 ms HTTP) and routes to 112/108 immediately.</a:t>
+            </a:r>
+          </a:p>
+          <a:p>
+            <a:pPr>
+              <a:spcBef>
+                <a:spcPts val="1000"/>
+              </a:spcBef>
+              <a:defRPr sz="1200">
+                <a:solidFill>
+                  <a:srgbClr val="1E293B"/>
+                </a:solidFill>
+              </a:defRPr>
+            </a:pPr>
+            <a:r>
+              <a:t>• Zero Diagnosis Liability: Strictly explains literature; cannot prescribe medication or suggest dosages by design.</a:t>
+            </a:r>
+          </a:p>
+        </p:txBody>
+      </p:sp>
+    </p:spTree>
+  </p:cSld>
+  <p:clrMapOvr>
+    <a:masterClrMapping/>
+  </p:clrMapOvr>
+</p:sld>
+</file>
+
+<file path=ppt/slides/slide17.xml><?xml version="1.0" encoding="utf-8"?>
+<p:sld xmlns:a="http://schemas.openxmlformats.org/drawingml/2006/main" xmlns:p="http://schemas.openxmlformats.org/presentationml/2006/main" xmlns:r="http://schemas.openxmlformats.org/officeDocument/2006/relationships">
+  <p:cSld>
+    <p:spTree>
+      <p:nvGrpSpPr>
+        <p:cNvPr id="1" name=""/>
+        <p:cNvGrpSpPr/>
+        <p:nvPr/>
+      </p:nvGrpSpPr>
+      <p:grpSpPr/>
+      <p:sp>
+        <p:nvSpPr>
+          <p:cNvPr id="2" name="Rectangle 1"/>
+          <p:cNvSpPr/>
+          <p:nvPr/>
+        </p:nvSpPr>
+        <p:spPr>
+          <a:xfrm>
+            <a:off x="0" y="0"/>
+            <a:ext cx="12191695" cy="6858000"/>
+          </a:xfrm>
+          <a:prstGeom prst="rect">
+            <a:avLst/>
+          </a:prstGeom>
+          <a:solidFill>
+            <a:srgbClr val="F8FAFC"/>
+          </a:solidFill>
+          <a:ln>
+            <a:solidFill>
+              <a:srgbClr val="F8FAFC"/>
+            </a:solidFill>
+          </a:ln>
+        </p:spPr>
+        <p:style>
+          <a:lnRef idx="1">
+            <a:schemeClr val="accent1"/>
+          </a:lnRef>
+          <a:fillRef idx="3">
+            <a:schemeClr val="accent1"/>
+          </a:fillRef>
+          <a:effectRef idx="2">
+            <a:schemeClr val="accent1"/>
+          </a:effectRef>
+          <a:fontRef idx="minor">
+            <a:schemeClr val="lt1"/>
+          </a:fontRef>
+        </p:style>
+        <p:txBody>
+          <a:bodyPr rtlCol="0" anchor="ctr"/>
+          <a:lstStyle/>
+          <a:p>
+            <a:pPr algn="ctr"/>
+          </a:p>
+        </p:txBody>
+      </p:sp>
+      <p:sp>
+        <p:nvSpPr>
+          <p:cNvPr id="3" name="TextBox 2"/>
+          <p:cNvSpPr txBox="1"/>
+          <p:nvPr/>
+        </p:nvSpPr>
+        <p:spPr>
+          <a:xfrm>
+            <a:off x="731520" y="365760"/>
+            <a:ext cx="10698480" cy="320040"/>
+          </a:xfrm>
+          <a:prstGeom prst="rect">
+            <a:avLst/>
+          </a:prstGeom>
+          <a:noFill/>
+        </p:spPr>
+        <p:txBody>
+          <a:bodyPr wrap="square">
+            <a:spAutoFit/>
+          </a:bodyPr>
+          <a:lstStyle/>
+          <a:p>
+            <a:pPr>
+              <a:defRPr sz="1000" b="1">
+                <a:solidFill>
+                  <a:srgbClr val="0284C7"/>
+                </a:solidFill>
+              </a:defRPr>
+            </a:pPr>
+            <a:r>
+              <a:t>HEALTH ASSISTANT · DESIGN DOC &amp; FEASIBILITY</a:t>
+            </a:r>
+          </a:p>
+        </p:txBody>
+      </p:sp>
+      <p:sp>
+        <p:nvSpPr>
+          <p:cNvPr id="4" name="TextBox 3"/>
+          <p:cNvSpPr txBox="1"/>
+          <p:nvPr/>
+        </p:nvSpPr>
+        <p:spPr>
+          <a:xfrm>
+            <a:off x="731520" y="640080"/>
+            <a:ext cx="10698480" cy="640080"/>
+          </a:xfrm>
+          <a:prstGeom prst="rect">
+            <a:avLst/>
+          </a:prstGeom>
+          <a:noFill/>
+        </p:spPr>
+        <p:txBody>
+          <a:bodyPr wrap="square">
+            <a:spAutoFit/>
+          </a:bodyPr>
+          <a:lstStyle/>
+          <a:p>
+            <a:pPr>
+              <a:defRPr sz="2200" b="1">
+                <a:solidFill>
+                  <a:srgbClr val="1E293B"/>
+                </a:solidFill>
+              </a:defRPr>
+            </a:pPr>
+            <a:r>
+              <a:t>Engineering Boundaries &amp; Future Roadmap</a:t>
+            </a:r>
+          </a:p>
+        </p:txBody>
+      </p:sp>
+      <p:sp>
+        <p:nvSpPr>
+          <p:cNvPr id="5" name="Rounded Rectangle 4"/>
+          <p:cNvSpPr/>
+          <p:nvPr/>
+        </p:nvSpPr>
+        <p:spPr>
+          <a:xfrm>
+            <a:off x="731520" y="1463040"/>
+            <a:ext cx="5120640" cy="4572000"/>
+          </a:xfrm>
+          <a:prstGeom prst="roundRect">
+            <a:avLst/>
+          </a:prstGeom>
+          <a:solidFill>
+            <a:srgbClr val="FFFFFF"/>
+          </a:solidFill>
+          <a:ln w="19050">
+            <a:solidFill>
+              <a:srgbClr val="E2E8F0"/>
+            </a:solidFill>
+          </a:ln>
+        </p:spPr>
+        <p:style>
+          <a:lnRef idx="1">
+            <a:schemeClr val="accent1"/>
+          </a:lnRef>
+          <a:fillRef idx="3">
+            <a:schemeClr val="accent1"/>
+          </a:fillRef>
+          <a:effectRef idx="2">
+            <a:schemeClr val="accent1"/>
+          </a:effectRef>
+          <a:fontRef idx="minor">
+            <a:schemeClr val="lt1"/>
+          </a:fontRef>
+        </p:style>
+        <p:txBody>
+          <a:bodyPr rtlCol="0" anchor="ctr"/>
+          <a:lstStyle/>
+          <a:p>
+            <a:pPr algn="ctr"/>
+          </a:p>
+        </p:txBody>
+      </p:sp>
+      <p:sp>
+        <p:nvSpPr>
+          <p:cNvPr id="6" name="TextBox 5"/>
+          <p:cNvSpPr txBox="1"/>
+          <p:nvPr/>
+        </p:nvSpPr>
+        <p:spPr>
+          <a:xfrm>
+            <a:off x="914400" y="1645920"/>
+            <a:ext cx="4754880" cy="4114800"/>
+          </a:xfrm>
+          <a:prstGeom prst="rect">
+            <a:avLst/>
+          </a:prstGeom>
+          <a:noFill/>
+        </p:spPr>
+        <p:txBody>
+          <a:bodyPr wrap="square">
+            <a:spAutoFit/>
+          </a:bodyPr>
+          <a:lstStyle/>
+          <a:p>
+            <a:pPr>
+              <a:defRPr sz="1600" b="1">
+                <a:solidFill>
+                  <a:srgbClr val="0E7490"/>
+                </a:solidFill>
+              </a:defRPr>
+            </a:pPr>
+            <a:r>
+              <a:t>Current Engineering Boundaries</a:t>
+            </a:r>
+          </a:p>
+          <a:p>
+            <a:pPr>
+              <a:spcBef>
+                <a:spcPts val="1000"/>
+              </a:spcBef>
+              <a:defRPr sz="1200">
+                <a:solidFill>
+                  <a:srgbClr val="1E293B"/>
+                </a:solidFill>
+              </a:defRPr>
+            </a:pPr>
+            <a:r>
+              <a:t>• Curated Frozen Corpus: Limited to 42-50 vetted documents. Questions outside this scope (e.g. rare diseases, COVID-19) are refused.</a:t>
+            </a:r>
+          </a:p>
+          <a:p>
+            <a:pPr>
+              <a:spcBef>
+                <a:spcPts val="1000"/>
+              </a:spcBef>
+              <a:defRPr sz="1200">
+                <a:solidFill>
+                  <a:srgbClr val="1E293B"/>
+                </a:solidFill>
+              </a:defRPr>
+            </a:pPr>
+            <a:r>
+              <a:t>• Informational Only: Built strictly as an informational tool. Cannot replace physical medical exams, diagnostics, or clinical triage.</a:t>
+            </a:r>
+          </a:p>
+          <a:p>
+            <a:pPr>
+              <a:spcBef>
+                <a:spcPts val="1000"/>
+              </a:spcBef>
+              <a:defRPr sz="1200">
+                <a:solidFill>
+                  <a:srgbClr val="1E293B"/>
+                </a:solidFill>
+              </a:defRPr>
+            </a:pPr>
+            <a:r>
+              <a:t>• English Language: Currently trained and indexed for English medical literature.</a:t>
+            </a:r>
+          </a:p>
+          <a:p>
+            <a:pPr>
+              <a:spcBef>
+                <a:spcPts val="1000"/>
+              </a:spcBef>
+              <a:defRPr sz="1200">
+                <a:solidFill>
+                  <a:srgbClr val="1E293B"/>
+                </a:solidFill>
+              </a:defRPr>
+            </a:pPr>
+            <a:r>
+              <a:t>• Manual Page Extraction for Bot-Protected Sites: 8 CDC articles require manual saving due to strict anti-scraping Cloudflare blocks.</a:t>
+            </a:r>
+          </a:p>
+        </p:txBody>
+      </p:sp>
+      <p:sp>
+        <p:nvSpPr>
+          <p:cNvPr id="7" name="Rounded Rectangle 6"/>
+          <p:cNvSpPr/>
+          <p:nvPr/>
+        </p:nvSpPr>
+        <p:spPr>
+          <a:xfrm>
+            <a:off x="6217920" y="1463040"/>
+            <a:ext cx="5212080" cy="4572000"/>
+          </a:xfrm>
+          <a:prstGeom prst="roundRect">
+            <a:avLst/>
+          </a:prstGeom>
+          <a:solidFill>
+            <a:srgbClr val="FFFFFF"/>
+          </a:solidFill>
+          <a:ln w="19050">
+            <a:solidFill>
+              <a:srgbClr val="E2E8F0"/>
+            </a:solidFill>
+          </a:ln>
+        </p:spPr>
+        <p:style>
+          <a:lnRef idx="1">
+            <a:schemeClr val="accent1"/>
+          </a:lnRef>
+          <a:fillRef idx="3">
+            <a:schemeClr val="accent1"/>
+          </a:fillRef>
+          <a:effectRef idx="2">
+            <a:schemeClr val="accent1"/>
+          </a:effectRef>
+          <a:fontRef idx="minor">
+            <a:schemeClr val="lt1"/>
+          </a:fontRef>
+        </p:style>
+        <p:txBody>
+          <a:bodyPr rtlCol="0" anchor="ctr"/>
+          <a:lstStyle/>
+          <a:p>
+            <a:pPr algn="ctr"/>
+          </a:p>
+        </p:txBody>
+      </p:sp>
+      <p:sp>
+        <p:nvSpPr>
+          <p:cNvPr id="8" name="TextBox 7"/>
+          <p:cNvSpPr txBox="1"/>
+          <p:nvPr/>
+        </p:nvSpPr>
+        <p:spPr>
+          <a:xfrm>
+            <a:off x="6400800" y="1645920"/>
+            <a:ext cx="4846320" cy="4114800"/>
+          </a:xfrm>
+          <a:prstGeom prst="rect">
+            <a:avLst/>
+          </a:prstGeom>
+          <a:noFill/>
+        </p:spPr>
+        <p:txBody>
+          <a:bodyPr wrap="square">
+            <a:spAutoFit/>
+          </a:bodyPr>
+          <a:lstStyle/>
+          <a:p>
+            <a:pPr>
+              <a:defRPr sz="1600" b="1">
+                <a:solidFill>
+                  <a:srgbClr val="0284C7"/>
+                </a:solidFill>
+              </a:defRPr>
+            </a:pPr>
+            <a:r>
+              <a:t>Future Technical Roadmap</a:t>
+            </a:r>
+          </a:p>
+          <a:p>
+            <a:pPr>
+              <a:spcBef>
+                <a:spcPts val="1000"/>
+              </a:spcBef>
+              <a:defRPr sz="1200">
+                <a:solidFill>
+                  <a:srgbClr val="1E293B"/>
+                </a:solidFill>
+              </a:defRPr>
+            </a:pPr>
+            <a:r>
+              <a:t>• Automated LLM-as-a-Judge Verification: Adding real-time claim-to-passage entailment verification (NLI) before streaming.</a:t>
+            </a:r>
+          </a:p>
+          <a:p>
+            <a:pPr>
+              <a:spcBef>
+                <a:spcPts val="1000"/>
+              </a:spcBef>
+              <a:defRPr sz="1200">
+                <a:solidFill>
+                  <a:srgbClr val="1E293B"/>
+                </a:solidFill>
+              </a:defRPr>
+            </a:pPr>
+            <a:r>
+              <a:t>• Indian Regional Language Support: Expanding ingestion and queries to Hindi, Tamil, Telugu, and Bengali.</a:t>
+            </a:r>
+          </a:p>
+          <a:p>
+            <a:pPr>
+              <a:spcBef>
+                <a:spcPts val="1000"/>
+              </a:spcBef>
+              <a:defRPr sz="1200">
+                <a:solidFill>
+                  <a:srgbClr val="1E293B"/>
+                </a:solidFill>
+              </a:defRPr>
+            </a:pPr>
+            <a:r>
+              <a:t>• National Health Authority Ingestion: Expanding corpus to include official publications from ICMR (Indian Council of Medical Research) and AIIMS.</a:t>
+            </a:r>
+          </a:p>
+          <a:p>
+            <a:pPr>
+              <a:spcBef>
+                <a:spcPts val="1000"/>
+              </a:spcBef>
+              <a:defRPr sz="1200">
+                <a:solidFill>
+                  <a:srgbClr val="1E293B"/>
+                </a:solidFill>
+              </a:defRPr>
+            </a:pPr>
+            <a:r>
+              <a:t>• Offline Edge Deployment: Exploring quantized on-device embeddings and small language models for remote rural health clinics.</a:t>
+            </a:r>
+          </a:p>
+        </p:txBody>
+      </p:sp>
+    </p:spTree>
+  </p:cSld>
+  <p:clrMapOvr>
+    <a:masterClrMapping/>
+  </p:clrMapOvr>
+</p:sld>
+</file>
+
+<file path=ppt/slides/slide18.xml><?xml version="1.0" encoding="utf-8"?>
+<p:sld xmlns:a="http://schemas.openxmlformats.org/drawingml/2006/main" xmlns:p="http://schemas.openxmlformats.org/presentationml/2006/main" xmlns:r="http://schemas.openxmlformats.org/officeDocument/2006/relationships">
+  <p:cSld>
+    <p:spTree>
+      <p:nvGrpSpPr>
+        <p:cNvPr id="1" name=""/>
+        <p:cNvGrpSpPr/>
+        <p:nvPr/>
+      </p:nvGrpSpPr>
+      <p:grpSpPr/>
+      <p:sp>
+        <p:nvSpPr>
+          <p:cNvPr id="2" name="Rectangle 1"/>
+          <p:cNvSpPr/>
+          <p:nvPr/>
+        </p:nvSpPr>
+        <p:spPr>
+          <a:xfrm>
+            <a:off x="0" y="0"/>
+            <a:ext cx="12191695" cy="6858000"/>
+          </a:xfrm>
+          <a:prstGeom prst="rect">
+            <a:avLst/>
+          </a:prstGeom>
+          <a:solidFill>
             <a:srgbClr val="0F172A"/>
           </a:solidFill>
           <a:ln>
@@ -7590,7 +9172,7 @@
               </a:defRPr>
             </a:pPr>
             <a:r>
-              <a:t>Safety-Critical AI requires architectural constraints, deterministic triage, and legal provenance.</a:t>
+              <a:t>Safety-critical AI requires architectural constraints, deterministic triage, and legal provenance.</a:t>
             </a:r>
           </a:p>
         </p:txBody>
@@ -7875,7 +9457,7 @@
               </a:defRPr>
             </a:pPr>
             <a:r>
-              <a:t>Passing Automated Unit Tests covering all safety layers</a:t>
+              <a:t>Passing Automated Unit Tests covering every safety layer</a:t>
             </a:r>
           </a:p>
         </p:txBody>
@@ -7973,7 +9555,7 @@
               </a:defRPr>
             </a:pPr>
             <a:r>
-              <a:t>HEALTH ASSISTANT · PROJECT EVALUATION</a:t>
+              <a:t>HEALTH ASSISTANT · DESIGN DOC &amp; FEASIBILITY</a:t>
             </a:r>
           </a:p>
         </p:txBody>
@@ -8008,7 +9590,7 @@
               </a:defRPr>
             </a:pPr>
             <a:r>
-              <a:t>The Critical Problem: Fluent Fabrication in Healthcare AI</a:t>
+              <a:t>The Problem: Why General-Purpose AI Fails in Healthcare</a:t>
             </a:r>
           </a:p>
         </p:txBody>
@@ -8293,7 +9875,7 @@
               </a:defRPr>
             </a:pPr>
             <a:r>
-              <a:t>General LLMs engage in conversational chit-chat ('I understand your chest hurts; have you tried resting?'). In acute crises (stroke, heart attack), every minute lost to AI generation can be fatal.</a:t>
+              <a:t>General LLMs engage in conversational chit-chat ('I understand your chest hurts; have you tried resting?'). In acute crises, every minute lost to AI generation can be fatal.</a:t>
             </a:r>
           </a:p>
         </p:txBody>
@@ -8391,7 +9973,7 @@
               </a:defRPr>
             </a:pPr>
             <a:r>
-              <a:t>HEALTH ASSISTANT · PROJECT EVALUATION</a:t>
+              <a:t>HEALTH ASSISTANT · DESIGN DOC &amp; FEASIBILITY</a:t>
             </a:r>
           </a:p>
         </p:txBody>
@@ -8904,7 +10486,7 @@
               </a:defRPr>
             </a:pPr>
             <a:r>
-              <a:t>HEALTH ASSISTANT · PROJECT EVALUATION</a:t>
+              <a:t>DESIGN DOCUMENT · REQUIREMENTS SPECIFICATION</a:t>
             </a:r>
           </a:p>
         </p:txBody>
@@ -8939,7 +10521,7 @@
               </a:defRPr>
             </a:pPr>
             <a:r>
-              <a:t>System Architecture: End-to-End Pipeline</a:t>
+              <a:t>Requirements Specification: Functional &amp; Non-Functional (SRS)</a:t>
             </a:r>
           </a:p>
         </p:txBody>
@@ -8952,8 +10534,163 @@
         </p:nvSpPr>
         <p:spPr>
           <a:xfrm>
-            <a:off x="731520" y="1645920"/>
-            <a:ext cx="1920240" cy="4389120"/>
+            <a:off x="731520" y="1463040"/>
+            <a:ext cx="5120640" cy="4572000"/>
+          </a:xfrm>
+          <a:prstGeom prst="roundRect">
+            <a:avLst/>
+          </a:prstGeom>
+          <a:solidFill>
+            <a:srgbClr val="FFFFFF"/>
+          </a:solidFill>
+          <a:ln w="19050">
+            <a:solidFill>
+              <a:srgbClr val="0284C7"/>
+            </a:solidFill>
+          </a:ln>
+        </p:spPr>
+        <p:style>
+          <a:lnRef idx="1">
+            <a:schemeClr val="accent1"/>
+          </a:lnRef>
+          <a:fillRef idx="3">
+            <a:schemeClr val="accent1"/>
+          </a:fillRef>
+          <a:effectRef idx="2">
+            <a:schemeClr val="accent1"/>
+          </a:effectRef>
+          <a:fontRef idx="minor">
+            <a:schemeClr val="lt1"/>
+          </a:fontRef>
+        </p:style>
+        <p:txBody>
+          <a:bodyPr rtlCol="0" anchor="ctr"/>
+          <a:lstStyle/>
+          <a:p>
+            <a:pPr algn="ctr"/>
+          </a:p>
+        </p:txBody>
+      </p:sp>
+      <p:sp>
+        <p:nvSpPr>
+          <p:cNvPr id="6" name="TextBox 5"/>
+          <p:cNvSpPr txBox="1"/>
+          <p:nvPr/>
+        </p:nvSpPr>
+        <p:spPr>
+          <a:xfrm>
+            <a:off x="914400" y="1645920"/>
+            <a:ext cx="4754880" cy="4114800"/>
+          </a:xfrm>
+          <a:prstGeom prst="rect">
+            <a:avLst/>
+          </a:prstGeom>
+          <a:noFill/>
+        </p:spPr>
+        <p:txBody>
+          <a:bodyPr wrap="square">
+            <a:spAutoFit/>
+          </a:bodyPr>
+          <a:lstStyle/>
+          <a:p>
+            <a:pPr>
+              <a:defRPr sz="1600" b="1">
+                <a:solidFill>
+                  <a:srgbClr val="0284C7"/>
+                </a:solidFill>
+              </a:defRPr>
+            </a:pPr>
+            <a:r>
+              <a:t>Functional Requirements (FRs)</a:t>
+            </a:r>
+          </a:p>
+          <a:p>
+            <a:pPr>
+              <a:spcBef>
+                <a:spcPts val="800"/>
+              </a:spcBef>
+              <a:defRPr sz="1150">
+                <a:solidFill>
+                  <a:srgbClr val="1E293B"/>
+                </a:solidFill>
+              </a:defRPr>
+            </a:pPr>
+            <a:r>
+              <a:t>• FR1 (Auth &amp; Identity): Authenticate users via Clerk JWKS RS256 JWT tokens; isolate user session histories.</a:t>
+            </a:r>
+          </a:p>
+          <a:p>
+            <a:pPr>
+              <a:spcBef>
+                <a:spcPts val="800"/>
+              </a:spcBef>
+              <a:defRPr sz="1150">
+                <a:solidFill>
+                  <a:srgbClr val="1E293B"/>
+                </a:solidFill>
+              </a:defRPr>
+            </a:pPr>
+            <a:r>
+              <a:t>• FR2 (Grounded Q&amp;A): Retrieve relevant clinical passages from WHO/NHS/NIH/CDC and synthesize extractive responses.</a:t>
+            </a:r>
+          </a:p>
+          <a:p>
+            <a:pPr>
+              <a:spcBef>
+                <a:spcPts val="800"/>
+              </a:spcBef>
+              <a:defRPr sz="1150">
+                <a:solidFill>
+                  <a:srgbClr val="1E293B"/>
+                </a:solidFill>
+              </a:defRPr>
+            </a:pPr>
+            <a:r>
+              <a:t>• FR3 (Dynamic Citation Engine): Generate inline bracketed citation chips linking to exact source paragraphs, licenses, and URLs.</a:t>
+            </a:r>
+          </a:p>
+          <a:p>
+            <a:pPr>
+              <a:spcBef>
+                <a:spcPts val="800"/>
+              </a:spcBef>
+              <a:defRPr sz="1150">
+                <a:solidFill>
+                  <a:srgbClr val="1E293B"/>
+                </a:solidFill>
+              </a:defRPr>
+            </a:pPr>
+            <a:r>
+              <a:t>• FR4 (Emergency Triage): Scan raw text for 9 critical red-flag categories and display emergency dispatch advice (112/108).</a:t>
+            </a:r>
+          </a:p>
+          <a:p>
+            <a:pPr>
+              <a:spcBef>
+                <a:spcPts val="800"/>
+              </a:spcBef>
+              <a:defRPr sz="1150">
+                <a:solidFill>
+                  <a:srgbClr val="1E293B"/>
+                </a:solidFill>
+              </a:defRPr>
+            </a:pPr>
+            <a:r>
+              <a:t>• FR5 (Session Management): Support session creation, conversation history retrieval, and user-initiated soft-deletion.</a:t>
+            </a:r>
+          </a:p>
+        </p:txBody>
+      </p:sp>
+      <p:sp>
+        <p:nvSpPr>
+          <p:cNvPr id="7" name="Rounded Rectangle 6"/>
+          <p:cNvSpPr/>
+          <p:nvPr/>
+        </p:nvSpPr>
+        <p:spPr>
+          <a:xfrm>
+            <a:off x="6217920" y="1463040"/>
+            <a:ext cx="5212080" cy="4572000"/>
           </a:xfrm>
           <a:prstGeom prst="roundRect">
             <a:avLst/>
@@ -8991,14 +10728,14 @@
       </p:sp>
       <p:sp>
         <p:nvSpPr>
-          <p:cNvPr id="6" name="TextBox 5"/>
+          <p:cNvPr id="8" name="TextBox 7"/>
           <p:cNvSpPr txBox="1"/>
           <p:nvPr/>
         </p:nvSpPr>
         <p:spPr>
           <a:xfrm>
-            <a:off x="868680" y="1828800"/>
-            <a:ext cx="1645920" cy="3931920"/>
+            <a:off x="6400800" y="1645920"/>
+            <a:ext cx="4846320" cy="4114800"/>
           </a:xfrm>
           <a:prstGeom prst="rect">
             <a:avLst/>
@@ -9012,449 +10749,89 @@
           <a:lstStyle/>
           <a:p>
             <a:pPr>
-              <a:defRPr sz="1300" b="1">
+              <a:defRPr sz="1600" b="1">
                 <a:solidFill>
                   <a:srgbClr val="0E7490"/>
                 </a:solidFill>
               </a:defRPr>
             </a:pPr>
             <a:r>
-              <a:t>Step 1: Auth &amp; Rate Limit</a:t>
+              <a:t>Non-Functional Requirements (NFRs)</a:t>
             </a:r>
           </a:p>
           <a:p>
             <a:pPr>
               <a:spcBef>
-                <a:spcPts val="1200"/>
+                <a:spcPts val="800"/>
               </a:spcBef>
-              <a:defRPr sz="1200">
+              <a:defRPr sz="1150">
                 <a:solidFill>
                   <a:srgbClr val="1E293B"/>
                 </a:solidFill>
               </a:defRPr>
             </a:pPr>
             <a:r>
-              <a:t>Clerk JWT (RS256 JWKS)</a:t>
-            </a:r>
-            <a:br/>
-            <a:r>
-              <a:t>Redis Lua Sliding Window</a:t>
-            </a:r>
-            <a:br/>
-            <a:r>
-              <a:t>10 req/min per user (Fails open)</a:t>
-            </a:r>
-          </a:p>
-        </p:txBody>
-      </p:sp>
-      <p:sp>
-        <p:nvSpPr>
-          <p:cNvPr id="7" name="Rounded Rectangle 6"/>
-          <p:cNvSpPr/>
-          <p:nvPr/>
-        </p:nvSpPr>
-        <p:spPr>
-          <a:xfrm>
-            <a:off x="2926080" y="1645920"/>
-            <a:ext cx="1920240" cy="4389120"/>
-          </a:xfrm>
-          <a:prstGeom prst="roundRect">
-            <a:avLst/>
-          </a:prstGeom>
-          <a:solidFill>
-            <a:srgbClr val="FFFFFF"/>
-          </a:solidFill>
-          <a:ln w="19050">
-            <a:solidFill>
-              <a:srgbClr val="0E7490"/>
-            </a:solidFill>
-          </a:ln>
-        </p:spPr>
-        <p:style>
-          <a:lnRef idx="1">
-            <a:schemeClr val="accent1"/>
-          </a:lnRef>
-          <a:fillRef idx="3">
-            <a:schemeClr val="accent1"/>
-          </a:fillRef>
-          <a:effectRef idx="2">
-            <a:schemeClr val="accent1"/>
-          </a:effectRef>
-          <a:fontRef idx="minor">
-            <a:schemeClr val="lt1"/>
-          </a:fontRef>
-        </p:style>
-        <p:txBody>
-          <a:bodyPr rtlCol="0" anchor="ctr"/>
-          <a:lstStyle/>
-          <a:p>
-            <a:pPr algn="ctr"/>
-          </a:p>
-        </p:txBody>
-      </p:sp>
-      <p:sp>
-        <p:nvSpPr>
-          <p:cNvPr id="8" name="TextBox 7"/>
-          <p:cNvSpPr txBox="1"/>
-          <p:nvPr/>
-        </p:nvSpPr>
-        <p:spPr>
-          <a:xfrm>
-            <a:off x="3063240" y="1828800"/>
-            <a:ext cx="1645920" cy="3931920"/>
-          </a:xfrm>
-          <a:prstGeom prst="rect">
-            <a:avLst/>
-          </a:prstGeom>
-          <a:noFill/>
-        </p:spPr>
-        <p:txBody>
-          <a:bodyPr wrap="square">
-            <a:spAutoFit/>
-          </a:bodyPr>
-          <a:lstStyle/>
-          <a:p>
-            <a:pPr>
-              <a:defRPr sz="1300" b="1">
-                <a:solidFill>
-                  <a:srgbClr val="0E7490"/>
-                </a:solidFill>
-              </a:defRPr>
-            </a:pPr>
-            <a:r>
-              <a:t>Step 2: Red-Flag Triage</a:t>
+              <a:t>• NFR1 (Performance/Latency): Red-flag triage under 20 ms HTTP; warm grounded generation p50 latency &lt; 2,500 ms.</a:t>
             </a:r>
           </a:p>
           <a:p>
             <a:pPr>
               <a:spcBef>
-                <a:spcPts val="1200"/>
+                <a:spcPts val="800"/>
               </a:spcBef>
-              <a:defRPr sz="1200">
+              <a:defRPr sz="1150">
                 <a:solidFill>
                   <a:srgbClr val="1E293B"/>
                 </a:solidFill>
               </a:defRPr>
             </a:pPr>
             <a:r>
-              <a:t>In-Process Regex (&lt; 1 ms)</a:t>
-            </a:r>
-            <a:br/>
-            <a:r>
-              <a:t>Emergency Match -&gt; Fixed 112/108</a:t>
-            </a:r>
-            <a:br/>
-            <a:r>
-              <a:t>(No Embedding, No LLM)</a:t>
-            </a:r>
-          </a:p>
-        </p:txBody>
-      </p:sp>
-      <p:sp>
-        <p:nvSpPr>
-          <p:cNvPr id="9" name="Rounded Rectangle 8"/>
-          <p:cNvSpPr/>
-          <p:nvPr/>
-        </p:nvSpPr>
-        <p:spPr>
-          <a:xfrm>
-            <a:off x="5120640" y="1645920"/>
-            <a:ext cx="1920240" cy="4389120"/>
-          </a:xfrm>
-          <a:prstGeom prst="roundRect">
-            <a:avLst/>
-          </a:prstGeom>
-          <a:solidFill>
-            <a:srgbClr val="FFFFFF"/>
-          </a:solidFill>
-          <a:ln w="19050">
-            <a:solidFill>
-              <a:srgbClr val="0E7490"/>
-            </a:solidFill>
-          </a:ln>
-        </p:spPr>
-        <p:style>
-          <a:lnRef idx="1">
-            <a:schemeClr val="accent1"/>
-          </a:lnRef>
-          <a:fillRef idx="3">
-            <a:schemeClr val="accent1"/>
-          </a:fillRef>
-          <a:effectRef idx="2">
-            <a:schemeClr val="accent1"/>
-          </a:effectRef>
-          <a:fontRef idx="minor">
-            <a:schemeClr val="lt1"/>
-          </a:fontRef>
-        </p:style>
-        <p:txBody>
-          <a:bodyPr rtlCol="0" anchor="ctr"/>
-          <a:lstStyle/>
-          <a:p>
-            <a:pPr algn="ctr"/>
-          </a:p>
-        </p:txBody>
-      </p:sp>
-      <p:sp>
-        <p:nvSpPr>
-          <p:cNvPr id="10" name="TextBox 9"/>
-          <p:cNvSpPr txBox="1"/>
-          <p:nvPr/>
-        </p:nvSpPr>
-        <p:spPr>
-          <a:xfrm>
-            <a:off x="5257800" y="1828800"/>
-            <a:ext cx="1645920" cy="3931920"/>
-          </a:xfrm>
-          <a:prstGeom prst="rect">
-            <a:avLst/>
-          </a:prstGeom>
-          <a:noFill/>
-        </p:spPr>
-        <p:txBody>
-          <a:bodyPr wrap="square">
-            <a:spAutoFit/>
-          </a:bodyPr>
-          <a:lstStyle/>
-          <a:p>
-            <a:pPr>
-              <a:defRPr sz="1300" b="1">
-                <a:solidFill>
-                  <a:srgbClr val="0E7490"/>
-                </a:solidFill>
-              </a:defRPr>
-            </a:pPr>
-            <a:r>
-              <a:t>Step 3: Vector Search</a:t>
+              <a:t>• NFR2 (Safety &amp; Precision): 0.0% false-hit rate on out-of-corpus queries; 100% mechanical citation validation against chunks.</a:t>
             </a:r>
           </a:p>
           <a:p>
             <a:pPr>
               <a:spcBef>
-                <a:spcPts val="1200"/>
+                <a:spcPts val="800"/>
               </a:spcBef>
-              <a:defRPr sz="1200">
+              <a:defRPr sz="1150">
                 <a:solidFill>
                   <a:srgbClr val="1E293B"/>
                 </a:solidFill>
               </a:defRPr>
             </a:pPr>
             <a:r>
-              <a:t>Gemini 768d Embeddings</a:t>
-            </a:r>
-            <a:br/>
-            <a:r>
-              <a:t>Postgres 16 + pgvector HNSW</a:t>
-            </a:r>
-            <a:br/>
-            <a:r>
-              <a:t>Cosine similarity floor &gt;= 0.65</a:t>
-            </a:r>
-          </a:p>
-        </p:txBody>
-      </p:sp>
-      <p:sp>
-        <p:nvSpPr>
-          <p:cNvPr id="11" name="Rounded Rectangle 10"/>
-          <p:cNvSpPr/>
-          <p:nvPr/>
-        </p:nvSpPr>
-        <p:spPr>
-          <a:xfrm>
-            <a:off x="7315200" y="1645920"/>
-            <a:ext cx="1920240" cy="4389120"/>
-          </a:xfrm>
-          <a:prstGeom prst="roundRect">
-            <a:avLst/>
-          </a:prstGeom>
-          <a:solidFill>
-            <a:srgbClr val="FFFFFF"/>
-          </a:solidFill>
-          <a:ln w="19050">
-            <a:solidFill>
-              <a:srgbClr val="0E7490"/>
-            </a:solidFill>
-          </a:ln>
-        </p:spPr>
-        <p:style>
-          <a:lnRef idx="1">
-            <a:schemeClr val="accent1"/>
-          </a:lnRef>
-          <a:fillRef idx="3">
-            <a:schemeClr val="accent1"/>
-          </a:fillRef>
-          <a:effectRef idx="2">
-            <a:schemeClr val="accent1"/>
-          </a:effectRef>
-          <a:fontRef idx="minor">
-            <a:schemeClr val="lt1"/>
-          </a:fontRef>
-        </p:style>
-        <p:txBody>
-          <a:bodyPr rtlCol="0" anchor="ctr"/>
-          <a:lstStyle/>
-          <a:p>
-            <a:pPr algn="ctr"/>
-          </a:p>
-        </p:txBody>
-      </p:sp>
-      <p:sp>
-        <p:nvSpPr>
-          <p:cNvPr id="12" name="TextBox 11"/>
-          <p:cNvSpPr txBox="1"/>
-          <p:nvPr/>
-        </p:nvSpPr>
-        <p:spPr>
-          <a:xfrm>
-            <a:off x="7452360" y="1828800"/>
-            <a:ext cx="1645920" cy="3931920"/>
-          </a:xfrm>
-          <a:prstGeom prst="rect">
-            <a:avLst/>
-          </a:prstGeom>
-          <a:noFill/>
-        </p:spPr>
-        <p:txBody>
-          <a:bodyPr wrap="square">
-            <a:spAutoFit/>
-          </a:bodyPr>
-          <a:lstStyle/>
-          <a:p>
-            <a:pPr>
-              <a:defRPr sz="1300" b="1">
-                <a:solidFill>
-                  <a:srgbClr val="0E7490"/>
-                </a:solidFill>
-              </a:defRPr>
-            </a:pPr>
-            <a:r>
-              <a:t>Step 4: Dual LLM Fallback</a:t>
+              <a:t>• NFR3 (Availability &amp; Fault Tolerance): Dual-provider failover (Groq ➔ Gemini) to guarantee 99.9% service uptime under quota exhaustion.</a:t>
             </a:r>
           </a:p>
           <a:p>
             <a:pPr>
               <a:spcBef>
-                <a:spcPts val="1200"/>
+                <a:spcPts val="800"/>
               </a:spcBef>
-              <a:defRPr sz="1200">
+              <a:defRPr sz="1150">
                 <a:solidFill>
                   <a:srgbClr val="1E293B"/>
                 </a:solidFill>
               </a:defRPr>
             </a:pPr>
             <a:r>
-              <a:t>Primary: Groq (Llama/GPT-OSS)</a:t>
-            </a:r>
-            <a:br/>
-            <a:r>
-              <a:t>Fallback: Gemini 2.5 Flash</a:t>
-            </a:r>
-            <a:br/>
-            <a:r>
-              <a:t>Zero broken streams on error</a:t>
-            </a:r>
-          </a:p>
-        </p:txBody>
-      </p:sp>
-      <p:sp>
-        <p:nvSpPr>
-          <p:cNvPr id="13" name="Rounded Rectangle 12"/>
-          <p:cNvSpPr/>
-          <p:nvPr/>
-        </p:nvSpPr>
-        <p:spPr>
-          <a:xfrm>
-            <a:off x="9509760" y="1645920"/>
-            <a:ext cx="1920240" cy="4389120"/>
-          </a:xfrm>
-          <a:prstGeom prst="roundRect">
-            <a:avLst/>
-          </a:prstGeom>
-          <a:solidFill>
-            <a:srgbClr val="FFFFFF"/>
-          </a:solidFill>
-          <a:ln w="19050">
-            <a:solidFill>
-              <a:srgbClr val="0E7490"/>
-            </a:solidFill>
-          </a:ln>
-        </p:spPr>
-        <p:style>
-          <a:lnRef idx="1">
-            <a:schemeClr val="accent1"/>
-          </a:lnRef>
-          <a:fillRef idx="3">
-            <a:schemeClr val="accent1"/>
-          </a:fillRef>
-          <a:effectRef idx="2">
-            <a:schemeClr val="accent1"/>
-          </a:effectRef>
-          <a:fontRef idx="minor">
-            <a:schemeClr val="lt1"/>
-          </a:fontRef>
-        </p:style>
-        <p:txBody>
-          <a:bodyPr rtlCol="0" anchor="ctr"/>
-          <a:lstStyle/>
-          <a:p>
-            <a:pPr algn="ctr"/>
-          </a:p>
-        </p:txBody>
-      </p:sp>
-      <p:sp>
-        <p:nvSpPr>
-          <p:cNvPr id="14" name="TextBox 13"/>
-          <p:cNvSpPr txBox="1"/>
-          <p:nvPr/>
-        </p:nvSpPr>
-        <p:spPr>
-          <a:xfrm>
-            <a:off x="9646920" y="1828800"/>
-            <a:ext cx="1645920" cy="3931920"/>
-          </a:xfrm>
-          <a:prstGeom prst="rect">
-            <a:avLst/>
-          </a:prstGeom>
-          <a:noFill/>
-        </p:spPr>
-        <p:txBody>
-          <a:bodyPr wrap="square">
-            <a:spAutoFit/>
-          </a:bodyPr>
-          <a:lstStyle/>
-          <a:p>
-            <a:pPr>
-              <a:defRPr sz="1300" b="1">
-                <a:solidFill>
-                  <a:srgbClr val="0E7490"/>
-                </a:solidFill>
-              </a:defRPr>
-            </a:pPr>
-            <a:r>
-              <a:t>Step 5: SSE Streaming UI</a:t>
+              <a:t>• NFR4 (Security &amp; Compliance): Stateless server verification; per-user rate limiting (10 req/min); no client-side secret exposure.</a:t>
             </a:r>
           </a:p>
           <a:p>
             <a:pPr>
               <a:spcBef>
-                <a:spcPts val="1200"/>
+                <a:spcPts val="800"/>
               </a:spcBef>
-              <a:defRPr sz="1200">
+              <a:defRPr sz="1150">
                 <a:solidFill>
                   <a:srgbClr val="1E293B"/>
                 </a:solidFill>
               </a:defRPr>
             </a:pPr>
             <a:r>
-              <a:t>React 18 + Vite + Tailwind</a:t>
-            </a:r>
-            <a:br/>
-            <a:r>
-              <a:t>Server-Sent Events streaming</a:t>
-            </a:r>
-            <a:br/>
-            <a:r>
-              <a:t>Interactive Citation Chips</a:t>
+              <a:t>• NFR5 (Maintainability): 100% automated test coverage across all critical paths (282 unit tests in &lt; 5 seconds).</a:t>
             </a:r>
           </a:p>
         </p:txBody>
@@ -9552,7 +10929,7 @@
               </a:defRPr>
             </a:pPr>
             <a:r>
-              <a:t>DATA ARCHITECTURE &amp; PERSISTENCE</a:t>
+              <a:t>FEASIBILITY STUDY · TELOS FRAMEWORK</a:t>
             </a:r>
           </a:p>
         </p:txBody>
@@ -9587,7 +10964,7 @@
               </a:defRPr>
             </a:pPr>
             <a:r>
-              <a:t>Database Design: Relational Schema &amp; pgvector HNSW Index</a:t>
+              <a:t>Feasibility Analysis (TELOS): Technical &amp; Economic Viability</a:t>
             </a:r>
           </a:p>
         </p:txBody>
@@ -9601,7 +10978,7 @@
         <p:spPr>
           <a:xfrm>
             <a:off x="731520" y="1463040"/>
-            <a:ext cx="5120640" cy="2468880"/>
+            <a:ext cx="5120640" cy="4572000"/>
           </a:xfrm>
           <a:prstGeom prst="roundRect">
             <a:avLst/>
@@ -9611,7 +10988,7 @@
           </a:solidFill>
           <a:ln w="19050">
             <a:solidFill>
-              <a:srgbClr val="0E7490"/>
+              <a:srgbClr val="0284C7"/>
             </a:solidFill>
           </a:ln>
         </p:spPr>
@@ -9645,8 +11022,8 @@
         </p:nvSpPr>
         <p:spPr>
           <a:xfrm>
-            <a:off x="914400" y="1600200"/>
-            <a:ext cx="4754880" cy="2194560"/>
+            <a:off x="914400" y="1645920"/>
+            <a:ext cx="4754880" cy="4114800"/>
           </a:xfrm>
           <a:prstGeom prst="rect">
             <a:avLst/>
@@ -9660,53 +11037,74 @@
           <a:lstStyle/>
           <a:p>
             <a:pPr>
-              <a:defRPr sz="1300" b="1">
-                <a:solidFill>
-                  <a:srgbClr val="0E7490"/>
-                </a:solidFill>
-              </a:defRPr>
-            </a:pPr>
-            <a:r>
-              <a:t>documents (Corpus Metadata)</a:t>
+              <a:defRPr sz="1600" b="1">
+                <a:solidFill>
+                  <a:srgbClr val="0284C7"/>
+                </a:solidFill>
+              </a:defRPr>
+            </a:pPr>
+            <a:r>
+              <a:t>1. Technical Feasibility (T)</a:t>
             </a:r>
           </a:p>
           <a:p>
             <a:pPr>
               <a:spcBef>
-                <a:spcPts val="400"/>
+                <a:spcPts val="800"/>
               </a:spcBef>
-              <a:defRPr sz="1050">
+              <a:defRPr sz="1150">
                 <a:solidFill>
                   <a:srgbClr val="1E293B"/>
                 </a:solidFill>
               </a:defRPr>
             </a:pPr>
             <a:r>
-              <a:t>• id: UUID (Primary Key)</a:t>
-            </a:r>
-            <a:br/>
-            <a:r>
-              <a:t>• title: Text (Published article title)</a:t>
-            </a:r>
-            <a:br/>
-            <a:r>
-              <a:t>• source_url: Text (Original reference link)</a:t>
-            </a:r>
-            <a:br/>
-            <a:r>
-              <a:t>• source_org: Text (WHO | NHS | NIH | CDC)</a:t>
-            </a:r>
-            <a:br/>
-            <a:r>
-              <a:t>• license: Text (OGL-v3 | CC BY-NC-SA | Public)</a:t>
-            </a:r>
-            <a:br/>
-            <a:r>
-              <a:t>• content_hash: String(64) UNIQUE (SHA-256 for idempotent re-ingestion)</a:t>
-            </a:r>
-            <a:br/>
-            <a:r>
-              <a:t>• ingested_at: DateTime(timezone=True)</a:t>
+              <a:t>• Proven Vector Infrastructure: PostgreSQL 16 + pgvector HNSW indexing executes approximate nearest-neighbor search in under 50 ms with negligible RAM overhead.</a:t>
+            </a:r>
+          </a:p>
+          <a:p>
+            <a:pPr>
+              <a:spcBef>
+                <a:spcPts val="800"/>
+              </a:spcBef>
+              <a:defRPr sz="1150">
+                <a:solidFill>
+                  <a:srgbClr val="1E293B"/>
+                </a:solidFill>
+              </a:defRPr>
+            </a:pPr>
+            <a:r>
+              <a:t>• High-Speed LPU Inference: Groq LPU engine delivers ~1,800 ms generation times; Google Gemini Matryoshka embeddings (768d) maintain high recall.</a:t>
+            </a:r>
+          </a:p>
+          <a:p>
+            <a:pPr>
+              <a:spcBef>
+                <a:spcPts val="800"/>
+              </a:spcBef>
+              <a:defRPr sz="1150">
+                <a:solidFill>
+                  <a:srgbClr val="1E293B"/>
+                </a:solidFill>
+              </a:defRPr>
+            </a:pPr>
+            <a:r>
+              <a:t>• Seamless Streaming Architecture: FastAPI asynchronous coroutines and React fetch ReadableStream deliver real-time token rendering without WebSocket overhead.</a:t>
+            </a:r>
+          </a:p>
+          <a:p>
+            <a:pPr>
+              <a:spcBef>
+                <a:spcPts val="800"/>
+              </a:spcBef>
+              <a:defRPr sz="1150">
+                <a:solidFill>
+                  <a:srgbClr val="1E293B"/>
+                </a:solidFill>
+              </a:defRPr>
+            </a:pPr>
+            <a:r>
+              <a:t>• Empirical Proof of Concept: All 282 automated unit tests pass in 4.46 seconds, proving technical viability across all subsystems.</a:t>
             </a:r>
           </a:p>
         </p:txBody>
@@ -9720,7 +11118,7 @@
         <p:spPr>
           <a:xfrm>
             <a:off x="6217920" y="1463040"/>
-            <a:ext cx="5212080" cy="2468880"/>
+            <a:ext cx="5212080" cy="4572000"/>
           </a:xfrm>
           <a:prstGeom prst="roundRect">
             <a:avLst/>
@@ -9730,7 +11128,7 @@
           </a:solidFill>
           <a:ln w="19050">
             <a:solidFill>
-              <a:srgbClr val="0E7490"/>
+              <a:srgbClr val="10B981"/>
             </a:solidFill>
           </a:ln>
         </p:spPr>
@@ -9764,8 +11162,8 @@
         </p:nvSpPr>
         <p:spPr>
           <a:xfrm>
-            <a:off x="6400800" y="1600200"/>
-            <a:ext cx="4846320" cy="2194560"/>
+            <a:off x="6400800" y="1645920"/>
+            <a:ext cx="4846320" cy="4114800"/>
           </a:xfrm>
           <a:prstGeom prst="rect">
             <a:avLst/>
@@ -9779,283 +11177,83 @@
           <a:lstStyle/>
           <a:p>
             <a:pPr>
-              <a:defRPr sz="1300" b="1">
-                <a:solidFill>
-                  <a:srgbClr val="0E7490"/>
-                </a:solidFill>
-              </a:defRPr>
-            </a:pPr>
-            <a:r>
-              <a:t>chunks (Vector Store)</a:t>
+              <a:defRPr sz="1600" b="1">
+                <a:solidFill>
+                  <a:srgbClr val="10B981"/>
+                </a:solidFill>
+              </a:defRPr>
+            </a:pPr>
+            <a:r>
+              <a:t>2. Economic / Financial Feasibility (E)</a:t>
             </a:r>
           </a:p>
           <a:p>
             <a:pPr>
               <a:spcBef>
-                <a:spcPts val="400"/>
+                <a:spcPts val="800"/>
               </a:spcBef>
-              <a:defRPr sz="1050">
+              <a:defRPr sz="1150">
                 <a:solidFill>
                   <a:srgbClr val="1E293B"/>
                 </a:solidFill>
               </a:defRPr>
             </a:pPr>
             <a:r>
-              <a:t>• id: UUID (Primary Key)</a:t>
+              <a:t>• Zero-Cost Development &amp; Staging: $0.00 / month operating budget using modern developer tiers:</a:t>
             </a:r>
             <a:br/>
             <a:r>
-              <a:t>• document_id: UUID (FK -&gt; documents.id CASCADE)</a:t>
+              <a:t>  • Local Docker / Render Free Tier ($0)</a:t>
             </a:r>
             <a:br/>
             <a:r>
-              <a:t>• content: Text (Semantic chunk passage)</a:t>
+              <a:t>  • Vercel Frontend Hosting ($0)</a:t>
             </a:r>
             <a:br/>
             <a:r>
-              <a:t>• embedding: Vector(768) (Gemini 768-dim vector)</a:t>
+              <a:t>  • Neon Serverless Postgres + Upstash Redis ($0)</a:t>
             </a:r>
             <a:br/>
             <a:r>
-              <a:t>• chunk_index: Integer (0-based chunk order)</a:t>
+              <a:t>  • Groq (8,000 TPM) &amp; Gemini Free Tiers ($0)</a:t>
+            </a:r>
+          </a:p>
+          <a:p>
+            <a:pPr>
+              <a:spcBef>
+                <a:spcPts val="800"/>
+              </a:spcBef>
+              <a:defRPr sz="1150">
+                <a:solidFill>
+                  <a:srgbClr val="1E293B"/>
+                </a:solidFill>
+              </a:defRPr>
+            </a:pPr>
+            <a:r>
+              <a:t>• Dramatic Cost Reduction vs Proprietary APIs:</a:t>
             </a:r>
             <a:br/>
             <a:r>
-              <a:t>• token_count: Integer (~300 to ~650 tokens)</a:t>
+              <a:t>  • Proprietary GPT-4 RAG: ~$30.00 – $50.00 per 1,000 queries.</a:t>
             </a:r>
             <a:br/>
             <a:r>
-              <a:t>★ INDEX: HNSW on embedding (vector_cosine_ops, m=16, ef_construction=64)</a:t>
-            </a:r>
-          </a:p>
-        </p:txBody>
-      </p:sp>
-      <p:sp>
-        <p:nvSpPr>
-          <p:cNvPr id="9" name="Rounded Rectangle 8"/>
-          <p:cNvSpPr/>
-          <p:nvPr/>
-        </p:nvSpPr>
-        <p:spPr>
-          <a:xfrm>
-            <a:off x="731520" y="4114800"/>
-            <a:ext cx="5120640" cy="2011680"/>
-          </a:xfrm>
-          <a:prstGeom prst="roundRect">
-            <a:avLst/>
-          </a:prstGeom>
-          <a:solidFill>
-            <a:srgbClr val="FFFFFF"/>
-          </a:solidFill>
-          <a:ln w="19050">
-            <a:solidFill>
-              <a:srgbClr val="0E7490"/>
-            </a:solidFill>
-          </a:ln>
-        </p:spPr>
-        <p:style>
-          <a:lnRef idx="1">
-            <a:schemeClr val="accent1"/>
-          </a:lnRef>
-          <a:fillRef idx="3">
-            <a:schemeClr val="accent1"/>
-          </a:fillRef>
-          <a:effectRef idx="2">
-            <a:schemeClr val="accent1"/>
-          </a:effectRef>
-          <a:fontRef idx="minor">
-            <a:schemeClr val="lt1"/>
-          </a:fontRef>
-        </p:style>
-        <p:txBody>
-          <a:bodyPr rtlCol="0" anchor="ctr"/>
-          <a:lstStyle/>
-          <a:p>
-            <a:pPr algn="ctr"/>
-          </a:p>
-        </p:txBody>
-      </p:sp>
-      <p:sp>
-        <p:nvSpPr>
-          <p:cNvPr id="10" name="TextBox 9"/>
-          <p:cNvSpPr txBox="1"/>
-          <p:nvPr/>
-        </p:nvSpPr>
-        <p:spPr>
-          <a:xfrm>
-            <a:off x="914400" y="4251960"/>
-            <a:ext cx="4754880" cy="1737360"/>
-          </a:xfrm>
-          <a:prstGeom prst="rect">
-            <a:avLst/>
-          </a:prstGeom>
-          <a:noFill/>
-        </p:spPr>
-        <p:txBody>
-          <a:bodyPr wrap="square">
-            <a:spAutoFit/>
-          </a:bodyPr>
-          <a:lstStyle/>
-          <a:p>
-            <a:pPr>
-              <a:defRPr sz="1300" b="1">
-                <a:solidFill>
-                  <a:srgbClr val="0E7490"/>
-                </a:solidFill>
-              </a:defRPr>
-            </a:pPr>
-            <a:r>
-              <a:t>sessions (User Chat Context)</a:t>
+              <a:t>  • Our Architecture: $0.00 for development; &lt; $0.002 per query at commercial scale via open-weights LPUs.</a:t>
             </a:r>
           </a:p>
           <a:p>
             <a:pPr>
               <a:spcBef>
-                <a:spcPts val="400"/>
+                <a:spcPts val="800"/>
               </a:spcBef>
-              <a:defRPr sz="1050">
+              <a:defRPr sz="1150">
                 <a:solidFill>
                   <a:srgbClr val="1E293B"/>
                 </a:solidFill>
               </a:defRPr>
             </a:pPr>
             <a:r>
-              <a:t>• id: UUID (Primary Key)</a:t>
-            </a:r>
-            <a:br/>
-            <a:r>
-              <a:t>• clerk_user_id: Text (Indexed, user scope)</a:t>
-            </a:r>
-            <a:br/>
-            <a:r>
-              <a:t>• title: Text (Auto-generated from query)</a:t>
-            </a:r>
-            <a:br/>
-            <a:r>
-              <a:t>• deleted_at: DateTime (Nullable, soft delete)</a:t>
-            </a:r>
-            <a:br/>
-            <a:r>
-              <a:t>• created_at: DateTime(timezone=True)</a:t>
-            </a:r>
-          </a:p>
-        </p:txBody>
-      </p:sp>
-      <p:sp>
-        <p:nvSpPr>
-          <p:cNvPr id="11" name="Rounded Rectangle 10"/>
-          <p:cNvSpPr/>
-          <p:nvPr/>
-        </p:nvSpPr>
-        <p:spPr>
-          <a:xfrm>
-            <a:off x="6217920" y="4114800"/>
-            <a:ext cx="5212080" cy="2011680"/>
-          </a:xfrm>
-          <a:prstGeom prst="roundRect">
-            <a:avLst/>
-          </a:prstGeom>
-          <a:solidFill>
-            <a:srgbClr val="FFFFFF"/>
-          </a:solidFill>
-          <a:ln w="19050">
-            <a:solidFill>
-              <a:srgbClr val="0E7490"/>
-            </a:solidFill>
-          </a:ln>
-        </p:spPr>
-        <p:style>
-          <a:lnRef idx="1">
-            <a:schemeClr val="accent1"/>
-          </a:lnRef>
-          <a:fillRef idx="3">
-            <a:schemeClr val="accent1"/>
-          </a:fillRef>
-          <a:effectRef idx="2">
-            <a:schemeClr val="accent1"/>
-          </a:effectRef>
-          <a:fontRef idx="minor">
-            <a:schemeClr val="lt1"/>
-          </a:fontRef>
-        </p:style>
-        <p:txBody>
-          <a:bodyPr rtlCol="0" anchor="ctr"/>
-          <a:lstStyle/>
-          <a:p>
-            <a:pPr algn="ctr"/>
-          </a:p>
-        </p:txBody>
-      </p:sp>
-      <p:sp>
-        <p:nvSpPr>
-          <p:cNvPr id="12" name="TextBox 11"/>
-          <p:cNvSpPr txBox="1"/>
-          <p:nvPr/>
-        </p:nvSpPr>
-        <p:spPr>
-          <a:xfrm>
-            <a:off x="6400800" y="4251960"/>
-            <a:ext cx="4846320" cy="1737360"/>
-          </a:xfrm>
-          <a:prstGeom prst="rect">
-            <a:avLst/>
-          </a:prstGeom>
-          <a:noFill/>
-        </p:spPr>
-        <p:txBody>
-          <a:bodyPr wrap="square">
-            <a:spAutoFit/>
-          </a:bodyPr>
-          <a:lstStyle/>
-          <a:p>
-            <a:pPr>
-              <a:defRPr sz="1300" b="1">
-                <a:solidFill>
-                  <a:srgbClr val="0E7490"/>
-                </a:solidFill>
-              </a:defRPr>
-            </a:pPr>
-            <a:r>
-              <a:t>messages (Audit Trail &amp; Tracking)</a:t>
-            </a:r>
-          </a:p>
-          <a:p>
-            <a:pPr>
-              <a:spcBef>
-                <a:spcPts val="400"/>
-              </a:spcBef>
-              <a:defRPr sz="1050">
-                <a:solidFill>
-                  <a:srgbClr val="1E293B"/>
-                </a:solidFill>
-              </a:defRPr>
-            </a:pPr>
-            <a:r>
-              <a:t>• id: UUID (Primary Key)</a:t>
-            </a:r>
-            <a:br/>
-            <a:r>
-              <a:t>• session_id: UUID (FK -&gt; sessions.id CASCADE)</a:t>
-            </a:r>
-            <a:br/>
-            <a:r>
-              <a:t>• role: Text ('user' | 'assistant')</a:t>
-            </a:r>
-            <a:br/>
-            <a:r>
-              <a:t>• content: Text (Message body or response)</a:t>
-            </a:r>
-            <a:br/>
-            <a:r>
-              <a:t>• retrieved_chunk_ids: UUID[] (Audit trail)</a:t>
-            </a:r>
-            <a:br/>
-            <a:r>
-              <a:t>• llm_provider: Text ('groq' | 'gemini')</a:t>
-            </a:r>
-            <a:br/>
-            <a:r>
-              <a:t>• latency_ms: Integer | was_red_flag: Boolean</a:t>
+              <a:t>• Financial Conclusion: Highly feasible for academic research, public health deployment, and resource-constrained clinics.</a:t>
             </a:r>
           </a:p>
         </p:txBody>
@@ -10153,7 +11351,7 @@
               </a:defRPr>
             </a:pPr>
             <a:r>
-              <a:t>FASTAPI SERVICE INTERFACE</a:t>
+              <a:t>FEASIBILITY STUDY · TELOS FRAMEWORK</a:t>
             </a:r>
           </a:p>
         </p:txBody>
@@ -10188,7 +11386,7 @@
               </a:defRPr>
             </a:pPr>
             <a:r>
-              <a:t>API Architecture: REST &amp; Server-Sent Events (SSE) Endpoints</a:t>
+              <a:t>Feasibility Analysis (TELOS): Legal, Operational &amp; Schedule</a:t>
             </a:r>
           </a:p>
         </p:txBody>
@@ -10202,7 +11400,7 @@
         <p:spPr>
           <a:xfrm>
             <a:off x="731520" y="1463040"/>
-            <a:ext cx="10698480" cy="2926080"/>
+            <a:ext cx="3383280" cy="4572000"/>
           </a:xfrm>
           <a:prstGeom prst="roundRect">
             <a:avLst/>
@@ -10212,7 +11410,7 @@
           </a:solidFill>
           <a:ln w="19050">
             <a:solidFill>
-              <a:srgbClr val="E2E8F0"/>
+              <a:srgbClr val="E11D48"/>
             </a:solidFill>
           </a:ln>
         </p:spPr>
@@ -10246,8 +11444,8 @@
         </p:nvSpPr>
         <p:spPr>
           <a:xfrm>
-            <a:off x="914400" y="1554480"/>
-            <a:ext cx="10332720" cy="2743200"/>
+            <a:off x="914400" y="1645920"/>
+            <a:ext cx="3017520" cy="4114800"/>
           </a:xfrm>
           <a:prstGeom prst="rect">
             <a:avLst/>
@@ -10261,176 +11459,37 @@
           <a:lstStyle/>
           <a:p>
             <a:pPr>
-              <a:defRPr sz="1300" b="1">
-                <a:solidFill>
-                  <a:srgbClr val="0284C7"/>
-                </a:solidFill>
-              </a:defRPr>
-            </a:pPr>
-            <a:r>
-              <a:t>CORE API SPECIFICATION</a:t>
+              <a:defRPr sz="1500" b="1">
+                <a:solidFill>
+                  <a:srgbClr val="E11D48"/>
+                </a:solidFill>
+              </a:defRPr>
+            </a:pPr>
+            <a:r>
+              <a:t>3. Legal &amp; Regulatory (L)</a:t>
             </a:r>
           </a:p>
           <a:p>
             <a:pPr>
               <a:spcBef>
-                <a:spcPts val="400"/>
+                <a:spcPts val="1000"/>
               </a:spcBef>
-              <a:defRPr sz="1100" b="1">
+              <a:defRPr sz="1100">
                 <a:solidFill>
                   <a:srgbClr val="1E293B"/>
                 </a:solidFill>
               </a:defRPr>
             </a:pPr>
             <a:r>
-              <a:t>• POST /api/chat/stream  [Bearer &lt;JWT&gt;]</a:t>
-            </a:r>
-          </a:p>
-          <a:p>
-            <a:pPr>
-              <a:defRPr sz="1000">
-                <a:solidFill>
-                  <a:srgbClr val="64748B"/>
-                </a:solidFill>
-              </a:defRPr>
-            </a:pPr>
-            <a:r>
-              <a:t>   Payload: {session_id, content}  ➔  SSE stream with event types: token, citation, escalation, done</a:t>
-            </a:r>
-          </a:p>
-          <a:p>
-            <a:pPr>
-              <a:spcBef>
-                <a:spcPts val="400"/>
-              </a:spcBef>
-              <a:defRPr sz="1100" b="1">
-                <a:solidFill>
-                  <a:srgbClr val="1E293B"/>
-                </a:solidFill>
-              </a:defRPr>
-            </a:pPr>
-            <a:r>
-              <a:t>• GET  /api/sessions  [Bearer &lt;JWT&gt;]</a:t>
-            </a:r>
-          </a:p>
-          <a:p>
-            <a:pPr>
-              <a:defRPr sz="1000">
-                <a:solidFill>
-                  <a:srgbClr val="64748B"/>
-                </a:solidFill>
-              </a:defRPr>
-            </a:pPr>
-            <a:r>
-              <a:t>   Payload: None  ➔  Returns 200 OK with list of active user chat sessions [SessionOut]</a:t>
-            </a:r>
-          </a:p>
-          <a:p>
-            <a:pPr>
-              <a:spcBef>
-                <a:spcPts val="400"/>
-              </a:spcBef>
-              <a:defRPr sz="1100" b="1">
-                <a:solidFill>
-                  <a:srgbClr val="1E293B"/>
-                </a:solidFill>
-              </a:defRPr>
-            </a:pPr>
-            <a:r>
-              <a:t>• GET  /api/sessions/{id}/messages  [Bearer &lt;JWT&gt;]</a:t>
-            </a:r>
-          </a:p>
-          <a:p>
-            <a:pPr>
-              <a:defRPr sz="1000">
-                <a:solidFill>
-                  <a:srgbClr val="64748B"/>
-                </a:solidFill>
-              </a:defRPr>
-            </a:pPr>
-            <a:r>
-              <a:t>   Payload: session_id  ➔  Returns 200 OK with full conversation history &amp; citation IDs [MessageOut]</a:t>
-            </a:r>
-          </a:p>
-          <a:p>
-            <a:pPr>
-              <a:spcBef>
-                <a:spcPts val="400"/>
-              </a:spcBef>
-              <a:defRPr sz="1100" b="1">
-                <a:solidFill>
-                  <a:srgbClr val="1E293B"/>
-                </a:solidFill>
-              </a:defRPr>
-            </a:pPr>
-            <a:r>
-              <a:t>• DELETE /api/sessions/{id}  [Bearer &lt;JWT&gt;]</a:t>
-            </a:r>
-          </a:p>
-          <a:p>
-            <a:pPr>
-              <a:defRPr sz="1000">
-                <a:solidFill>
-                  <a:srgbClr val="64748B"/>
-                </a:solidFill>
-              </a:defRPr>
-            </a:pPr>
-            <a:r>
-              <a:t>   Payload: session_id  ➔  Soft-deletes session (sets deleted_at); returns 204 No Content</a:t>
-            </a:r>
-          </a:p>
-          <a:p>
-            <a:pPr>
-              <a:spcBef>
-                <a:spcPts val="400"/>
-              </a:spcBef>
-              <a:defRPr sz="1100" b="1">
-                <a:solidFill>
-                  <a:srgbClr val="1E293B"/>
-                </a:solidFill>
-              </a:defRPr>
-            </a:pPr>
-            <a:r>
-              <a:t>• GET  /api/me  [Bearer &lt;JWT&gt;]</a:t>
-            </a:r>
-          </a:p>
-          <a:p>
-            <a:pPr>
-              <a:defRPr sz="1000">
-                <a:solidFill>
-                  <a:srgbClr val="64748B"/>
-                </a:solidFill>
-              </a:defRPr>
-            </a:pPr>
-            <a:r>
-              <a:t>   Payload: None  ➔  Returns 200 OK with authenticated Clerk user ID &amp; email (401 if missing/invalid)</a:t>
-            </a:r>
-          </a:p>
-          <a:p>
-            <a:pPr>
-              <a:spcBef>
-                <a:spcPts val="400"/>
-              </a:spcBef>
-              <a:defRPr sz="1100" b="1">
-                <a:solidFill>
-                  <a:srgbClr val="1E293B"/>
-                </a:solidFill>
-              </a:defRPr>
-            </a:pPr>
-            <a:r>
-              <a:t>• GET  /health  [Public]</a:t>
-            </a:r>
-          </a:p>
-          <a:p>
-            <a:pPr>
-              <a:defRPr sz="1000">
-                <a:solidFill>
-                  <a:srgbClr val="64748B"/>
-                </a:solidFill>
-              </a:defRPr>
-            </a:pPr>
-            <a:r>
-              <a:t>   Payload: None  ➔  Returns 200 OK: {status, database: {reachable, pgvector}, redis: {reachable}}</a:t>
+              <a:t>• Not a Medical Device: Complies with CDSCO (India) and FDA SaMD guidelines by strictly framing the tool as informational. It refuses diagnostic assessment, prescribing, or drug dosage recommendations.</a:t>
+            </a:r>
+            <a:br/>
+            <a:r>
+              <a:t>• Data Privacy (DPDP Act 2023 &amp; GDPR): Collects zero Patient Health Information (PHI). Users do not upload medical scans or identity documents. User sessions support complete soft-deletion.</a:t>
+            </a:r>
+            <a:br/>
+            <a:r>
+              <a:t>• Copyright Compliance: Strict attribution adhering to WHO CC BY-NC-SA 3.0, UK OGL v3.0, and US Public Domain licenses.</a:t>
             </a:r>
           </a:p>
         </p:txBody>
@@ -10443,8 +11502,8 @@
         </p:nvSpPr>
         <p:spPr>
           <a:xfrm>
-            <a:off x="731520" y="4572000"/>
-            <a:ext cx="5120640" cy="1737360"/>
+            <a:off x="4389120" y="1463040"/>
+            <a:ext cx="3383280" cy="4572000"/>
           </a:xfrm>
           <a:prstGeom prst="roundRect">
             <a:avLst/>
@@ -10488,8 +11547,8 @@
         </p:nvSpPr>
         <p:spPr>
           <a:xfrm>
-            <a:off x="914400" y="4663440"/>
-            <a:ext cx="4754880" cy="1554480"/>
+            <a:off x="4572000" y="1645920"/>
+            <a:ext cx="3017520" cy="4114800"/>
           </a:xfrm>
           <a:prstGeom prst="rect">
             <a:avLst/>
@@ -10503,20 +11562,20 @@
           <a:lstStyle/>
           <a:p>
             <a:pPr>
-              <a:defRPr sz="1300" b="1">
+              <a:defRPr sz="1500" b="1">
                 <a:solidFill>
                   <a:srgbClr val="0E7490"/>
                 </a:solidFill>
               </a:defRPr>
             </a:pPr>
             <a:r>
-              <a:t>Security &amp; Middleware Layer</a:t>
+              <a:t>4. Operational Feasibility (O)</a:t>
             </a:r>
           </a:p>
           <a:p>
             <a:pPr>
               <a:spcBef>
-                <a:spcPts val="400"/>
+                <a:spcPts val="1000"/>
               </a:spcBef>
               <a:defRPr sz="1100">
                 <a:solidFill>
@@ -10525,15 +11584,15 @@
               </a:defRPr>
             </a:pPr>
             <a:r>
-              <a:t>• RequestContextMiddleware: Injects unique X-Request-ID across all logs.</a:t>
+              <a:t>• Zero Medical Literacy Required: Designed for laypersons using natural, conversational language on mobile and desktop.</a:t>
             </a:r>
             <a:br/>
             <a:r>
-              <a:t>• Clerk JWKS Authenticator: Validates RS256 JWT tokens cryptographically.</a:t>
+              <a:t>• Human-in-the-Loop Paradigm: Does not replace doctors; works as an informational guide and signposts users to 112/108 or hospital clinics.</a:t>
             </a:r>
             <a:br/>
             <a:r>
-              <a:t>• Redis Sliding Window: Enforces 10 req/min rate limit per user.</a:t>
+              <a:t>• Operational Resilience: Rate limiting prevents abuse; automatic provider fallback prevents downtime.</a:t>
             </a:r>
           </a:p>
         </p:txBody>
@@ -10546,8 +11605,8 @@
         </p:nvSpPr>
         <p:spPr>
           <a:xfrm>
-            <a:off x="6217920" y="4572000"/>
-            <a:ext cx="5212080" cy="1737360"/>
+            <a:off x="8046720" y="1463040"/>
+            <a:ext cx="3383280" cy="4572000"/>
           </a:xfrm>
           <a:prstGeom prst="roundRect">
             <a:avLst/>
@@ -10591,8 +11650,8 @@
         </p:nvSpPr>
         <p:spPr>
           <a:xfrm>
-            <a:off x="6400800" y="4663440"/>
-            <a:ext cx="4846320" cy="1554480"/>
+            <a:off x="8229600" y="1645920"/>
+            <a:ext cx="3017520" cy="4114800"/>
           </a:xfrm>
           <a:prstGeom prst="rect">
             <a:avLst/>
@@ -10606,20 +11665,20 @@
           <a:lstStyle/>
           <a:p>
             <a:pPr>
-              <a:defRPr sz="1300" b="1">
+              <a:defRPr sz="1500" b="1">
                 <a:solidFill>
                   <a:srgbClr val="0284C7"/>
                 </a:solidFill>
               </a:defRPr>
             </a:pPr>
             <a:r>
-              <a:t>SSE Streaming Protocol (ReadableStream)</a:t>
+              <a:t>5. Schedule Feasibility (S)</a:t>
             </a:r>
           </a:p>
           <a:p>
             <a:pPr>
               <a:spcBef>
-                <a:spcPts val="400"/>
+                <a:spcPts val="1000"/>
               </a:spcBef>
               <a:defRPr sz="1100">
                 <a:solidFill>
@@ -10628,15 +11687,27 @@
               </a:defRPr>
             </a:pPr>
             <a:r>
-              <a:t>• Uses fetch + ReadableStream instead of native EventSource to support Authorization headers.</a:t>
+              <a:t>• Phase 1 (26 Sep 2026 - Today):</a:t>
             </a:r>
             <a:br/>
             <a:r>
-              <a:t>• Dispatches real-time structured JSON chunks to React frontend.</a:t>
+              <a:t>  Design Document Preparation, Feasibility Study, and Architecture Specification [COMPLETED].</a:t>
             </a:r>
             <a:br/>
             <a:r>
-              <a:t>• Automatically cleans up DB sessions and logs response latency.</a:t>
+              <a:t>• Phase 2 (31 Oct 2026):</a:t>
+            </a:r>
+            <a:br/>
+            <a:r>
+              <a:t>  Prototype Validation, Clinical Retrieval Benchmark Suite, and Fallback Stress-Testing [ON TRACK].</a:t>
+            </a:r>
+            <a:br/>
+            <a:r>
+              <a:t>• Phase 3 (01 Dec 2026):</a:t>
+            </a:r>
+            <a:br/>
+            <a:r>
+              <a:t>  Final Production Deployment, User Study &amp; Evaluation Defense [SCHEDULED].</a:t>
             </a:r>
           </a:p>
         </p:txBody>
@@ -10734,7 +11805,7 @@
               </a:defRPr>
             </a:pPr>
             <a:r>
-              <a:t>HEALTH ASSISTANT · PROJECT EVALUATION</a:t>
+              <a:t>HEALTH ASSISTANT · DESIGN DOC &amp; FEASIBILITY</a:t>
             </a:r>
           </a:p>
         </p:txBody>
@@ -10769,7 +11840,7 @@
               </a:defRPr>
             </a:pPr>
             <a:r>
-              <a:t>The Medical Reference Corpus: Quality Over Unvetted Breadth</a:t>
+              <a:t>System Architecture: End-to-End Pipeline Data Flow</a:t>
             </a:r>
           </a:p>
         </p:txBody>
@@ -10782,8 +11853,8 @@
         </p:nvSpPr>
         <p:spPr>
           <a:xfrm>
-            <a:off x="731520" y="1463040"/>
-            <a:ext cx="5120640" cy="4572000"/>
+            <a:off x="731520" y="1645920"/>
+            <a:ext cx="1920240" cy="4389120"/>
           </a:xfrm>
           <a:prstGeom prst="roundRect">
             <a:avLst/>
@@ -10793,7 +11864,7 @@
           </a:solidFill>
           <a:ln w="19050">
             <a:solidFill>
-              <a:srgbClr val="E2E8F0"/>
+              <a:srgbClr val="0E7490"/>
             </a:solidFill>
           </a:ln>
         </p:spPr>
@@ -10827,8 +11898,8 @@
         </p:nvSpPr>
         <p:spPr>
           <a:xfrm>
-            <a:off x="914400" y="1645920"/>
-            <a:ext cx="4754880" cy="4114800"/>
+            <a:off x="868680" y="1828800"/>
+            <a:ext cx="1645920" cy="3931920"/>
           </a:xfrm>
           <a:prstGeom prst="rect">
             <a:avLst/>
@@ -10842,20 +11913,20 @@
           <a:lstStyle/>
           <a:p>
             <a:pPr>
-              <a:defRPr sz="1600" b="1">
-                <a:solidFill>
-                  <a:srgbClr val="0284C7"/>
-                </a:solidFill>
-              </a:defRPr>
-            </a:pPr>
-            <a:r>
-              <a:t>Curated &amp; License-Checked Repository</a:t>
+              <a:defRPr sz="1300" b="1">
+                <a:solidFill>
+                  <a:srgbClr val="0E7490"/>
+                </a:solidFill>
+              </a:defRPr>
+            </a:pPr>
+            <a:r>
+              <a:t>Step 1: Auth &amp; Rate Limit</a:t>
             </a:r>
           </a:p>
           <a:p>
             <a:pPr>
               <a:spcBef>
-                <a:spcPts val="1000"/>
+                <a:spcPts val="1200"/>
               </a:spcBef>
               <a:defRPr sz="1200">
                 <a:solidFill>
@@ -10864,64 +11935,15 @@
               </a:defRPr>
             </a:pPr>
             <a:r>
-              <a:t>• 42+ Vetted Source Documents: Covering infectious diseases (dengue, malaria, TB), chronic conditions (diabetes, hypertension, asthma), everyday symptoms, and prevention.</a:t>
-            </a:r>
-          </a:p>
-          <a:p>
-            <a:pPr>
-              <a:spcBef>
-                <a:spcPts val="1000"/>
-              </a:spcBef>
-              <a:defRPr sz="1200">
-                <a:solidFill>
-                  <a:srgbClr val="1E293B"/>
-                </a:solidFill>
-              </a:defRPr>
-            </a:pPr>
-            <a:r>
-              <a:t>• Strict Licensing Compliance: Every source explicitly mapped in corpus_manifest.json:</a:t>
+              <a:t>Clerk JWT (RS256 JWKS)</a:t>
             </a:r>
             <a:br/>
             <a:r>
-              <a:t>  • WHO: CC BY-NC-SA 3.0 IGO</a:t>
+              <a:t>Redis Lua Sliding Window</a:t>
             </a:r>
             <a:br/>
             <a:r>
-              <a:t>  • UK NHS: Open Government Licence (OGL v3.0)</a:t>
-            </a:r>
-            <a:br/>
-            <a:r>
-              <a:t>  • US NIH / CDC: US Federal Public Domain</a:t>
-            </a:r>
-          </a:p>
-          <a:p>
-            <a:pPr>
-              <a:spcBef>
-                <a:spcPts val="1000"/>
-              </a:spcBef>
-              <a:defRPr sz="1200">
-                <a:solidFill>
-                  <a:srgbClr val="1E293B"/>
-                </a:solidFill>
-              </a:defRPr>
-            </a:pPr>
-            <a:r>
-              <a:t>• Deterministic Extraction: Handled via PyMuPDF and Trafilatura, stripping boilerplate, headers, and footers.</a:t>
-            </a:r>
-          </a:p>
-          <a:p>
-            <a:pPr>
-              <a:spcBef>
-                <a:spcPts val="1000"/>
-              </a:spcBef>
-              <a:defRPr sz="1200">
-                <a:solidFill>
-                  <a:srgbClr val="1E293B"/>
-                </a:solidFill>
-              </a:defRPr>
-            </a:pPr>
-            <a:r>
-              <a:t>• Semantic Chunking: 153 chunks bounded between ~300 to ~650 tokens to ensure clinical coherence.</a:t>
+              <a:t>10 req/min per user (Fails open)</a:t>
             </a:r>
           </a:p>
         </p:txBody>
@@ -10934,8 +11956,8 @@
         </p:nvSpPr>
         <p:spPr>
           <a:xfrm>
-            <a:off x="6217920" y="1463040"/>
-            <a:ext cx="5212080" cy="4572000"/>
+            <a:off x="2926080" y="1645920"/>
+            <a:ext cx="1920240" cy="4389120"/>
           </a:xfrm>
           <a:prstGeom prst="roundRect">
             <a:avLst/>
@@ -10945,7 +11967,7 @@
           </a:solidFill>
           <a:ln w="19050">
             <a:solidFill>
-              <a:srgbClr val="E2E8F0"/>
+              <a:srgbClr val="0E7490"/>
             </a:solidFill>
           </a:ln>
         </p:spPr>
@@ -10979,8 +12001,8 @@
         </p:nvSpPr>
         <p:spPr>
           <a:xfrm>
-            <a:off x="6400800" y="1645920"/>
-            <a:ext cx="4846320" cy="4114800"/>
+            <a:off x="3063240" y="1828800"/>
+            <a:ext cx="1645920" cy="3931920"/>
           </a:xfrm>
           <a:prstGeom prst="rect">
             <a:avLst/>
@@ -10994,20 +12016,20 @@
           <a:lstStyle/>
           <a:p>
             <a:pPr>
-              <a:defRPr sz="1600" b="1">
+              <a:defRPr sz="1300" b="1">
                 <a:solidFill>
                   <a:srgbClr val="0E7490"/>
                 </a:solidFill>
               </a:defRPr>
             </a:pPr>
             <a:r>
-              <a:t>High Priority for Indian Healthcare</a:t>
+              <a:t>Step 2: Red-Flag Triage</a:t>
             </a:r>
           </a:p>
           <a:p>
             <a:pPr>
               <a:spcBef>
-                <a:spcPts val="1000"/>
+                <a:spcPts val="1200"/>
               </a:spcBef>
               <a:defRPr sz="1200">
                 <a:solidFill>
@@ -11016,13 +12038,101 @@
               </a:defRPr>
             </a:pPr>
             <a:r>
-              <a:t>• High-Relevance Infectious Disease Focus: Extensive coverage for Dengue, Malaria, Tuberculosis, Typhoid, and Diarrhoeal diseases.</a:t>
+              <a:t>In-Process Regex (&lt; 1 ms)</a:t>
+            </a:r>
+            <a:br/>
+            <a:r>
+              <a:t>Emergency Match -&gt; Fixed 112/108</a:t>
+            </a:r>
+            <a:br/>
+            <a:r>
+              <a:t>(No Embedding, No LLM)</a:t>
+            </a:r>
+          </a:p>
+        </p:txBody>
+      </p:sp>
+      <p:sp>
+        <p:nvSpPr>
+          <p:cNvPr id="9" name="Rounded Rectangle 8"/>
+          <p:cNvSpPr/>
+          <p:nvPr/>
+        </p:nvSpPr>
+        <p:spPr>
+          <a:xfrm>
+            <a:off x="5120640" y="1645920"/>
+            <a:ext cx="1920240" cy="4389120"/>
+          </a:xfrm>
+          <a:prstGeom prst="roundRect">
+            <a:avLst/>
+          </a:prstGeom>
+          <a:solidFill>
+            <a:srgbClr val="FFFFFF"/>
+          </a:solidFill>
+          <a:ln w="19050">
+            <a:solidFill>
+              <a:srgbClr val="0E7490"/>
+            </a:solidFill>
+          </a:ln>
+        </p:spPr>
+        <p:style>
+          <a:lnRef idx="1">
+            <a:schemeClr val="accent1"/>
+          </a:lnRef>
+          <a:fillRef idx="3">
+            <a:schemeClr val="accent1"/>
+          </a:fillRef>
+          <a:effectRef idx="2">
+            <a:schemeClr val="accent1"/>
+          </a:effectRef>
+          <a:fontRef idx="minor">
+            <a:schemeClr val="lt1"/>
+          </a:fontRef>
+        </p:style>
+        <p:txBody>
+          <a:bodyPr rtlCol="0" anchor="ctr"/>
+          <a:lstStyle/>
+          <a:p>
+            <a:pPr algn="ctr"/>
+          </a:p>
+        </p:txBody>
+      </p:sp>
+      <p:sp>
+        <p:nvSpPr>
+          <p:cNvPr id="10" name="TextBox 9"/>
+          <p:cNvSpPr txBox="1"/>
+          <p:nvPr/>
+        </p:nvSpPr>
+        <p:spPr>
+          <a:xfrm>
+            <a:off x="5257800" y="1828800"/>
+            <a:ext cx="1645920" cy="3931920"/>
+          </a:xfrm>
+          <a:prstGeom prst="rect">
+            <a:avLst/>
+          </a:prstGeom>
+          <a:noFill/>
+        </p:spPr>
+        <p:txBody>
+          <a:bodyPr wrap="square">
+            <a:spAutoFit/>
+          </a:bodyPr>
+          <a:lstStyle/>
+          <a:p>
+            <a:pPr>
+              <a:defRPr sz="1300" b="1">
+                <a:solidFill>
+                  <a:srgbClr val="0E7490"/>
+                </a:solidFill>
+              </a:defRPr>
+            </a:pPr>
+            <a:r>
+              <a:t>Step 3: Vector Search</a:t>
             </a:r>
           </a:p>
           <a:p>
             <a:pPr>
               <a:spcBef>
-                <a:spcPts val="1000"/>
+                <a:spcPts val="1200"/>
               </a:spcBef>
               <a:defRPr sz="1200">
                 <a:solidFill>
@@ -11031,13 +12141,101 @@
               </a:defRPr>
             </a:pPr>
             <a:r>
-              <a:t>• Everyday Family Symptoms: High fever in adults &amp; children, cough, dehydration, vomiting, paediatric skin rashes.</a:t>
+              <a:t>Gemini 768d Embeddings</a:t>
+            </a:r>
+            <a:br/>
+            <a:r>
+              <a:t>Postgres 16 + pgvector HNSW</a:t>
+            </a:r>
+            <a:br/>
+            <a:r>
+              <a:t>Cosine similarity floor &gt;= 0.65</a:t>
+            </a:r>
+          </a:p>
+        </p:txBody>
+      </p:sp>
+      <p:sp>
+        <p:nvSpPr>
+          <p:cNvPr id="11" name="Rounded Rectangle 10"/>
+          <p:cNvSpPr/>
+          <p:nvPr/>
+        </p:nvSpPr>
+        <p:spPr>
+          <a:xfrm>
+            <a:off x="7315200" y="1645920"/>
+            <a:ext cx="1920240" cy="4389120"/>
+          </a:xfrm>
+          <a:prstGeom prst="roundRect">
+            <a:avLst/>
+          </a:prstGeom>
+          <a:solidFill>
+            <a:srgbClr val="FFFFFF"/>
+          </a:solidFill>
+          <a:ln w="19050">
+            <a:solidFill>
+              <a:srgbClr val="0E7490"/>
+            </a:solidFill>
+          </a:ln>
+        </p:spPr>
+        <p:style>
+          <a:lnRef idx="1">
+            <a:schemeClr val="accent1"/>
+          </a:lnRef>
+          <a:fillRef idx="3">
+            <a:schemeClr val="accent1"/>
+          </a:fillRef>
+          <a:effectRef idx="2">
+            <a:schemeClr val="accent1"/>
+          </a:effectRef>
+          <a:fontRef idx="minor">
+            <a:schemeClr val="lt1"/>
+          </a:fontRef>
+        </p:style>
+        <p:txBody>
+          <a:bodyPr rtlCol="0" anchor="ctr"/>
+          <a:lstStyle/>
+          <a:p>
+            <a:pPr algn="ctr"/>
+          </a:p>
+        </p:txBody>
+      </p:sp>
+      <p:sp>
+        <p:nvSpPr>
+          <p:cNvPr id="12" name="TextBox 11"/>
+          <p:cNvSpPr txBox="1"/>
+          <p:nvPr/>
+        </p:nvSpPr>
+        <p:spPr>
+          <a:xfrm>
+            <a:off x="7452360" y="1828800"/>
+            <a:ext cx="1645920" cy="3931920"/>
+          </a:xfrm>
+          <a:prstGeom prst="rect">
+            <a:avLst/>
+          </a:prstGeom>
+          <a:noFill/>
+        </p:spPr>
+        <p:txBody>
+          <a:bodyPr wrap="square">
+            <a:spAutoFit/>
+          </a:bodyPr>
+          <a:lstStyle/>
+          <a:p>
+            <a:pPr>
+              <a:defRPr sz="1300" b="1">
+                <a:solidFill>
+                  <a:srgbClr val="0E7490"/>
+                </a:solidFill>
+              </a:defRPr>
+            </a:pPr>
+            <a:r>
+              <a:t>Step 4: Dual LLM Fallback</a:t>
             </a:r>
           </a:p>
           <a:p>
             <a:pPr>
               <a:spcBef>
-                <a:spcPts val="1000"/>
+                <a:spcPts val="1200"/>
               </a:spcBef>
               <a:defRPr sz="1200">
                 <a:solidFill>
@@ -11046,13 +12244,101 @@
               </a:defRPr>
             </a:pPr>
             <a:r>
-              <a:t>• Deliberate Frozen Corpus: Frozen snapshot prevents silent data corruption or unvetted web drift. If a condition isn't verified, it safely refuses.</a:t>
+              <a:t>Primary: Groq (Llama/GPT-OSS)</a:t>
+            </a:r>
+            <a:br/>
+            <a:r>
+              <a:t>Fallback: Gemini 2.5 Flash</a:t>
+            </a:r>
+            <a:br/>
+            <a:r>
+              <a:t>Zero broken streams on error</a:t>
+            </a:r>
+          </a:p>
+        </p:txBody>
+      </p:sp>
+      <p:sp>
+        <p:nvSpPr>
+          <p:cNvPr id="13" name="Rounded Rectangle 12"/>
+          <p:cNvSpPr/>
+          <p:nvPr/>
+        </p:nvSpPr>
+        <p:spPr>
+          <a:xfrm>
+            <a:off x="9509760" y="1645920"/>
+            <a:ext cx="1920240" cy="4389120"/>
+          </a:xfrm>
+          <a:prstGeom prst="roundRect">
+            <a:avLst/>
+          </a:prstGeom>
+          <a:solidFill>
+            <a:srgbClr val="FFFFFF"/>
+          </a:solidFill>
+          <a:ln w="19050">
+            <a:solidFill>
+              <a:srgbClr val="0E7490"/>
+            </a:solidFill>
+          </a:ln>
+        </p:spPr>
+        <p:style>
+          <a:lnRef idx="1">
+            <a:schemeClr val="accent1"/>
+          </a:lnRef>
+          <a:fillRef idx="3">
+            <a:schemeClr val="accent1"/>
+          </a:fillRef>
+          <a:effectRef idx="2">
+            <a:schemeClr val="accent1"/>
+          </a:effectRef>
+          <a:fontRef idx="minor">
+            <a:schemeClr val="lt1"/>
+          </a:fontRef>
+        </p:style>
+        <p:txBody>
+          <a:bodyPr rtlCol="0" anchor="ctr"/>
+          <a:lstStyle/>
+          <a:p>
+            <a:pPr algn="ctr"/>
+          </a:p>
+        </p:txBody>
+      </p:sp>
+      <p:sp>
+        <p:nvSpPr>
+          <p:cNvPr id="14" name="TextBox 13"/>
+          <p:cNvSpPr txBox="1"/>
+          <p:nvPr/>
+        </p:nvSpPr>
+        <p:spPr>
+          <a:xfrm>
+            <a:off x="9646920" y="1828800"/>
+            <a:ext cx="1645920" cy="3931920"/>
+          </a:xfrm>
+          <a:prstGeom prst="rect">
+            <a:avLst/>
+          </a:prstGeom>
+          <a:noFill/>
+        </p:spPr>
+        <p:txBody>
+          <a:bodyPr wrap="square">
+            <a:spAutoFit/>
+          </a:bodyPr>
+          <a:lstStyle/>
+          <a:p>
+            <a:pPr>
+              <a:defRPr sz="1300" b="1">
+                <a:solidFill>
+                  <a:srgbClr val="0E7490"/>
+                </a:solidFill>
+              </a:defRPr>
+            </a:pPr>
+            <a:r>
+              <a:t>Step 5: SSE Streaming UI</a:t>
             </a:r>
           </a:p>
           <a:p>
             <a:pPr>
               <a:spcBef>
-                <a:spcPts val="1000"/>
+                <a:spcPts val="1200"/>
               </a:spcBef>
               <a:defRPr sz="1200">
                 <a:solidFill>
@@ -11061,7 +12347,15 @@
               </a:defRPr>
             </a:pPr>
             <a:r>
-              <a:t>• Auditable Citations: Every answer references the exact source document title, URL, and medical authority.</a:t>
+              <a:t>React 18 + Vite + Tailwind</a:t>
+            </a:r>
+            <a:br/>
+            <a:r>
+              <a:t>Server-Sent Events streaming</a:t>
+            </a:r>
+            <a:br/>
+            <a:r>
+              <a:t>Interactive Citation Chips</a:t>
             </a:r>
           </a:p>
         </p:txBody>
@@ -11159,7 +12453,7 @@
               </a:defRPr>
             </a:pPr>
             <a:r>
-              <a:t>CRITICAL SAFETY ARCHITECTURE</a:t>
+              <a:t>DATA ARCHITECTURE &amp; PERSISTENCE</a:t>
             </a:r>
           </a:p>
         </p:txBody>
@@ -11194,7 +12488,7 @@
               </a:defRPr>
             </a:pPr>
             <a:r>
-              <a:t>Safety Engineering: Deterministic Emergency Short-Circuit</a:t>
+              <a:t>Database Design: Relational Schema &amp; pgvector HNSW Index</a:t>
             </a:r>
           </a:p>
         </p:txBody>
@@ -11208,17 +12502,17 @@
         <p:spPr>
           <a:xfrm>
             <a:off x="731520" y="1463040"/>
-            <a:ext cx="10698480" cy="1463040"/>
+            <a:ext cx="5120640" cy="2468880"/>
           </a:xfrm>
           <a:prstGeom prst="roundRect">
             <a:avLst/>
           </a:prstGeom>
           <a:solidFill>
-            <a:srgbClr val="FFF1F2"/>
+            <a:srgbClr val="FFFFFF"/>
           </a:solidFill>
           <a:ln w="19050">
             <a:solidFill>
-              <a:srgbClr val="E11D48"/>
+              <a:srgbClr val="0E7490"/>
             </a:solidFill>
           </a:ln>
         </p:spPr>
@@ -11252,8 +12546,8 @@
         </p:nvSpPr>
         <p:spPr>
           <a:xfrm>
-            <a:off x="914400" y="1554480"/>
-            <a:ext cx="10332720" cy="1280160"/>
+            <a:off x="914400" y="1600200"/>
+            <a:ext cx="4754880" cy="2194560"/>
           </a:xfrm>
           <a:prstGeom prst="rect">
             <a:avLst/>
@@ -11267,14 +12561,14 @@
           <a:lstStyle/>
           <a:p>
             <a:pPr>
-              <a:defRPr sz="1200" b="1">
-                <a:solidFill>
-                  <a:srgbClr val="E11D48"/>
-                </a:solidFill>
-              </a:defRPr>
-            </a:pPr>
-            <a:r>
-              <a:t>PERFORMANCE ASYMMETRY: EMERGENCY TRIAGE vs GENERATION</a:t>
+              <a:defRPr sz="1300" b="1">
+                <a:solidFill>
+                  <a:srgbClr val="0E7490"/>
+                </a:solidFill>
+              </a:defRPr>
+            </a:pPr>
+            <a:r>
+              <a:t>documents (Corpus Metadata)</a:t>
             </a:r>
           </a:p>
           <a:p>
@@ -11282,29 +12576,38 @@
               <a:spcBef>
                 <a:spcPts val="400"/>
               </a:spcBef>
-              <a:defRPr sz="2000" b="1">
+              <a:defRPr sz="1050">
                 <a:solidFill>
                   <a:srgbClr val="1E293B"/>
                 </a:solidFill>
               </a:defRPr>
             </a:pPr>
             <a:r>
-              <a:t>Red-Flag Matcher: &lt; 1 ms in-process (~20 ms HTTP)   vs   LLM Generation: ~2,512 ms</a:t>
-            </a:r>
-          </a:p>
-          <a:p>
-            <a:pPr>
-              <a:spcBef>
-                <a:spcPts val="400"/>
-              </a:spcBef>
-              <a:defRPr sz="1200">
-                <a:solidFill>
-                  <a:srgbClr val="64748B"/>
-                </a:solidFill>
-              </a:defRPr>
-            </a:pPr>
-            <a:r>
-              <a:t>Short-circuits immediately before embedding, retrieval, and LLM generation. Eliminates latency and non-deterministic risks.</a:t>
+              <a:t>• id: UUID (Primary Key)</a:t>
+            </a:r>
+            <a:br/>
+            <a:r>
+              <a:t>• title: Text (Published article title)</a:t>
+            </a:r>
+            <a:br/>
+            <a:r>
+              <a:t>• source_url: Text (Original reference link)</a:t>
+            </a:r>
+            <a:br/>
+            <a:r>
+              <a:t>• source_org: Text (WHO | NHS | NIH | CDC)</a:t>
+            </a:r>
+            <a:br/>
+            <a:r>
+              <a:t>• license: Text (OGL-v3 | CC BY-NC-SA | Public)</a:t>
+            </a:r>
+            <a:br/>
+            <a:r>
+              <a:t>• content_hash: String(64) UNIQUE (SHA-256 for idempotent re-ingestion)</a:t>
+            </a:r>
+            <a:br/>
+            <a:r>
+              <a:t>• ingested_at: DateTime(timezone=True)</a:t>
             </a:r>
           </a:p>
         </p:txBody>
@@ -11317,8 +12620,8 @@
         </p:nvSpPr>
         <p:spPr>
           <a:xfrm>
-            <a:off x="731520" y="3200400"/>
-            <a:ext cx="5120640" cy="2926080"/>
+            <a:off x="6217920" y="1463040"/>
+            <a:ext cx="5212080" cy="2468880"/>
           </a:xfrm>
           <a:prstGeom prst="roundRect">
             <a:avLst/>
@@ -11328,7 +12631,7 @@
           </a:solidFill>
           <a:ln w="19050">
             <a:solidFill>
-              <a:srgbClr val="E2E8F0"/>
+              <a:srgbClr val="0E7490"/>
             </a:solidFill>
           </a:ln>
         </p:spPr>
@@ -11362,8 +12665,8 @@
         </p:nvSpPr>
         <p:spPr>
           <a:xfrm>
-            <a:off x="914400" y="3291840"/>
-            <a:ext cx="4754880" cy="2743200"/>
+            <a:off x="6400800" y="1600200"/>
+            <a:ext cx="4846320" cy="2194560"/>
           </a:xfrm>
           <a:prstGeom prst="rect">
             <a:avLst/>
@@ -11377,61 +12680,53 @@
           <a:lstStyle/>
           <a:p>
             <a:pPr>
-              <a:defRPr sz="1500" b="1">
+              <a:defRPr sz="1300" b="1">
+                <a:solidFill>
+                  <a:srgbClr val="0E7490"/>
+                </a:solidFill>
+              </a:defRPr>
+            </a:pPr>
+            <a:r>
+              <a:t>chunks (Vector Store)</a:t>
+            </a:r>
+          </a:p>
+          <a:p>
+            <a:pPr>
+              <a:spcBef>
+                <a:spcPts val="400"/>
+              </a:spcBef>
+              <a:defRPr sz="1050">
                 <a:solidFill>
                   <a:srgbClr val="1E293B"/>
                 </a:solidFill>
               </a:defRPr>
             </a:pPr>
             <a:r>
-              <a:t>9 Critical Emergency Categories</a:t>
-            </a:r>
-          </a:p>
-          <a:p>
-            <a:pPr>
-              <a:spcBef>
-                <a:spcPts val="600"/>
-              </a:spcBef>
-              <a:defRPr sz="1100">
-                <a:solidFill>
-                  <a:srgbClr val="1E293B"/>
-                </a:solidFill>
-              </a:defRPr>
-            </a:pPr>
-            <a:r>
-              <a:t>1. Cardiac (crushing chest pain, arm radiation)</a:t>
+              <a:t>• id: UUID (Primary Key)</a:t>
             </a:r>
             <a:br/>
             <a:r>
-              <a:t>2. Breathing Distress (choking, severe asthma)</a:t>
+              <a:t>• document_id: UUID (FK -&gt; documents.id CASCADE)</a:t>
             </a:r>
             <a:br/>
             <a:r>
-              <a:t>3. Stroke Signs (BE-FAST: facial droop, arm weakness)</a:t>
+              <a:t>• content: Text (Semantic chunk passage)</a:t>
             </a:r>
             <a:br/>
             <a:r>
-              <a:t>4. Uncontrolled Severe Bleeding</a:t>
+              <a:t>• embedding: Vector(768) (Gemini 768-dim vector)</a:t>
             </a:r>
             <a:br/>
             <a:r>
-              <a:t>5. Acute Head Injury with altered mental state</a:t>
+              <a:t>• chunk_index: Integer (0-based chunk order)</a:t>
             </a:r>
             <a:br/>
             <a:r>
-              <a:t>6. Loss of Consciousness / Unresponsiveness</a:t>
+              <a:t>• token_count: Integer (~300 to ~650 tokens)</a:t>
             </a:r>
             <a:br/>
             <a:r>
-              <a:t>7. Anaphylaxis (throat swelling, severe allergy)</a:t>
-            </a:r>
-            <a:br/>
-            <a:r>
-              <a:t>8. Seizures / Convulsions</a:t>
-            </a:r>
-            <a:br/>
-            <a:r>
-              <a:t>9. Mental Health Crisis / Self-Harm</a:t>
+              <a:t>★ INDEX: HNSW on embedding (vector_cosine_ops, m=16, ef_construction=64)</a:t>
             </a:r>
           </a:p>
         </p:txBody>
@@ -11444,8 +12739,8 @@
         </p:nvSpPr>
         <p:spPr>
           <a:xfrm>
-            <a:off x="6217920" y="3200400"/>
-            <a:ext cx="5212080" cy="2926080"/>
+            <a:off x="731520" y="4114800"/>
+            <a:ext cx="5120640" cy="2011680"/>
           </a:xfrm>
           <a:prstGeom prst="roundRect">
             <a:avLst/>
@@ -11455,7 +12750,7 @@
           </a:solidFill>
           <a:ln w="19050">
             <a:solidFill>
-              <a:srgbClr val="E2E8F0"/>
+              <a:srgbClr val="0E7490"/>
             </a:solidFill>
           </a:ln>
         </p:spPr>
@@ -11489,8 +12784,8 @@
         </p:nvSpPr>
         <p:spPr>
           <a:xfrm>
-            <a:off x="6400800" y="3291840"/>
-            <a:ext cx="4846320" cy="2743200"/>
+            <a:off x="914400" y="4251960"/>
+            <a:ext cx="4754880" cy="1737360"/>
           </a:xfrm>
           <a:prstGeom prst="rect">
             <a:avLst/>
@@ -11504,50 +12799,164 @@
           <a:lstStyle/>
           <a:p>
             <a:pPr>
-              <a:defRPr sz="1500" b="1">
-                <a:solidFill>
-                  <a:srgbClr val="E11D48"/>
-                </a:solidFill>
-              </a:defRPr>
-            </a:pPr>
-            <a:r>
-              <a:t>Emergency Helplines &amp; Asymmetric Cost</a:t>
+              <a:defRPr sz="1300" b="1">
+                <a:solidFill>
+                  <a:srgbClr val="0E7490"/>
+                </a:solidFill>
+              </a:defRPr>
+            </a:pPr>
+            <a:r>
+              <a:t>sessions (User Chat Context)</a:t>
             </a:r>
           </a:p>
           <a:p>
             <a:pPr>
               <a:spcBef>
-                <a:spcPts val="600"/>
+                <a:spcPts val="400"/>
               </a:spcBef>
-              <a:defRPr sz="1100">
+              <a:defRPr sz="1050">
                 <a:solidFill>
                   <a:srgbClr val="1E293B"/>
                 </a:solidFill>
               </a:defRPr>
             </a:pPr>
             <a:r>
-              <a:t>Integrated Indian Emergency Services:</a:t>
+              <a:t>• id: UUID (Primary Key)</a:t>
             </a:r>
             <a:br/>
             <a:r>
-              <a:t>  • 112: All-in-One National Emergency Helpline</a:t>
+              <a:t>• clerk_user_id: Text (Indexed, user scope)</a:t>
             </a:r>
             <a:br/>
             <a:r>
-              <a:t>  • 108: Emergency Ambulance Response</a:t>
+              <a:t>• title: Text (Auto-generated from query)</a:t>
             </a:r>
             <a:br/>
             <a:r>
-              <a:t>  • 14416: Tele-MANAS (Mental Health Helpline)</a:t>
+              <a:t>• deleted_at: DateTime (Nullable, soft delete)</a:t>
             </a:r>
             <a:br/>
+            <a:r>
+              <a:t>• created_at: DateTime(timezone=True)</a:t>
+            </a:r>
+          </a:p>
+        </p:txBody>
+      </p:sp>
+      <p:sp>
+        <p:nvSpPr>
+          <p:cNvPr id="11" name="Rounded Rectangle 10"/>
+          <p:cNvSpPr/>
+          <p:nvPr/>
+        </p:nvSpPr>
+        <p:spPr>
+          <a:xfrm>
+            <a:off x="6217920" y="4114800"/>
+            <a:ext cx="5212080" cy="2011680"/>
+          </a:xfrm>
+          <a:prstGeom prst="roundRect">
+            <a:avLst/>
+          </a:prstGeom>
+          <a:solidFill>
+            <a:srgbClr val="FFFFFF"/>
+          </a:solidFill>
+          <a:ln w="19050">
+            <a:solidFill>
+              <a:srgbClr val="0E7490"/>
+            </a:solidFill>
+          </a:ln>
+        </p:spPr>
+        <p:style>
+          <a:lnRef idx="1">
+            <a:schemeClr val="accent1"/>
+          </a:lnRef>
+          <a:fillRef idx="3">
+            <a:schemeClr val="accent1"/>
+          </a:fillRef>
+          <a:effectRef idx="2">
+            <a:schemeClr val="accent1"/>
+          </a:effectRef>
+          <a:fontRef idx="minor">
+            <a:schemeClr val="lt1"/>
+          </a:fontRef>
+        </p:style>
+        <p:txBody>
+          <a:bodyPr rtlCol="0" anchor="ctr"/>
+          <a:lstStyle/>
+          <a:p>
+            <a:pPr algn="ctr"/>
+          </a:p>
+        </p:txBody>
+      </p:sp>
+      <p:sp>
+        <p:nvSpPr>
+          <p:cNvPr id="12" name="TextBox 11"/>
+          <p:cNvSpPr txBox="1"/>
+          <p:nvPr/>
+        </p:nvSpPr>
+        <p:spPr>
+          <a:xfrm>
+            <a:off x="6400800" y="4251960"/>
+            <a:ext cx="4846320" cy="1737360"/>
+          </a:xfrm>
+          <a:prstGeom prst="rect">
+            <a:avLst/>
+          </a:prstGeom>
+          <a:noFill/>
+        </p:spPr>
+        <p:txBody>
+          <a:bodyPr wrap="square">
+            <a:spAutoFit/>
+          </a:bodyPr>
+          <a:lstStyle/>
+          <a:p>
+            <a:pPr>
+              <a:defRPr sz="1300" b="1">
+                <a:solidFill>
+                  <a:srgbClr val="0E7490"/>
+                </a:solidFill>
+              </a:defRPr>
+            </a:pPr>
+            <a:r>
+              <a:t>messages (Audit Trail &amp; Tracking)</a:t>
+            </a:r>
+          </a:p>
+          <a:p>
+            <a:pPr>
+              <a:spcBef>
+                <a:spcPts val="400"/>
+              </a:spcBef>
+              <a:defRPr sz="1050">
+                <a:solidFill>
+                  <a:srgbClr val="1E293B"/>
+                </a:solidFill>
+              </a:defRPr>
+            </a:pPr>
+            <a:r>
+              <a:t>• id: UUID (Primary Key)</a:t>
+            </a:r>
             <a:br/>
             <a:r>
-              <a:t>The 'Cost Asymmetry' Rule:</a:t>
+              <a:t>• session_id: UUID (FK -&gt; sessions.id CASCADE)</a:t>
             </a:r>
             <a:br/>
             <a:r>
-              <a:t>If a user says 'I know it's just acid reflux, but my chest feels tight', the system still escalates. An unnecessary emergency checkup is an annoyance; a missed heart attack is fatal.</a:t>
+              <a:t>• role: Text ('user' | 'assistant')</a:t>
+            </a:r>
+            <a:br/>
+            <a:r>
+              <a:t>• content: Text (Message body or response)</a:t>
+            </a:r>
+            <a:br/>
+            <a:r>
+              <a:t>• retrieved_chunk_ids: UUID[] (Audit trail)</a:t>
+            </a:r>
+            <a:br/>
+            <a:r>
+              <a:t>• llm_provider: Text ('groq' | 'gemini')</a:t>
+            </a:r>
+            <a:br/>
+            <a:r>
+              <a:t>• latency_ms: Integer | was_red_flag: Boolean</a:t>
             </a:r>
           </a:p>
         </p:txBody>
@@ -11645,7 +13054,7 @@
               </a:defRPr>
             </a:pPr>
             <a:r>
-              <a:t>HEALTH ASSISTANT · PROJECT EVALUATION</a:t>
+              <a:t>FASTAPI SERVICE INTERFACE</a:t>
             </a:r>
           </a:p>
         </p:txBody>
@@ -11680,7 +13089,7 @@
               </a:defRPr>
             </a:pPr>
             <a:r>
-              <a:t>High Availability &amp; Operational Resilience</a:t>
+              <a:t>API Architecture: REST &amp; Server-Sent Events (SSE) Endpoints</a:t>
             </a:r>
           </a:p>
         </p:txBody>
@@ -11694,7 +13103,7 @@
         <p:spPr>
           <a:xfrm>
             <a:off x="731520" y="1463040"/>
-            <a:ext cx="5120640" cy="4572000"/>
+            <a:ext cx="10698480" cy="2926080"/>
           </a:xfrm>
           <a:prstGeom prst="roundRect">
             <a:avLst/>
@@ -11738,8 +13147,8 @@
         </p:nvSpPr>
         <p:spPr>
           <a:xfrm>
-            <a:off x="914400" y="1645920"/>
-            <a:ext cx="4754880" cy="4114800"/>
+            <a:off x="914400" y="1554480"/>
+            <a:ext cx="10332720" cy="2743200"/>
           </a:xfrm>
           <a:prstGeom prst="rect">
             <a:avLst/>
@@ -11753,74 +13162,176 @@
           <a:lstStyle/>
           <a:p>
             <a:pPr>
-              <a:defRPr sz="1600" b="1">
+              <a:defRPr sz="1300" b="1">
                 <a:solidFill>
                   <a:srgbClr val="0284C7"/>
                 </a:solidFill>
               </a:defRPr>
             </a:pPr>
             <a:r>
-              <a:t>Dual-Provider Automatic LLM Fallback</a:t>
+              <a:t>CORE API SPECIFICATION</a:t>
             </a:r>
           </a:p>
           <a:p>
             <a:pPr>
               <a:spcBef>
-                <a:spcPts val="1000"/>
+                <a:spcPts val="400"/>
               </a:spcBef>
-              <a:defRPr sz="1200">
+              <a:defRPr sz="1100" b="1">
                 <a:solidFill>
                   <a:srgbClr val="1E293B"/>
                 </a:solidFill>
               </a:defRPr>
             </a:pPr>
             <a:r>
-              <a:t>• Primary Provider: Groq (Llama / GPT-OSS 120B) for ultra-fast token streaming (~1,800 ms median latency).</a:t>
+              <a:t>• POST /api/chat/stream  [Bearer &lt;JWT&gt;]</a:t>
+            </a:r>
+          </a:p>
+          <a:p>
+            <a:pPr>
+              <a:defRPr sz="1000">
+                <a:solidFill>
+                  <a:srgbClr val="64748B"/>
+                </a:solidFill>
+              </a:defRPr>
+            </a:pPr>
+            <a:r>
+              <a:t>   Payload: {session_id, content}  ➔  SSE stream with event types: token, citation, escalation, done</a:t>
             </a:r>
           </a:p>
           <a:p>
             <a:pPr>
               <a:spcBef>
-                <a:spcPts val="1000"/>
+                <a:spcPts val="400"/>
               </a:spcBef>
-              <a:defRPr sz="1200">
+              <a:defRPr sz="1100" b="1">
                 <a:solidFill>
                   <a:srgbClr val="1E293B"/>
                 </a:solidFill>
               </a:defRPr>
             </a:pPr>
             <a:r>
-              <a:t>• Automatic Fallback: Gemini 2.5 Flash triggers automatically if Groq hits rate limits (TPM) or connection timeouts (8s limit).</a:t>
+              <a:t>• GET  /api/sessions  [Bearer &lt;JWT&gt;]</a:t>
+            </a:r>
+          </a:p>
+          <a:p>
+            <a:pPr>
+              <a:defRPr sz="1000">
+                <a:solidFill>
+                  <a:srgbClr val="64748B"/>
+                </a:solidFill>
+              </a:defRPr>
+            </a:pPr>
+            <a:r>
+              <a:t>   Payload: None  ➔  Returns 200 OK with list of active user chat sessions [SessionOut]</a:t>
             </a:r>
           </a:p>
           <a:p>
             <a:pPr>
               <a:spcBef>
-                <a:spcPts val="1000"/>
+                <a:spcPts val="400"/>
               </a:spcBef>
-              <a:defRPr sz="1200">
+              <a:defRPr sz="1100" b="1">
                 <a:solidFill>
                   <a:srgbClr val="1E293B"/>
                 </a:solidFill>
               </a:defRPr>
             </a:pPr>
             <a:r>
-              <a:t>• Clean Stream Recovery: If the primary fails mid-generation, the client cleanly discards the partial buffer and resumes from the fallback. No broken hybrid text.</a:t>
+              <a:t>• GET  /api/sessions/{id}/messages  [Bearer &lt;JWT&gt;]</a:t>
+            </a:r>
+          </a:p>
+          <a:p>
+            <a:pPr>
+              <a:defRPr sz="1000">
+                <a:solidFill>
+                  <a:srgbClr val="64748B"/>
+                </a:solidFill>
+              </a:defRPr>
+            </a:pPr>
+            <a:r>
+              <a:t>   Payload: session_id  ➔  Returns 200 OK with full conversation history &amp; citation IDs [MessageOut]</a:t>
             </a:r>
           </a:p>
           <a:p>
             <a:pPr>
               <a:spcBef>
-                <a:spcPts val="1000"/>
+                <a:spcPts val="400"/>
               </a:spcBef>
-              <a:defRPr sz="1200">
+              <a:defRPr sz="1100" b="1">
                 <a:solidFill>
                   <a:srgbClr val="1E293B"/>
                 </a:solidFill>
               </a:defRPr>
             </a:pPr>
             <a:r>
-              <a:t>• Measured Fallback Rate: 44% under heavy testing due to free-tier token budgets, proving the fallback is actively exercised.</a:t>
+              <a:t>• DELETE /api/sessions/{id}  [Bearer &lt;JWT&gt;]</a:t>
+            </a:r>
+          </a:p>
+          <a:p>
+            <a:pPr>
+              <a:defRPr sz="1000">
+                <a:solidFill>
+                  <a:srgbClr val="64748B"/>
+                </a:solidFill>
+              </a:defRPr>
+            </a:pPr>
+            <a:r>
+              <a:t>   Payload: session_id  ➔  Soft-deletes session (sets deleted_at); returns 204 No Content</a:t>
+            </a:r>
+          </a:p>
+          <a:p>
+            <a:pPr>
+              <a:spcBef>
+                <a:spcPts val="400"/>
+              </a:spcBef>
+              <a:defRPr sz="1100" b="1">
+                <a:solidFill>
+                  <a:srgbClr val="1E293B"/>
+                </a:solidFill>
+              </a:defRPr>
+            </a:pPr>
+            <a:r>
+              <a:t>• GET  /api/me  [Bearer &lt;JWT&gt;]</a:t>
+            </a:r>
+          </a:p>
+          <a:p>
+            <a:pPr>
+              <a:defRPr sz="1000">
+                <a:solidFill>
+                  <a:srgbClr val="64748B"/>
+                </a:solidFill>
+              </a:defRPr>
+            </a:pPr>
+            <a:r>
+              <a:t>   Payload: None  ➔  Returns 200 OK with authenticated Clerk user ID &amp; email (401 if invalid)</a:t>
+            </a:r>
+          </a:p>
+          <a:p>
+            <a:pPr>
+              <a:spcBef>
+                <a:spcPts val="400"/>
+              </a:spcBef>
+              <a:defRPr sz="1100" b="1">
+                <a:solidFill>
+                  <a:srgbClr val="1E293B"/>
+                </a:solidFill>
+              </a:defRPr>
+            </a:pPr>
+            <a:r>
+              <a:t>• GET  /health  [Public]</a:t>
+            </a:r>
+          </a:p>
+          <a:p>
+            <a:pPr>
+              <a:defRPr sz="1000">
+                <a:solidFill>
+                  <a:srgbClr val="64748B"/>
+                </a:solidFill>
+              </a:defRPr>
+            </a:pPr>
+            <a:r>
+              <a:t>   Payload: None  ➔  Returns 200 OK: {status, database: {reachable, pgvector}, redis: {reachable}}</a:t>
             </a:r>
           </a:p>
         </p:txBody>
@@ -11833,8 +13344,8 @@
         </p:nvSpPr>
         <p:spPr>
           <a:xfrm>
-            <a:off x="6217920" y="1463040"/>
-            <a:ext cx="5212080" cy="4572000"/>
+            <a:off x="731520" y="4572000"/>
+            <a:ext cx="5120640" cy="1737360"/>
           </a:xfrm>
           <a:prstGeom prst="roundRect">
             <a:avLst/>
@@ -11844,7 +13355,7 @@
           </a:solidFill>
           <a:ln w="19050">
             <a:solidFill>
-              <a:srgbClr val="E2E8F0"/>
+              <a:srgbClr val="0E7490"/>
             </a:solidFill>
           </a:ln>
         </p:spPr>
@@ -11878,8 +13389,8 @@
         </p:nvSpPr>
         <p:spPr>
           <a:xfrm>
-            <a:off x="6400800" y="1645920"/>
-            <a:ext cx="4846320" cy="4114800"/>
+            <a:off x="914400" y="4663440"/>
+            <a:ext cx="4754880" cy="1554480"/>
           </a:xfrm>
           <a:prstGeom prst="rect">
             <a:avLst/>
@@ -11893,74 +13404,140 @@
           <a:lstStyle/>
           <a:p>
             <a:pPr>
-              <a:defRPr sz="1600" b="1">
+              <a:defRPr sz="1300" b="1">
                 <a:solidFill>
                   <a:srgbClr val="0E7490"/>
                 </a:solidFill>
               </a:defRPr>
             </a:pPr>
             <a:r>
-              <a:t>Redis Sliding-Window Rate Limiting</a:t>
+              <a:t>Security &amp; Middleware Layer</a:t>
             </a:r>
           </a:p>
           <a:p>
             <a:pPr>
               <a:spcBef>
-                <a:spcPts val="1000"/>
+                <a:spcPts val="400"/>
               </a:spcBef>
-              <a:defRPr sz="1200">
+              <a:defRPr sz="1100">
                 <a:solidFill>
                   <a:srgbClr val="1E293B"/>
                 </a:solidFill>
               </a:defRPr>
             </a:pPr>
             <a:r>
-              <a:t>• Per-User Sliding Window: 10 requests per minute enforced per authenticated Clerk User ID.</a:t>
+              <a:t>• RequestContextMiddleware: Injects unique X-Request-ID across all logs.</a:t>
+            </a:r>
+            <a:br/>
+            <a:r>
+              <a:t>• Clerk JWKS Authenticator: Validates RS256 JWT tokens cryptographically.</a:t>
+            </a:r>
+            <a:br/>
+            <a:r>
+              <a:t>• Redis Sliding Window: Enforces 10 req/min rate limit per user.</a:t>
+            </a:r>
+          </a:p>
+        </p:txBody>
+      </p:sp>
+      <p:sp>
+        <p:nvSpPr>
+          <p:cNvPr id="9" name="Rounded Rectangle 8"/>
+          <p:cNvSpPr/>
+          <p:nvPr/>
+        </p:nvSpPr>
+        <p:spPr>
+          <a:xfrm>
+            <a:off x="6217920" y="4572000"/>
+            <a:ext cx="5212080" cy="1737360"/>
+          </a:xfrm>
+          <a:prstGeom prst="roundRect">
+            <a:avLst/>
+          </a:prstGeom>
+          <a:solidFill>
+            <a:srgbClr val="FFFFFF"/>
+          </a:solidFill>
+          <a:ln w="19050">
+            <a:solidFill>
+              <a:srgbClr val="0284C7"/>
+            </a:solidFill>
+          </a:ln>
+        </p:spPr>
+        <p:style>
+          <a:lnRef idx="1">
+            <a:schemeClr val="accent1"/>
+          </a:lnRef>
+          <a:fillRef idx="3">
+            <a:schemeClr val="accent1"/>
+          </a:fillRef>
+          <a:effectRef idx="2">
+            <a:schemeClr val="accent1"/>
+          </a:effectRef>
+          <a:fontRef idx="minor">
+            <a:schemeClr val="lt1"/>
+          </a:fontRef>
+        </p:style>
+        <p:txBody>
+          <a:bodyPr rtlCol="0" anchor="ctr"/>
+          <a:lstStyle/>
+          <a:p>
+            <a:pPr algn="ctr"/>
+          </a:p>
+        </p:txBody>
+      </p:sp>
+      <p:sp>
+        <p:nvSpPr>
+          <p:cNvPr id="10" name="TextBox 9"/>
+          <p:cNvSpPr txBox="1"/>
+          <p:nvPr/>
+        </p:nvSpPr>
+        <p:spPr>
+          <a:xfrm>
+            <a:off x="6400800" y="4663440"/>
+            <a:ext cx="4846320" cy="1554480"/>
+          </a:xfrm>
+          <a:prstGeom prst="rect">
+            <a:avLst/>
+          </a:prstGeom>
+          <a:noFill/>
+        </p:spPr>
+        <p:txBody>
+          <a:bodyPr wrap="square">
+            <a:spAutoFit/>
+          </a:bodyPr>
+          <a:lstStyle/>
+          <a:p>
+            <a:pPr>
+              <a:defRPr sz="1300" b="1">
+                <a:solidFill>
+                  <a:srgbClr val="0284C7"/>
+                </a:solidFill>
+              </a:defRPr>
+            </a:pPr>
+            <a:r>
+              <a:t>SSE Streaming Protocol (ReadableStream)</a:t>
             </a:r>
           </a:p>
           <a:p>
             <a:pPr>
               <a:spcBef>
-                <a:spcPts val="1000"/>
+                <a:spcPts val="400"/>
               </a:spcBef>
-              <a:defRPr sz="1200">
+              <a:defRPr sz="1100">
                 <a:solidFill>
                   <a:srgbClr val="1E293B"/>
                 </a:solidFill>
               </a:defRPr>
             </a:pPr>
             <a:r>
-              <a:t>• Atomic Lua Script: Trims old timestamps, counts active requests, records timestamp, and sets TTL in a single atomic Redis round-trip.</a:t>
-            </a:r>
-          </a:p>
-          <a:p>
-            <a:pPr>
-              <a:spcBef>
-                <a:spcPts val="1000"/>
-              </a:spcBef>
-              <a:defRPr sz="1200">
-                <a:solidFill>
-                  <a:srgbClr val="1E293B"/>
-                </a:solidFill>
-              </a:defRPr>
-            </a:pPr>
-            <a:r>
-              <a:t>• Eliminates Race Conditions: Traditional read-then-write approaches permit concurrent limit bypass. Atomic execution prevents this.</a:t>
-            </a:r>
-          </a:p>
-          <a:p>
-            <a:pPr>
-              <a:spcBef>
-                <a:spcPts val="1000"/>
-              </a:spcBef>
-              <a:defRPr sz="1200">
-                <a:solidFill>
-                  <a:srgbClr val="1E293B"/>
-                </a:solidFill>
-              </a:defRPr>
-            </a:pPr>
-            <a:r>
-              <a:t>• Fail-Open Resiliency: If Redis is unavailable, rate limiting is bypassed. A rate-limiter failure never takes down critical health access.</a:t>
+              <a:t>• Uses fetch + ReadableStream instead of native EventSource to support Authorization headers.</a:t>
+            </a:r>
+            <a:br/>
+            <a:r>
+              <a:t>• Dispatches real-time structured JSON chunks to React frontend.</a:t>
+            </a:r>
+            <a:br/>
+            <a:r>
+              <a:t>• Automatically cleans up DB sessions and logs response latency.</a:t>
             </a:r>
           </a:p>
         </p:txBody>

--- a/docs/Health_Assistant_Evaluation.pptx
+++ b/docs/Health_Assistant_Evaluation.pptx
@@ -10801,7 +10801,7 @@
               </a:defRPr>
             </a:pPr>
             <a:r>
-              <a:t>• NFR3 (Availability &amp; Fault Tolerance): Dual-provider failover (Groq ➔ Gemini) to guarantee 99.9% service uptime under quota exhaustion.</a:t>
+              <a:t>• NFR3 (Availability &amp; Fault Tolerance): Dual-provider failover (Groq -&gt; Gemini) to guarantee 99.9% service uptime under quota exhaustion.</a:t>
             </a:r>
           </a:p>
           <a:p>
@@ -13196,7 +13196,7 @@
               </a:defRPr>
             </a:pPr>
             <a:r>
-              <a:t>   Payload: {session_id, content}  ➔  SSE stream with event types: token, citation, escalation, done</a:t>
+              <a:t>   Payload: {session_id, content}  -&gt;  SSE stream with event types: token, citation, escalation, done</a:t>
             </a:r>
           </a:p>
           <a:p>
@@ -13223,7 +13223,7 @@
               </a:defRPr>
             </a:pPr>
             <a:r>
-              <a:t>   Payload: None  ➔  Returns 200 OK with list of active user chat sessions [SessionOut]</a:t>
+              <a:t>   Payload: None  -&gt;  Returns 200 OK with list of active user chat sessions [SessionOut]</a:t>
             </a:r>
           </a:p>
           <a:p>
@@ -13250,7 +13250,7 @@
               </a:defRPr>
             </a:pPr>
             <a:r>
-              <a:t>   Payload: session_id  ➔  Returns 200 OK with full conversation history &amp; citation IDs [MessageOut]</a:t>
+              <a:t>   Payload: session_id  -&gt;  Returns 200 OK with full conversation history &amp; citation IDs [MessageOut]</a:t>
             </a:r>
           </a:p>
           <a:p>
@@ -13277,7 +13277,7 @@
               </a:defRPr>
             </a:pPr>
             <a:r>
-              <a:t>   Payload: session_id  ➔  Soft-deletes session (sets deleted_at); returns 204 No Content</a:t>
+              <a:t>   Payload: session_id  -&gt;  Soft-deletes session (sets deleted_at); returns 204 No Content</a:t>
             </a:r>
           </a:p>
           <a:p>
@@ -13304,7 +13304,7 @@
               </a:defRPr>
             </a:pPr>
             <a:r>
-              <a:t>   Payload: None  ➔  Returns 200 OK with authenticated Clerk user ID &amp; email (401 if invalid)</a:t>
+              <a:t>   Payload: None  -&gt;  Returns 200 OK with authenticated Clerk user ID &amp; email (401 if invalid)</a:t>
             </a:r>
           </a:p>
           <a:p>
@@ -13331,7 +13331,7 @@
               </a:defRPr>
             </a:pPr>
             <a:r>
-              <a:t>   Payload: None  ➔  Returns 200 OK: {status, database: {reachable, pgvector}, redis: {reachable}}</a:t>
+              <a:t>   Payload: None  -&gt;  Returns 200 OK: {status, database: {reachable, pgvector}, redis: {reachable}}</a:t>
             </a:r>
           </a:p>
         </p:txBody>

--- a/docs/Health_Assistant_Evaluation.pptx
+++ b/docs/Health_Assistant_Evaluation.pptx
@@ -770,11 +770,28 @@
           <a:lstStyle/>
           <a:p>
             <a:r>
-              <a:rPr lang="en-US" dirty="0"/>
-              <a:t>Good morning evaluators. Today I am presenting our Grounded AI Health Assistant.
-While general AI models like ChatGPT are fluent, fluent fabrication in medicine can be fatal. Our system is designed around auditable medical provenance (WHO, NHS, NIH, CDC), strict negative constraints, and sub-millisecond emergency short-circuiting.</a:t>
-            </a:r>
-            <a:endParaRPr lang="en-US" dirty="0"/>
+              <a:t>SPEAKER NOTES:</a:t>
+            </a:r>
+          </a:p>
+          <a:p>
+            <a:r>
+              <a:t>Good morning evaluators and respected Guide Prof. C.P. Navdeti. My name is Shardul Shripad Hingane, registration number 2023bit005 from the Department of Information Technology. Today I am presenting our project: Grounded AI Health Assistant &amp; Emergency Triage for our Design Document &amp; Feasibility Analysis evaluation.</a:t>
+            </a:r>
+          </a:p>
+          <a:p>
+            <a:r>
+              <a:t>1. Highlight UN SDG 3 alignment: Target 3.8 — access to verified health information with zero medical misinformation.</a:t>
+            </a:r>
+          </a:p>
+          <a:p>
+            <a:r>
+              <a:t>2. State our core paradigm: strict negative constraints — system refuses to guess without verified sources.</a:t>
+            </a:r>
+          </a:p>
+          <a:p>
+            <a:r>
+              <a:t>3. Point to our safety floor: emergency symptoms bypass AI entirely via a sub-20ms short-circuit.</a:t>
+            </a:r>
           </a:p>
         </p:txBody>
       </p:sp>
@@ -2871,7 +2888,7 @@
         </p:nvSpPr>
         <p:spPr>
           <a:xfrm>
-            <a:off x="640080" y="1051560"/>
+            <a:off x="640080" y="750000"/>
             <a:ext cx="7315200" cy="320040"/>
           </a:xfrm>
           <a:prstGeom prst="rect">
@@ -2910,7 +2927,7 @@
         </p:nvSpPr>
         <p:spPr>
           <a:xfrm>
-            <a:off x="640080" y="1417320"/>
+            <a:off x="640080" y="1100000"/>
             <a:ext cx="10789920" cy="1737360"/>
           </a:xfrm>
           <a:prstGeom prst="rect">
@@ -2972,7 +2989,7 @@
         </p:nvSpPr>
         <p:spPr>
           <a:xfrm>
-            <a:off x="640080" y="3063240"/>
+            <a:off x="640080" y="2700000"/>
             <a:ext cx="9601200" cy="457200"/>
           </a:xfrm>
           <a:prstGeom prst="rect">
@@ -3561,7 +3578,209 @@
               </a:defRPr>
             </a:pPr>
             <a:r>
-              <a:t>Eval date: September 26, 2026 · Milestone: Design Document &amp; Feasibility Analysis · FastAPI · PostgreSQL · React · Clerk</a:t>
+              <a:t>Milestone: Design Document &amp; Feasibility Analysis  ·  FastAPI · PostgreSQL (pgvector) · React · Clerk</a:t>
+            </a:r>
+          </a:p>
+        </p:txBody>
+      </p:sp>
+      <p:sp>
+        <p:nvSpPr>
+          <p:cNvPr id="24" name="Rounded Rectangle 23"/>
+          <p:cNvSpPr/>
+          <p:nvPr/>
+        </p:nvSpPr>
+        <p:spPr>
+          <a:xfrm>
+            <a:off x="640080" y="3180000"/>
+            <a:ext cx="5600000" cy="548640"/>
+          </a:xfrm>
+          <a:prstGeom prst="roundRect">
+            <a:avLst/>
+          </a:prstGeom>
+          <a:solidFill>
+            <a:srgbClr val="22335A"/>
+          </a:solidFill>
+          <a:ln w="12700">
+            <a:solidFill>
+              <a:srgbClr val="3B4F7A"/>
+            </a:solidFill>
+          </a:ln>
+        </p:spPr>
+        <p:style>
+          <a:lnRef idx="1">
+            <a:schemeClr val="accent1"/>
+          </a:lnRef>
+          <a:fillRef idx="3">
+            <a:schemeClr val="accent1"/>
+          </a:fillRef>
+          <a:effectRef idx="2">
+            <a:schemeClr val="accent1"/>
+          </a:effectRef>
+          <a:fontRef idx="minor">
+            <a:schemeClr val="lt1"/>
+          </a:fontRef>
+        </p:style>
+        <p:txBody>
+          <a:bodyPr rtlCol="0" anchor="ctr"/>
+          <a:lstStyle/>
+          <a:p>
+            <a:pPr algn="ctr"/>
+          </a:p>
+        </p:txBody>
+      </p:sp>
+      <p:sp>
+        <p:nvSpPr>
+          <p:cNvPr id="25" name="TextBox 24"/>
+          <p:cNvSpPr txBox="1"/>
+          <p:nvPr/>
+        </p:nvSpPr>
+        <p:spPr>
+          <a:xfrm>
+            <a:off x="800000" y="3210000"/>
+            <a:ext cx="5300000" cy="480000"/>
+          </a:xfrm>
+          <a:prstGeom prst="rect">
+            <a:avLst/>
+          </a:prstGeom>
+          <a:noFill/>
+        </p:spPr>
+        <p:txBody>
+          <a:bodyPr wrap="square">
+            <a:spAutoFit/>
+          </a:bodyPr>
+          <a:lstStyle/>
+          <a:p>
+            <a:r>
+              <a:rPr sz="1350" b="1">
+                <a:solidFill>
+                  <a:srgbClr val="FFFFFF"/>
+                </a:solidFill>
+                <a:latin typeface="Cambria"/>
+              </a:rPr>
+              <a:t>Shardul Shripad Hingane</a:t>
+            </a:r>
+            <a:r>
+              <a:rPr sz="1100">
+                <a:solidFill>
+                  <a:srgbClr val="0F8B8D"/>
+                </a:solidFill>
+                <a:latin typeface="Calibri"/>
+              </a:rPr>
+              <a:t>  (Reg: 2023bit005)</a:t>
+            </a:r>
+          </a:p>
+          <a:p>
+            <a:pPr>
+              <a:defRPr sz="1100">
+                <a:solidFill>
+                  <a:srgbClr val="CBD5E1"/>
+                </a:solidFill>
+                <a:latin typeface="Calibri"/>
+              </a:defRPr>
+            </a:pPr>
+            <a:r>
+              <a:t>Department of Information Technology</a:t>
+            </a:r>
+          </a:p>
+        </p:txBody>
+      </p:sp>
+      <p:sp>
+        <p:nvSpPr>
+          <p:cNvPr id="26" name="Rounded Rectangle 25"/>
+          <p:cNvSpPr/>
+          <p:nvPr/>
+        </p:nvSpPr>
+        <p:spPr>
+          <a:xfrm>
+            <a:off x="6440080" y="3180000"/>
+            <a:ext cx="5081360" cy="548640"/>
+          </a:xfrm>
+          <a:prstGeom prst="roundRect">
+            <a:avLst/>
+          </a:prstGeom>
+          <a:solidFill>
+            <a:srgbClr val="22335A"/>
+          </a:solidFill>
+          <a:ln w="12700">
+            <a:solidFill>
+              <a:srgbClr val="3B4F7A"/>
+            </a:solidFill>
+          </a:ln>
+        </p:spPr>
+        <p:style>
+          <a:lnRef idx="1">
+            <a:schemeClr val="accent1"/>
+          </a:lnRef>
+          <a:fillRef idx="3">
+            <a:schemeClr val="accent1"/>
+          </a:fillRef>
+          <a:effectRef idx="2">
+            <a:schemeClr val="accent1"/>
+          </a:effectRef>
+          <a:fontRef idx="minor">
+            <a:schemeClr val="lt1"/>
+          </a:fontRef>
+        </p:style>
+        <p:txBody>
+          <a:bodyPr rtlCol="0" anchor="ctr"/>
+          <a:lstStyle/>
+          <a:p>
+            <a:pPr algn="ctr"/>
+          </a:p>
+        </p:txBody>
+      </p:sp>
+      <p:sp>
+        <p:nvSpPr>
+          <p:cNvPr id="27" name="TextBox 26"/>
+          <p:cNvSpPr txBox="1"/>
+          <p:nvPr/>
+        </p:nvSpPr>
+        <p:spPr>
+          <a:xfrm>
+            <a:off x="6600000" y="3210000"/>
+            <a:ext cx="4800000" cy="480000"/>
+          </a:xfrm>
+          <a:prstGeom prst="rect">
+            <a:avLst/>
+          </a:prstGeom>
+          <a:noFill/>
+        </p:spPr>
+        <p:txBody>
+          <a:bodyPr wrap="square">
+            <a:spAutoFit/>
+          </a:bodyPr>
+          <a:lstStyle/>
+          <a:p>
+            <a:r>
+              <a:rPr sz="1100">
+                <a:solidFill>
+                  <a:srgbClr val="94A3B8"/>
+                </a:solidFill>
+                <a:latin typeface="Calibri"/>
+              </a:rPr>
+              <a:t>Project Guide: </a:t>
+            </a:r>
+            <a:r>
+              <a:rPr sz="1350" b="1">
+                <a:solidFill>
+                  <a:srgbClr val="FFFFFF"/>
+                </a:solidFill>
+                <a:latin typeface="Cambria"/>
+              </a:rPr>
+              <a:t>C.P. Navdeti</a:t>
+            </a:r>
+          </a:p>
+          <a:p>
+            <a:pPr>
+              <a:defRPr sz="1100">
+                <a:solidFill>
+                  <a:srgbClr val="CBD5E1"/>
+                </a:solidFill>
+                <a:latin typeface="Calibri"/>
+              </a:defRPr>
+            </a:pPr>
+            <a:r>
+              <a:t>Evaluation Date: 26 Sep 2026</a:t>
             </a:r>
           </a:p>
         </p:txBody>

--- a/docs/Health_Assistant_Evaluation.pptx
+++ b/docs/Health_Assistant_Evaluation.pptx
@@ -2888,7 +2888,7 @@
         </p:nvSpPr>
         <p:spPr>
           <a:xfrm>
-            <a:off x="640080" y="750000"/>
+            <a:off x="640080" y="1051560"/>
             <a:ext cx="7315200" cy="320040"/>
           </a:xfrm>
           <a:prstGeom prst="rect">
@@ -2927,7 +2927,7 @@
         </p:nvSpPr>
         <p:spPr>
           <a:xfrm>
-            <a:off x="640080" y="1100000"/>
+            <a:off x="640080" y="1417320"/>
             <a:ext cx="10789920" cy="1737360"/>
           </a:xfrm>
           <a:prstGeom prst="rect">
@@ -2989,7 +2989,7 @@
         </p:nvSpPr>
         <p:spPr>
           <a:xfrm>
-            <a:off x="640080" y="2700000"/>
+            <a:off x="640080" y="3063240"/>
             <a:ext cx="9601200" cy="457200"/>
           </a:xfrm>
           <a:prstGeom prst="rect">
@@ -3182,340 +3182,6 @@
                 <a:cs typeface="Calibri" pitchFamily="34" charset="-120"/>
               </a:rPr>
               <a:t>Access to safe, verified health information without medical misinformation.</a:t>
-            </a:r>
-            <a:endParaRPr lang="en-US" sz="1150" dirty="0"/>
-          </a:p>
-        </p:txBody>
-      </p:sp>
-      <p:sp>
-        <p:nvSpPr>
-          <p:cNvPr id="12" name="Shape 10"/>
-          <p:cNvSpPr/>
-          <p:nvPr/>
-        </p:nvSpPr>
-        <p:spPr>
-          <a:xfrm>
-            <a:off x="4434840" y="3886200"/>
-            <a:ext cx="3520440" cy="1691640"/>
-          </a:xfrm>
-          <a:prstGeom prst="roundRect">
-            <a:avLst>
-              <a:gd name="adj" fmla="val 4324"/>
-            </a:avLst>
-          </a:prstGeom>
-          <a:solidFill>
-            <a:srgbClr val="22335A"/>
-          </a:solidFill>
-          <a:ln/>
-        </p:spPr>
-        <p:txBody>
-          <a:bodyPr/>
-          <a:p/>
-        </p:txBody>
-      </p:sp>
-      <p:sp>
-        <p:nvSpPr>
-          <p:cNvPr id="13" name="Shape 11"/>
-          <p:cNvSpPr/>
-          <p:nvPr/>
-        </p:nvSpPr>
-        <p:spPr>
-          <a:xfrm>
-            <a:off x="4663440" y="4114800"/>
-            <a:ext cx="457200" cy="457200"/>
-          </a:xfrm>
-          <a:prstGeom prst="ellipse">
-            <a:avLst/>
-          </a:prstGeom>
-          <a:solidFill>
-            <a:srgbClr val="0F8B8D"/>
-          </a:solidFill>
-          <a:ln/>
-        </p:spPr>
-        <p:txBody>
-          <a:bodyPr/>
-          <a:p/>
-        </p:txBody>
-      </p:sp>
-      <p:sp>
-        <p:nvSpPr>
-          <p:cNvPr id="14" name="Text 12"/>
-          <p:cNvSpPr txBox="1"/>
-          <p:nvPr/>
-        </p:nvSpPr>
-        <p:spPr>
-          <a:xfrm>
-            <a:off x="4663440" y="4114800"/>
-            <a:ext cx="457200" cy="457200"/>
-          </a:xfrm>
-          <a:prstGeom prst="rect">
-            <a:avLst/>
-          </a:prstGeom>
-          <a:noFill/>
-          <a:ln/>
-        </p:spPr>
-        <p:txBody>
-          <a:bodyPr wrap="square" lIns="0" tIns="0" rIns="0" bIns="0" rtlCol="0" anchor="ctr"/>
-          <a:lstStyle/>
-          <a:p>
-            <a:pPr algn="ctr" indent="0" marL="0">
-              <a:buNone/>
-            </a:pPr>
-            <a:r>
-              <a:rPr lang="en-US" sz="1200" b="1" dirty="0">
-                <a:solidFill>
-                  <a:srgbClr val="FFFFFF"/>
-                </a:solidFill>
-                <a:latin typeface="Cambria" pitchFamily="34" charset="0"/>
-                <a:ea typeface="Cambria" pitchFamily="34" charset="-122"/>
-                <a:cs typeface="Cambria" pitchFamily="34" charset="-120"/>
-              </a:rPr>
-              <a:t>!</a:t>
-            </a:r>
-            <a:endParaRPr lang="en-US" sz="1200" dirty="0"/>
-          </a:p>
-        </p:txBody>
-      </p:sp>
-      <p:sp>
-        <p:nvSpPr>
-          <p:cNvPr id="15" name="Text 13"/>
-          <p:cNvSpPr txBox="1"/>
-          <p:nvPr/>
-        </p:nvSpPr>
-        <p:spPr>
-          <a:xfrm>
-            <a:off x="5257800" y="4142232"/>
-            <a:ext cx="2514600" cy="365760"/>
-          </a:xfrm>
-          <a:prstGeom prst="rect">
-            <a:avLst/>
-          </a:prstGeom>
-          <a:noFill/>
-          <a:ln/>
-        </p:spPr>
-        <p:txBody>
-          <a:bodyPr wrap="square" lIns="0" tIns="0" rIns="0" bIns="0" rtlCol="0" anchor="ctr"/>
-          <a:lstStyle/>
-          <a:p>
-            <a:pPr indent="0" marL="0">
-              <a:buNone/>
-            </a:pPr>
-            <a:r>
-              <a:rPr lang="en-US" sz="1200" b="1" spc="100" kern="0" dirty="0">
-                <a:solidFill>
-                  <a:srgbClr val="5FD4C7"/>
-                </a:solidFill>
-                <a:latin typeface="Calibri" pitchFamily="34" charset="0"/>
-                <a:ea typeface="Calibri" pitchFamily="34" charset="-122"/>
-                <a:cs typeface="Calibri" pitchFamily="34" charset="-120"/>
-              </a:rPr>
-              <a:t>CORE PARADIGM</a:t>
-            </a:r>
-            <a:endParaRPr lang="en-US" sz="1200" dirty="0"/>
-          </a:p>
-        </p:txBody>
-      </p:sp>
-      <p:sp>
-        <p:nvSpPr>
-          <p:cNvPr id="16" name="Text 14"/>
-          <p:cNvSpPr txBox="1"/>
-          <p:nvPr/>
-        </p:nvSpPr>
-        <p:spPr>
-          <a:xfrm>
-            <a:off x="4663440" y="4663440"/>
-            <a:ext cx="3063240" cy="731520"/>
-          </a:xfrm>
-          <a:prstGeom prst="rect">
-            <a:avLst/>
-          </a:prstGeom>
-          <a:noFill/>
-          <a:ln/>
-        </p:spPr>
-        <p:txBody>
-          <a:bodyPr wrap="square" lIns="0" tIns="0" rIns="0" bIns="0" rtlCol="0" anchor="t"/>
-          <a:lstStyle/>
-          <a:p>
-            <a:pPr indent="0" marL="0">
-              <a:buNone/>
-            </a:pPr>
-            <a:r>
-              <a:rPr lang="en-US" sz="1150" dirty="0">
-                <a:solidFill>
-                  <a:srgbClr val="D7E1F0"/>
-                </a:solidFill>
-                <a:latin typeface="Calibri" pitchFamily="34" charset="0"/>
-                <a:ea typeface="Calibri" pitchFamily="34" charset="-122"/>
-                <a:cs typeface="Calibri" pitchFamily="34" charset="-120"/>
-              </a:rPr>
-              <a:t>Strict negative constraints — refuses to guess without verified sources.</a:t>
-            </a:r>
-            <a:endParaRPr lang="en-US" sz="1150" dirty="0"/>
-          </a:p>
-        </p:txBody>
-      </p:sp>
-      <p:sp>
-        <p:nvSpPr>
-          <p:cNvPr id="17" name="Shape 15"/>
-          <p:cNvSpPr/>
-          <p:nvPr/>
-        </p:nvSpPr>
-        <p:spPr>
-          <a:xfrm>
-            <a:off x="8229600" y="3886200"/>
-            <a:ext cx="3520440" cy="1691640"/>
-          </a:xfrm>
-          <a:prstGeom prst="roundRect">
-            <a:avLst>
-              <a:gd name="adj" fmla="val 4324"/>
-            </a:avLst>
-          </a:prstGeom>
-          <a:solidFill>
-            <a:srgbClr val="22335A"/>
-          </a:solidFill>
-          <a:ln/>
-        </p:spPr>
-        <p:txBody>
-          <a:bodyPr/>
-          <a:p/>
-        </p:txBody>
-      </p:sp>
-      <p:sp>
-        <p:nvSpPr>
-          <p:cNvPr id="18" name="Shape 16"/>
-          <p:cNvSpPr/>
-          <p:nvPr/>
-        </p:nvSpPr>
-        <p:spPr>
-          <a:xfrm>
-            <a:off x="8458200" y="4114800"/>
-            <a:ext cx="457200" cy="457200"/>
-          </a:xfrm>
-          <a:prstGeom prst="ellipse">
-            <a:avLst/>
-          </a:prstGeom>
-          <a:solidFill>
-            <a:srgbClr val="0F8B8D"/>
-          </a:solidFill>
-          <a:ln/>
-        </p:spPr>
-        <p:txBody>
-          <a:bodyPr/>
-          <a:p/>
-        </p:txBody>
-      </p:sp>
-      <p:sp>
-        <p:nvSpPr>
-          <p:cNvPr id="19" name="Text 17"/>
-          <p:cNvSpPr txBox="1"/>
-          <p:nvPr/>
-        </p:nvSpPr>
-        <p:spPr>
-          <a:xfrm>
-            <a:off x="8458200" y="4114800"/>
-            <a:ext cx="457200" cy="457200"/>
-          </a:xfrm>
-          <a:prstGeom prst="rect">
-            <a:avLst/>
-          </a:prstGeom>
-          <a:noFill/>
-          <a:ln/>
-        </p:spPr>
-        <p:txBody>
-          <a:bodyPr wrap="square" lIns="0" tIns="0" rIns="0" bIns="0" rtlCol="0" anchor="ctr"/>
-          <a:lstStyle/>
-          <a:p>
-            <a:pPr algn="ctr" indent="0" marL="0">
-              <a:buNone/>
-            </a:pPr>
-            <a:r>
-              <a:rPr lang="en-US" sz="1200" b="1" dirty="0">
-                <a:solidFill>
-                  <a:srgbClr val="FFFFFF"/>
-                </a:solidFill>
-                <a:latin typeface="Cambria" pitchFamily="34" charset="0"/>
-                <a:ea typeface="Cambria" pitchFamily="34" charset="-122"/>
-                <a:cs typeface="Cambria" pitchFamily="34" charset="-120"/>
-              </a:rPr>
-              <a:t>✓</a:t>
-            </a:r>
-            <a:endParaRPr lang="en-US" sz="1200" dirty="0"/>
-          </a:p>
-        </p:txBody>
-      </p:sp>
-      <p:sp>
-        <p:nvSpPr>
-          <p:cNvPr id="20" name="Text 18"/>
-          <p:cNvSpPr txBox="1"/>
-          <p:nvPr/>
-        </p:nvSpPr>
-        <p:spPr>
-          <a:xfrm>
-            <a:off x="9052560" y="4142232"/>
-            <a:ext cx="2514600" cy="365760"/>
-          </a:xfrm>
-          <a:prstGeom prst="rect">
-            <a:avLst/>
-          </a:prstGeom>
-          <a:noFill/>
-          <a:ln/>
-        </p:spPr>
-        <p:txBody>
-          <a:bodyPr wrap="square" lIns="0" tIns="0" rIns="0" bIns="0" rtlCol="0" anchor="ctr"/>
-          <a:lstStyle/>
-          <a:p>
-            <a:pPr indent="0" marL="0">
-              <a:buNone/>
-            </a:pPr>
-            <a:r>
-              <a:rPr lang="en-US" sz="1200" b="1" spc="100" kern="0" dirty="0">
-                <a:solidFill>
-                  <a:srgbClr val="5FD4C7"/>
-                </a:solidFill>
-                <a:latin typeface="Calibri" pitchFamily="34" charset="0"/>
-                <a:ea typeface="Calibri" pitchFamily="34" charset="-122"/>
-                <a:cs typeface="Calibri" pitchFamily="34" charset="-120"/>
-              </a:rPr>
-              <a:t>SAFETY FLOOR</a:t>
-            </a:r>
-            <a:endParaRPr lang="en-US" sz="1200" dirty="0"/>
-          </a:p>
-        </p:txBody>
-      </p:sp>
-      <p:sp>
-        <p:nvSpPr>
-          <p:cNvPr id="21" name="Text 19"/>
-          <p:cNvSpPr txBox="1"/>
-          <p:nvPr/>
-        </p:nvSpPr>
-        <p:spPr>
-          <a:xfrm>
-            <a:off x="8458200" y="4663440"/>
-            <a:ext cx="3063240" cy="731520"/>
-          </a:xfrm>
-          <a:prstGeom prst="rect">
-            <a:avLst/>
-          </a:prstGeom>
-          <a:noFill/>
-          <a:ln/>
-        </p:spPr>
-        <p:txBody>
-          <a:bodyPr wrap="square" lIns="0" tIns="0" rIns="0" bIns="0" rtlCol="0" anchor="t"/>
-          <a:lstStyle/>
-          <a:p>
-            <a:pPr indent="0" marL="0">
-              <a:buNone/>
-            </a:pPr>
-            <a:r>
-              <a:rPr lang="en-US" sz="1150" dirty="0">
-                <a:solidFill>
-                  <a:srgbClr val="D7E1F0"/>
-                </a:solidFill>
-                <a:latin typeface="Calibri" pitchFamily="34" charset="0"/>
-                <a:ea typeface="Calibri" pitchFamily="34" charset="-122"/>
-                <a:cs typeface="Calibri" pitchFamily="34" charset="-120"/>
-              </a:rPr>
-              <a:t>Bypasses AI entirely in medical emergencies via a &lt; 20 ms short-circuit.</a:t>
             </a:r>
             <a:endParaRPr lang="en-US" sz="1150" dirty="0"/>
           </a:p>
@@ -3578,7 +3244,7 @@
               </a:defRPr>
             </a:pPr>
             <a:r>
-              <a:t>Milestone: Design Document &amp; Feasibility Analysis  ·  FastAPI · PostgreSQL (pgvector) · React · Clerk</a:t>
+              <a:t>Milestone: Design Document &amp; Feasibility Analysis  ·  Full stack deployed &amp; running  ·  FastAPI · PostgreSQL · React · Clerk</a:t>
             </a:r>
           </a:p>
         </p:txBody>
@@ -3591,8 +3257,8 @@
         </p:nvSpPr>
         <p:spPr>
           <a:xfrm>
-            <a:off x="640080" y="3180000"/>
-            <a:ext cx="5600000" cy="548640"/>
+            <a:off x="4434840" y="3886200"/>
+            <a:ext cx="7315200" cy="1691640"/>
           </a:xfrm>
           <a:prstGeom prst="roundRect">
             <a:avLst/>
@@ -3600,7 +3266,7 @@
           <a:solidFill>
             <a:srgbClr val="22335A"/>
           </a:solidFill>
-          <a:ln w="12700">
+          <a:ln w="19050">
             <a:solidFill>
               <a:srgbClr val="3B4F7A"/>
             </a:solidFill>
@@ -3630,81 +3296,23 @@
       </p:sp>
       <p:sp>
         <p:nvSpPr>
-          <p:cNvPr id="25" name="TextBox 24"/>
-          <p:cNvSpPr txBox="1"/>
-          <p:nvPr/>
-        </p:nvSpPr>
-        <p:spPr>
-          <a:xfrm>
-            <a:off x="800000" y="3210000"/>
-            <a:ext cx="5300000" cy="480000"/>
-          </a:xfrm>
-          <a:prstGeom prst="rect">
-            <a:avLst/>
-          </a:prstGeom>
-          <a:noFill/>
-        </p:spPr>
-        <p:txBody>
-          <a:bodyPr wrap="square">
-            <a:spAutoFit/>
-          </a:bodyPr>
-          <a:lstStyle/>
-          <a:p>
-            <a:r>
-              <a:rPr sz="1350" b="1">
-                <a:solidFill>
-                  <a:srgbClr val="FFFFFF"/>
-                </a:solidFill>
-                <a:latin typeface="Cambria"/>
-              </a:rPr>
-              <a:t>Shardul Shripad Hingane</a:t>
-            </a:r>
-            <a:r>
-              <a:rPr sz="1100">
-                <a:solidFill>
-                  <a:srgbClr val="0F8B8D"/>
-                </a:solidFill>
-                <a:latin typeface="Calibri"/>
-              </a:rPr>
-              <a:t>  (Reg: 2023bit005)</a:t>
-            </a:r>
-          </a:p>
-          <a:p>
-            <a:pPr>
-              <a:defRPr sz="1100">
-                <a:solidFill>
-                  <a:srgbClr val="CBD5E1"/>
-                </a:solidFill>
-                <a:latin typeface="Calibri"/>
-              </a:defRPr>
-            </a:pPr>
-            <a:r>
-              <a:t>Department of Information Technology</a:t>
-            </a:r>
-          </a:p>
-        </p:txBody>
-      </p:sp>
-      <p:sp>
-        <p:nvSpPr>
-          <p:cNvPr id="26" name="Rounded Rectangle 25"/>
+          <p:cNvPr id="25" name="Oval 24"/>
           <p:cNvSpPr/>
           <p:nvPr/>
         </p:nvSpPr>
         <p:spPr>
           <a:xfrm>
-            <a:off x="6440080" y="3180000"/>
-            <a:ext cx="5081360" cy="548640"/>
-          </a:xfrm>
-          <a:prstGeom prst="roundRect">
+            <a:off x="4680000" y="4114800"/>
+            <a:ext cx="457200" cy="457200"/>
+          </a:xfrm>
+          <a:prstGeom prst="ellipse">
             <a:avLst/>
           </a:prstGeom>
           <a:solidFill>
-            <a:srgbClr val="22335A"/>
+            <a:srgbClr val="0F8B8D"/>
           </a:solidFill>
-          <a:ln w="12700">
-            <a:solidFill>
-              <a:srgbClr val="3B4F7A"/>
-            </a:solidFill>
+          <a:ln>
+            <a:noFill/>
           </a:ln>
         </p:spPr>
         <p:style>
@@ -3731,14 +3339,50 @@
       </p:sp>
       <p:sp>
         <p:nvSpPr>
+          <p:cNvPr id="26" name="TextBox 25"/>
+          <p:cNvSpPr txBox="1"/>
+          <p:nvPr/>
+        </p:nvSpPr>
+        <p:spPr>
+          <a:xfrm>
+            <a:off x="4680000" y="4114800"/>
+            <a:ext cx="457200" cy="457200"/>
+          </a:xfrm>
+          <a:prstGeom prst="rect">
+            <a:avLst/>
+          </a:prstGeom>
+          <a:noFill/>
+        </p:spPr>
+        <p:txBody>
+          <a:bodyPr wrap="none">
+            <a:spAutoFit/>
+          </a:bodyPr>
+          <a:lstStyle/>
+          <a:p>
+            <a:pPr algn="ctr">
+              <a:defRPr sz="1300" b="1">
+                <a:solidFill>
+                  <a:srgbClr val="FFFFFF"/>
+                </a:solidFill>
+                <a:latin typeface="Cambria"/>
+              </a:defRPr>
+            </a:pPr>
+            <a:r>
+              <a:t>IT</a:t>
+            </a:r>
+          </a:p>
+        </p:txBody>
+      </p:sp>
+      <p:sp>
+        <p:nvSpPr>
           <p:cNvPr id="27" name="TextBox 26"/>
           <p:cNvSpPr txBox="1"/>
           <p:nvPr/>
         </p:nvSpPr>
         <p:spPr>
           <a:xfrm>
-            <a:off x="6600000" y="3210000"/>
-            <a:ext cx="4800000" cy="480000"/>
+            <a:off x="5250000" y="4000000"/>
+            <a:ext cx="2750000" cy="1500000"/>
           </a:xfrm>
           <a:prstGeom prst="rect">
             <a:avLst/>
@@ -3751,36 +3395,288 @@
           </a:bodyPr>
           <a:lstStyle/>
           <a:p>
-            <a:r>
-              <a:rPr sz="1100">
-                <a:solidFill>
-                  <a:srgbClr val="94A3B8"/>
-                </a:solidFill>
-                <a:latin typeface="Calibri"/>
-              </a:rPr>
-              <a:t>Project Guide: </a:t>
-            </a:r>
-            <a:r>
-              <a:rPr sz="1350" b="1">
-                <a:solidFill>
-                  <a:srgbClr val="FFFFFF"/>
-                </a:solidFill>
-                <a:latin typeface="Cambria"/>
-              </a:rPr>
-              <a:t>C.P. Navdeti</a:t>
-            </a:r>
-          </a:p>
-          <a:p>
             <a:pPr>
-              <a:defRPr sz="1100">
-                <a:solidFill>
-                  <a:srgbClr val="CBD5E1"/>
+              <a:defRPr sz="1000" b="1">
+                <a:solidFill>
+                  <a:srgbClr val="0F8B8D"/>
                 </a:solidFill>
                 <a:latin typeface="Calibri"/>
               </a:defRPr>
             </a:pPr>
             <a:r>
-              <a:t>Evaluation Date: 26 Sep 2026</a:t>
+              <a:t>PROJECT CANDIDATE</a:t>
+            </a:r>
+          </a:p>
+          <a:p>
+            <a:pPr>
+              <a:spcBef>
+                <a:spcPts val="300"/>
+              </a:spcBef>
+            </a:pPr>
+            <a:r>
+              <a:rPr sz="1600" b="1">
+                <a:solidFill>
+                  <a:srgbClr val="FFFFFF"/>
+                </a:solidFill>
+                <a:latin typeface="Cambria"/>
+              </a:rPr>
+              <a:t>Shardul Shripad Hingane</a:t>
+            </a:r>
+          </a:p>
+          <a:p>
+            <a:pPr>
+              <a:spcBef>
+                <a:spcPts val="400"/>
+              </a:spcBef>
+            </a:pPr>
+            <a:r>
+              <a:rPr sz="1100">
+                <a:solidFill>
+                  <a:srgbClr val="94A3B8"/>
+                </a:solidFill>
+                <a:latin typeface="Calibri"/>
+              </a:rPr>
+              <a:t>Registration No: </a:t>
+            </a:r>
+            <a:r>
+              <a:rPr sz="1100" b="1">
+                <a:solidFill>
+                  <a:srgbClr val="0F8B8D"/>
+                </a:solidFill>
+                <a:latin typeface="Calibri"/>
+              </a:rPr>
+              <a:t>2023bit005</a:t>
+            </a:r>
+          </a:p>
+          <a:p>
+            <a:pPr>
+              <a:spcBef>
+                <a:spcPts val="200"/>
+              </a:spcBef>
+            </a:pPr>
+            <a:r>
+              <a:rPr sz="1100">
+                <a:solidFill>
+                  <a:srgbClr val="CBD5E1"/>
+                </a:solidFill>
+                <a:latin typeface="Calibri"/>
+              </a:rPr>
+              <a:t>Department of Information Technology</a:t>
+            </a:r>
+          </a:p>
+        </p:txBody>
+      </p:sp>
+      <p:sp>
+        <p:nvSpPr>
+          <p:cNvPr id="28" name="Rectangle 27"/>
+          <p:cNvSpPr/>
+          <p:nvPr/>
+        </p:nvSpPr>
+        <p:spPr>
+          <a:xfrm>
+            <a:off x="8050000" y="4050000"/>
+            <a:ext cx="20000" cy="1350000"/>
+          </a:xfrm>
+          <a:prstGeom prst="rect">
+            <a:avLst/>
+          </a:prstGeom>
+          <a:solidFill>
+            <a:srgbClr val="3B4F7A"/>
+          </a:solidFill>
+          <a:ln>
+            <a:noFill/>
+          </a:ln>
+        </p:spPr>
+        <p:style>
+          <a:lnRef idx="1">
+            <a:schemeClr val="accent1"/>
+          </a:lnRef>
+          <a:fillRef idx="3">
+            <a:schemeClr val="accent1"/>
+          </a:fillRef>
+          <a:effectRef idx="2">
+            <a:schemeClr val="accent1"/>
+          </a:effectRef>
+          <a:fontRef idx="minor">
+            <a:schemeClr val="lt1"/>
+          </a:fontRef>
+        </p:style>
+        <p:txBody>
+          <a:bodyPr rtlCol="0" anchor="ctr"/>
+          <a:lstStyle/>
+          <a:p>
+            <a:pPr algn="ctr"/>
+          </a:p>
+        </p:txBody>
+      </p:sp>
+      <p:sp>
+        <p:nvSpPr>
+          <p:cNvPr id="29" name="Oval 28"/>
+          <p:cNvSpPr/>
+          <p:nvPr/>
+        </p:nvSpPr>
+        <p:spPr>
+          <a:xfrm>
+            <a:off x="8250000" y="4114800"/>
+            <a:ext cx="457200" cy="457200"/>
+          </a:xfrm>
+          <a:prstGeom prst="ellipse">
+            <a:avLst/>
+          </a:prstGeom>
+          <a:solidFill>
+            <a:srgbClr val="0F8B8D"/>
+          </a:solidFill>
+          <a:ln>
+            <a:noFill/>
+          </a:ln>
+        </p:spPr>
+        <p:style>
+          <a:lnRef idx="1">
+            <a:schemeClr val="accent1"/>
+          </a:lnRef>
+          <a:fillRef idx="3">
+            <a:schemeClr val="accent1"/>
+          </a:fillRef>
+          <a:effectRef idx="2">
+            <a:schemeClr val="accent1"/>
+          </a:effectRef>
+          <a:fontRef idx="minor">
+            <a:schemeClr val="lt1"/>
+          </a:fontRef>
+        </p:style>
+        <p:txBody>
+          <a:bodyPr rtlCol="0" anchor="ctr"/>
+          <a:lstStyle/>
+          <a:p>
+            <a:pPr algn="ctr"/>
+          </a:p>
+        </p:txBody>
+      </p:sp>
+      <p:sp>
+        <p:nvSpPr>
+          <p:cNvPr id="30" name="TextBox 29"/>
+          <p:cNvSpPr txBox="1"/>
+          <p:nvPr/>
+        </p:nvSpPr>
+        <p:spPr>
+          <a:xfrm>
+            <a:off x="8250000" y="4114800"/>
+            <a:ext cx="457200" cy="457200"/>
+          </a:xfrm>
+          <a:prstGeom prst="rect">
+            <a:avLst/>
+          </a:prstGeom>
+          <a:noFill/>
+        </p:spPr>
+        <p:txBody>
+          <a:bodyPr wrap="none">
+            <a:spAutoFit/>
+          </a:bodyPr>
+          <a:lstStyle/>
+          <a:p>
+            <a:pPr algn="ctr">
+              <a:defRPr sz="1300" b="1">
+                <a:solidFill>
+                  <a:srgbClr val="FFFFFF"/>
+                </a:solidFill>
+                <a:latin typeface="Cambria"/>
+              </a:defRPr>
+            </a:pPr>
+            <a:r>
+              <a:t>PG</a:t>
+            </a:r>
+          </a:p>
+        </p:txBody>
+      </p:sp>
+      <p:sp>
+        <p:nvSpPr>
+          <p:cNvPr id="31" name="TextBox 30"/>
+          <p:cNvSpPr txBox="1"/>
+          <p:nvPr/>
+        </p:nvSpPr>
+        <p:spPr>
+          <a:xfrm>
+            <a:off x="8820000" y="4000000"/>
+            <a:ext cx="2850000" cy="1500000"/>
+          </a:xfrm>
+          <a:prstGeom prst="rect">
+            <a:avLst/>
+          </a:prstGeom>
+          <a:noFill/>
+        </p:spPr>
+        <p:txBody>
+          <a:bodyPr wrap="square">
+            <a:spAutoFit/>
+          </a:bodyPr>
+          <a:lstStyle/>
+          <a:p>
+            <a:pPr>
+              <a:defRPr sz="1000" b="1">
+                <a:solidFill>
+                  <a:srgbClr val="0F8B8D"/>
+                </a:solidFill>
+                <a:latin typeface="Calibri"/>
+              </a:defRPr>
+            </a:pPr>
+            <a:r>
+              <a:t>PROJECT SUPERVISION</a:t>
+            </a:r>
+          </a:p>
+          <a:p>
+            <a:pPr>
+              <a:spcBef>
+                <a:spcPts val="300"/>
+              </a:spcBef>
+            </a:pPr>
+            <a:r>
+              <a:rPr sz="1600" b="1">
+                <a:solidFill>
+                  <a:srgbClr val="FFFFFF"/>
+                </a:solidFill>
+                <a:latin typeface="Cambria"/>
+              </a:rPr>
+              <a:t>C.P. Navdeti</a:t>
+            </a:r>
+          </a:p>
+          <a:p>
+            <a:pPr>
+              <a:spcBef>
+                <a:spcPts val="400"/>
+              </a:spcBef>
+            </a:pPr>
+            <a:r>
+              <a:rPr sz="1100">
+                <a:solidFill>
+                  <a:srgbClr val="94A3B8"/>
+                </a:solidFill>
+                <a:latin typeface="Calibri"/>
+              </a:rPr>
+              <a:t>Project Guide  ·  Dept of IT</a:t>
+            </a:r>
+          </a:p>
+          <a:p>
+            <a:pPr>
+              <a:spcBef>
+                <a:spcPts val="200"/>
+              </a:spcBef>
+            </a:pPr>
+            <a:r>
+              <a:rPr sz="1100">
+                <a:solidFill>
+                  <a:srgbClr val="94A3B8"/>
+                </a:solidFill>
+                <a:latin typeface="Calibri"/>
+              </a:rPr>
+              <a:t>Evaluation Date: </a:t>
+            </a:r>
+            <a:r>
+              <a:rPr sz="1100" b="1">
+                <a:solidFill>
+                  <a:srgbClr val="0F8B8D"/>
+                </a:solidFill>
+                <a:latin typeface="Calibri"/>
+              </a:rPr>
+              <a:t>26 Sep 2026</a:t>
             </a:r>
           </a:p>
         </p:txBody>
